--- a/videos/machine-learning/03_ridger_regression_gradient_descent/recreated_pptx/slide_051_recreated.pptx
+++ b/videos/machine-learning/03_ridger_regression_gradient_descent/recreated_pptx/slide_051_recreated.pptx
@@ -1106,78 +1106,80 @@
           </a:p>
         </p:txBody>
       </p:sp>
-      <p:sp>
-        <p:nvSpPr>
-          <p:cNvPr id="10" name="Shape 8"/>
-          <p:cNvSpPr/>
-          <p:nvPr/>
-        </p:nvSpPr>
-        <p:spPr>
-          <a:xfrm>
-            <a:off x="1143000" y="990600"/>
-            <a:ext cx="0" cy="355600"/>
-          </a:xfrm>
-          <a:prstGeom prst="line">
-            <a:avLst/>
-          </a:prstGeom>
-          <a:noFill/>
-          <a:ln w="12700">
-            <a:solidFill>
-              <a:srgbClr val="000000"/>
-            </a:solidFill>
-            <a:prstDash val="solid"/>
-          </a:ln>
-        </p:spPr>
-      </p:sp>
-      <p:sp>
-        <p:nvSpPr>
-          <p:cNvPr id="11" name="Shape 9"/>
-          <p:cNvSpPr/>
-          <p:nvPr/>
-        </p:nvSpPr>
-        <p:spPr>
-          <a:xfrm>
-            <a:off x="1295400" y="990600"/>
-            <a:ext cx="0" cy="355600"/>
-          </a:xfrm>
-          <a:prstGeom prst="line">
-            <a:avLst/>
-          </a:prstGeom>
-          <a:noFill/>
-          <a:ln w="12700">
-            <a:solidFill>
-              <a:srgbClr val="000000"/>
-            </a:solidFill>
-            <a:prstDash val="solid"/>
-          </a:ln>
-        </p:spPr>
-      </p:sp>
-      <p:sp>
-        <p:nvSpPr>
-          <p:cNvPr id="12" name="Text 10"/>
-          <p:cNvSpPr/>
-          <p:nvPr/>
-        </p:nvSpPr>
-        <p:spPr>
-          <a:xfrm>
-            <a:off x="1143000" y="977900"/>
-            <a:ext cx="152400" cy="177800"/>
-          </a:xfrm>
-          <a:prstGeom prst="rect">
-            <a:avLst/>
-          </a:prstGeom>
-          <a:noFill/>
-          <a:ln/>
-        </p:spPr>
-        <p:txBody>
-          <a:bodyPr wrap="square" lIns="0" tIns="0" rIns="0" bIns="0" rtlCol="0" anchor="ctr"/>
-          <a:lstStyle/>
-          <a:p>
-            <a:pPr algn="ctr" indent="0" marL="0">
-              <a:buNone/>
-            </a:pPr>
-            <a:r>
-              <a:rPr lang="en-US" sz="1000" dirty="0">
+      <p:pic>
+        <p:nvPicPr>
+          <p:cNvPr id="10" name="Image 0" descr="/home/ahmed/Projects/ai_llm_slides/videos/machine-learning/03_ridger_regression_gradient_descent/recreated_pptx/build/assets/parens051/paren_sample51_lp.png">    </p:cNvPr>
+          <p:cNvPicPr>
+            <a:picLocks noChangeAspect="1"/>
+          </p:cNvPicPr>
+          <p:nvPr/>
+        </p:nvPicPr>
+        <p:blipFill>
+          <a:blip r:embed="rId1"/>
+          <a:stretch>
+            <a:fillRect/>
+          </a:stretch>
+        </p:blipFill>
+        <p:spPr>
+          <a:xfrm>
+            <a:off x="1114679" y="986028"/>
+            <a:ext cx="44196" cy="367284"/>
+          </a:xfrm>
+          <a:prstGeom prst="rect">
+            <a:avLst/>
+          </a:prstGeom>
+        </p:spPr>
+      </p:pic>
+      <p:pic>
+        <p:nvPicPr>
+          <p:cNvPr id="11" name="Image 1" descr="/home/ahmed/Projects/ai_llm_slides/videos/machine-learning/03_ridger_regression_gradient_descent/recreated_pptx/build/assets/parens051/paren_sample51_rp.png">    </p:cNvPr>
+          <p:cNvPicPr>
+            <a:picLocks noChangeAspect="1"/>
+          </p:cNvPicPr>
+          <p:nvPr/>
+        </p:nvPicPr>
+        <p:blipFill>
+          <a:blip r:embed="rId2"/>
+          <a:stretch>
+            <a:fillRect/>
+          </a:stretch>
+        </p:blipFill>
+        <p:spPr>
+          <a:xfrm>
+            <a:off x="1273175" y="986028"/>
+            <a:ext cx="44196" cy="367284"/>
+          </a:xfrm>
+          <a:prstGeom prst="rect">
+            <a:avLst/>
+          </a:prstGeom>
+        </p:spPr>
+      </p:pic>
+      <p:sp>
+        <p:nvSpPr>
+          <p:cNvPr id="12" name="Text 8"/>
+          <p:cNvSpPr/>
+          <p:nvPr/>
+        </p:nvSpPr>
+        <p:spPr>
+          <a:xfrm>
+            <a:off x="1117600" y="990600"/>
+            <a:ext cx="203200" cy="152400"/>
+          </a:xfrm>
+          <a:prstGeom prst="rect">
+            <a:avLst/>
+          </a:prstGeom>
+          <a:noFill/>
+          <a:ln/>
+        </p:spPr>
+        <p:txBody>
+          <a:bodyPr wrap="square" lIns="0" tIns="0" rIns="0" bIns="0" rtlCol="0" anchor="ctr"/>
+          <a:lstStyle/>
+          <a:p>
+            <a:pPr algn="ctr" indent="0" marL="0">
+              <a:buNone/>
+            </a:pPr>
+            <a:r>
+              <a:rPr lang="en-US" sz="1100" dirty="0">
                 <a:solidFill>
                   <a:srgbClr val="000000"/>
                 </a:solidFill>
@@ -1187,36 +1189,36 @@
               </a:rPr>
               <a:t>1</a:t>
             </a:r>
-            <a:endParaRPr lang="en-US" sz="1000" dirty="0"/>
-          </a:p>
-        </p:txBody>
-      </p:sp>
-      <p:sp>
-        <p:nvSpPr>
-          <p:cNvPr id="13" name="Text 11"/>
-          <p:cNvSpPr/>
-          <p:nvPr/>
-        </p:nvSpPr>
-        <p:spPr>
-          <a:xfrm>
-            <a:off x="1143000" y="1181100"/>
-            <a:ext cx="152400" cy="177800"/>
-          </a:xfrm>
-          <a:prstGeom prst="rect">
-            <a:avLst/>
-          </a:prstGeom>
-          <a:noFill/>
-          <a:ln/>
-        </p:spPr>
-        <p:txBody>
-          <a:bodyPr wrap="square" lIns="0" tIns="0" rIns="0" bIns="0" rtlCol="0" anchor="ctr"/>
-          <a:lstStyle/>
-          <a:p>
-            <a:pPr algn="ctr" indent="0" marL="0">
-              <a:buNone/>
-            </a:pPr>
-            <a:r>
-              <a:rPr lang="en-US" sz="1000" dirty="0">
+            <a:endParaRPr lang="en-US" sz="1100" dirty="0"/>
+          </a:p>
+        </p:txBody>
+      </p:sp>
+      <p:sp>
+        <p:nvSpPr>
+          <p:cNvPr id="13" name="Text 9"/>
+          <p:cNvSpPr/>
+          <p:nvPr/>
+        </p:nvSpPr>
+        <p:spPr>
+          <a:xfrm>
+            <a:off x="1117600" y="1193800"/>
+            <a:ext cx="203200" cy="152400"/>
+          </a:xfrm>
+          <a:prstGeom prst="rect">
+            <a:avLst/>
+          </a:prstGeom>
+          <a:noFill/>
+          <a:ln/>
+        </p:spPr>
+        <p:txBody>
+          <a:bodyPr wrap="square" lIns="0" tIns="0" rIns="0" bIns="0" rtlCol="0" anchor="ctr"/>
+          <a:lstStyle/>
+          <a:p>
+            <a:pPr algn="ctr" indent="0" marL="0">
+              <a:buNone/>
+            </a:pPr>
+            <a:r>
+              <a:rPr lang="en-US" sz="1100" dirty="0">
                 <a:solidFill>
                   <a:srgbClr val="000000"/>
                 </a:solidFill>
@@ -1226,13 +1228,13 @@
               </a:rPr>
               <a:t>1</a:t>
             </a:r>
-            <a:endParaRPr lang="en-US" sz="1000" dirty="0"/>
-          </a:p>
-        </p:txBody>
-      </p:sp>
-      <p:sp>
-        <p:nvSpPr>
-          <p:cNvPr id="14" name="Text 12"/>
+            <a:endParaRPr lang="en-US" sz="1100" dirty="0"/>
+          </a:p>
+        </p:txBody>
+      </p:sp>
+      <p:sp>
+        <p:nvSpPr>
+          <p:cNvPr id="14" name="Text 10"/>
           <p:cNvSpPr/>
           <p:nvPr/>
         </p:nvSpPr>
@@ -1285,7 +1287,7 @@
       </p:sp>
       <p:sp>
         <p:nvSpPr>
-          <p:cNvPr id="15" name="Text 13"/>
+          <p:cNvPr id="15" name="Text 11"/>
           <p:cNvSpPr/>
           <p:nvPr/>
         </p:nvSpPr>
@@ -1336,78 +1338,80 @@
           </a:p>
         </p:txBody>
       </p:sp>
-      <p:sp>
-        <p:nvSpPr>
-          <p:cNvPr id="16" name="Shape 14"/>
-          <p:cNvSpPr/>
-          <p:nvPr/>
-        </p:nvSpPr>
-        <p:spPr>
-          <a:xfrm>
-            <a:off x="1409700" y="990600"/>
-            <a:ext cx="0" cy="355600"/>
-          </a:xfrm>
-          <a:prstGeom prst="line">
-            <a:avLst/>
-          </a:prstGeom>
-          <a:noFill/>
-          <a:ln w="12700">
-            <a:solidFill>
-              <a:srgbClr val="000000"/>
-            </a:solidFill>
-            <a:prstDash val="solid"/>
-          </a:ln>
-        </p:spPr>
-      </p:sp>
-      <p:sp>
-        <p:nvSpPr>
-          <p:cNvPr id="17" name="Shape 15"/>
-          <p:cNvSpPr/>
-          <p:nvPr/>
-        </p:nvSpPr>
-        <p:spPr>
-          <a:xfrm>
-            <a:off x="1574800" y="990600"/>
-            <a:ext cx="0" cy="355600"/>
-          </a:xfrm>
-          <a:prstGeom prst="line">
-            <a:avLst/>
-          </a:prstGeom>
-          <a:noFill/>
-          <a:ln w="12700">
-            <a:solidFill>
-              <a:srgbClr val="000000"/>
-            </a:solidFill>
-            <a:prstDash val="solid"/>
-          </a:ln>
-        </p:spPr>
-      </p:sp>
-      <p:sp>
-        <p:nvSpPr>
-          <p:cNvPr id="18" name="Text 16"/>
-          <p:cNvSpPr/>
-          <p:nvPr/>
-        </p:nvSpPr>
-        <p:spPr>
-          <a:xfrm>
-            <a:off x="1409700" y="977900"/>
-            <a:ext cx="165100" cy="177800"/>
-          </a:xfrm>
-          <a:prstGeom prst="rect">
-            <a:avLst/>
-          </a:prstGeom>
-          <a:noFill/>
-          <a:ln/>
-        </p:spPr>
-        <p:txBody>
-          <a:bodyPr wrap="square" lIns="0" tIns="0" rIns="0" bIns="0" rtlCol="0" anchor="ctr"/>
-          <a:lstStyle/>
-          <a:p>
-            <a:pPr algn="ctr" indent="0" marL="0">
-              <a:buNone/>
-            </a:pPr>
-            <a:r>
-              <a:rPr lang="en-US" sz="1000" dirty="0">
+      <p:pic>
+        <p:nvPicPr>
+          <p:cNvPr id="16" name="Image 2" descr="/home/ahmed/Projects/ai_llm_slides/videos/machine-learning/03_ridger_regression_gradient_descent/recreated_pptx/build/assets/parens051/paren_sample51_lp.png">    </p:cNvPr>
+          <p:cNvPicPr>
+            <a:picLocks noChangeAspect="1"/>
+          </p:cNvPicPr>
+          <p:nvPr/>
+        </p:nvPicPr>
+        <p:blipFill>
+          <a:blip r:embed="rId3"/>
+          <a:stretch>
+            <a:fillRect/>
+          </a:stretch>
+        </p:blipFill>
+        <p:spPr>
+          <a:xfrm>
+            <a:off x="1394079" y="986028"/>
+            <a:ext cx="44196" cy="367284"/>
+          </a:xfrm>
+          <a:prstGeom prst="rect">
+            <a:avLst/>
+          </a:prstGeom>
+        </p:spPr>
+      </p:pic>
+      <p:pic>
+        <p:nvPicPr>
+          <p:cNvPr id="17" name="Image 3" descr="/home/ahmed/Projects/ai_llm_slides/videos/machine-learning/03_ridger_regression_gradient_descent/recreated_pptx/build/assets/parens051/paren_sample51_rp.png">    </p:cNvPr>
+          <p:cNvPicPr>
+            <a:picLocks noChangeAspect="1"/>
+          </p:cNvPicPr>
+          <p:nvPr/>
+        </p:nvPicPr>
+        <p:blipFill>
+          <a:blip r:embed="rId4"/>
+          <a:stretch>
+            <a:fillRect/>
+          </a:stretch>
+        </p:blipFill>
+        <p:spPr>
+          <a:xfrm>
+            <a:off x="1552575" y="986028"/>
+            <a:ext cx="44196" cy="367284"/>
+          </a:xfrm>
+          <a:prstGeom prst="rect">
+            <a:avLst/>
+          </a:prstGeom>
+        </p:spPr>
+      </p:pic>
+      <p:sp>
+        <p:nvSpPr>
+          <p:cNvPr id="18" name="Text 12"/>
+          <p:cNvSpPr/>
+          <p:nvPr/>
+        </p:nvSpPr>
+        <p:spPr>
+          <a:xfrm>
+            <a:off x="1390650" y="990600"/>
+            <a:ext cx="203200" cy="152400"/>
+          </a:xfrm>
+          <a:prstGeom prst="rect">
+            <a:avLst/>
+          </a:prstGeom>
+          <a:noFill/>
+          <a:ln/>
+        </p:spPr>
+        <p:txBody>
+          <a:bodyPr wrap="square" lIns="0" tIns="0" rIns="0" bIns="0" rtlCol="0" anchor="ctr"/>
+          <a:lstStyle/>
+          <a:p>
+            <a:pPr algn="ctr" indent="0" marL="0">
+              <a:buNone/>
+            </a:pPr>
+            <a:r>
+              <a:rPr lang="en-US" sz="1100" dirty="0">
                 <a:solidFill>
                   <a:srgbClr val="000000"/>
                 </a:solidFill>
@@ -1417,36 +1421,36 @@
               </a:rPr>
               <a:t>2</a:t>
             </a:r>
-            <a:endParaRPr lang="en-US" sz="1000" dirty="0"/>
-          </a:p>
-        </p:txBody>
-      </p:sp>
-      <p:sp>
-        <p:nvSpPr>
-          <p:cNvPr id="19" name="Text 17"/>
-          <p:cNvSpPr/>
-          <p:nvPr/>
-        </p:nvSpPr>
-        <p:spPr>
-          <a:xfrm>
-            <a:off x="1409700" y="1181100"/>
-            <a:ext cx="165100" cy="177800"/>
-          </a:xfrm>
-          <a:prstGeom prst="rect">
-            <a:avLst/>
-          </a:prstGeom>
-          <a:noFill/>
-          <a:ln/>
-        </p:spPr>
-        <p:txBody>
-          <a:bodyPr wrap="square" lIns="0" tIns="0" rIns="0" bIns="0" rtlCol="0" anchor="ctr"/>
-          <a:lstStyle/>
-          <a:p>
-            <a:pPr algn="ctr" indent="0" marL="0">
-              <a:buNone/>
-            </a:pPr>
-            <a:r>
-              <a:rPr lang="en-US" sz="1000" dirty="0">
+            <a:endParaRPr lang="en-US" sz="1100" dirty="0"/>
+          </a:p>
+        </p:txBody>
+      </p:sp>
+      <p:sp>
+        <p:nvSpPr>
+          <p:cNvPr id="19" name="Text 13"/>
+          <p:cNvSpPr/>
+          <p:nvPr/>
+        </p:nvSpPr>
+        <p:spPr>
+          <a:xfrm>
+            <a:off x="1390650" y="1193800"/>
+            <a:ext cx="203200" cy="152400"/>
+          </a:xfrm>
+          <a:prstGeom prst="rect">
+            <a:avLst/>
+          </a:prstGeom>
+          <a:noFill/>
+          <a:ln/>
+        </p:spPr>
+        <p:txBody>
+          <a:bodyPr wrap="square" lIns="0" tIns="0" rIns="0" bIns="0" rtlCol="0" anchor="ctr"/>
+          <a:lstStyle/>
+          <a:p>
+            <a:pPr algn="ctr" indent="0" marL="0">
+              <a:buNone/>
+            </a:pPr>
+            <a:r>
+              <a:rPr lang="en-US" sz="1100" dirty="0">
                 <a:solidFill>
                   <a:srgbClr val="000000"/>
                 </a:solidFill>
@@ -1456,13 +1460,13 @@
               </a:rPr>
               <a:t>1</a:t>
             </a:r>
-            <a:endParaRPr lang="en-US" sz="1000" dirty="0"/>
-          </a:p>
-        </p:txBody>
-      </p:sp>
-      <p:sp>
-        <p:nvSpPr>
-          <p:cNvPr id="20" name="Text 18"/>
+            <a:endParaRPr lang="en-US" sz="1100" dirty="0"/>
+          </a:p>
+        </p:txBody>
+      </p:sp>
+      <p:sp>
+        <p:nvSpPr>
+          <p:cNvPr id="20" name="Text 14"/>
           <p:cNvSpPr/>
           <p:nvPr/>
         </p:nvSpPr>
@@ -1515,7 +1519,7 @@
       </p:sp>
       <p:sp>
         <p:nvSpPr>
-          <p:cNvPr id="21" name="Text 19"/>
+          <p:cNvPr id="21" name="Text 15"/>
           <p:cNvSpPr/>
           <p:nvPr/>
         </p:nvSpPr>
@@ -1566,78 +1570,80 @@
           </a:p>
         </p:txBody>
       </p:sp>
-      <p:sp>
-        <p:nvSpPr>
-          <p:cNvPr id="22" name="Shape 20"/>
-          <p:cNvSpPr/>
-          <p:nvPr/>
-        </p:nvSpPr>
-        <p:spPr>
-          <a:xfrm>
-            <a:off x="1701800" y="990600"/>
-            <a:ext cx="0" cy="355600"/>
-          </a:xfrm>
-          <a:prstGeom prst="line">
-            <a:avLst/>
-          </a:prstGeom>
-          <a:noFill/>
-          <a:ln w="12700">
-            <a:solidFill>
-              <a:srgbClr val="000000"/>
-            </a:solidFill>
-            <a:prstDash val="solid"/>
-          </a:ln>
-        </p:spPr>
-      </p:sp>
-      <p:sp>
-        <p:nvSpPr>
-          <p:cNvPr id="23" name="Shape 21"/>
-          <p:cNvSpPr/>
-          <p:nvPr/>
-        </p:nvSpPr>
-        <p:spPr>
-          <a:xfrm>
-            <a:off x="1866900" y="990600"/>
-            <a:ext cx="0" cy="355600"/>
-          </a:xfrm>
-          <a:prstGeom prst="line">
-            <a:avLst/>
-          </a:prstGeom>
-          <a:noFill/>
-          <a:ln w="12700">
-            <a:solidFill>
-              <a:srgbClr val="000000"/>
-            </a:solidFill>
-            <a:prstDash val="solid"/>
-          </a:ln>
-        </p:spPr>
-      </p:sp>
-      <p:sp>
-        <p:nvSpPr>
-          <p:cNvPr id="24" name="Text 22"/>
-          <p:cNvSpPr/>
-          <p:nvPr/>
-        </p:nvSpPr>
-        <p:spPr>
-          <a:xfrm>
-            <a:off x="1701800" y="977900"/>
-            <a:ext cx="165100" cy="177800"/>
-          </a:xfrm>
-          <a:prstGeom prst="rect">
-            <a:avLst/>
-          </a:prstGeom>
-          <a:noFill/>
-          <a:ln/>
-        </p:spPr>
-        <p:txBody>
-          <a:bodyPr wrap="square" lIns="0" tIns="0" rIns="0" bIns="0" rtlCol="0" anchor="ctr"/>
-          <a:lstStyle/>
-          <a:p>
-            <a:pPr algn="ctr" indent="0" marL="0">
-              <a:buNone/>
-            </a:pPr>
-            <a:r>
-              <a:rPr lang="en-US" sz="1000" dirty="0">
+      <p:pic>
+        <p:nvPicPr>
+          <p:cNvPr id="22" name="Image 4" descr="/home/ahmed/Projects/ai_llm_slides/videos/machine-learning/03_ridger_regression_gradient_descent/recreated_pptx/build/assets/parens051/paren_sample51_lp.png">    </p:cNvPr>
+          <p:cNvPicPr>
+            <a:picLocks noChangeAspect="1"/>
+          </p:cNvPicPr>
+          <p:nvPr/>
+        </p:nvPicPr>
+        <p:blipFill>
+          <a:blip r:embed="rId5"/>
+          <a:stretch>
+            <a:fillRect/>
+          </a:stretch>
+        </p:blipFill>
+        <p:spPr>
+          <a:xfrm>
+            <a:off x="1673479" y="986028"/>
+            <a:ext cx="44196" cy="367284"/>
+          </a:xfrm>
+          <a:prstGeom prst="rect">
+            <a:avLst/>
+          </a:prstGeom>
+        </p:spPr>
+      </p:pic>
+      <p:pic>
+        <p:nvPicPr>
+          <p:cNvPr id="23" name="Image 5" descr="/home/ahmed/Projects/ai_llm_slides/videos/machine-learning/03_ridger_regression_gradient_descent/recreated_pptx/build/assets/parens051/paren_sample51_rp.png">    </p:cNvPr>
+          <p:cNvPicPr>
+            <a:picLocks noChangeAspect="1"/>
+          </p:cNvPicPr>
+          <p:nvPr/>
+        </p:nvPicPr>
+        <p:blipFill>
+          <a:blip r:embed="rId6"/>
+          <a:stretch>
+            <a:fillRect/>
+          </a:stretch>
+        </p:blipFill>
+        <p:spPr>
+          <a:xfrm>
+            <a:off x="1844675" y="986028"/>
+            <a:ext cx="44196" cy="367284"/>
+          </a:xfrm>
+          <a:prstGeom prst="rect">
+            <a:avLst/>
+          </a:prstGeom>
+        </p:spPr>
+      </p:pic>
+      <p:sp>
+        <p:nvSpPr>
+          <p:cNvPr id="24" name="Text 16"/>
+          <p:cNvSpPr/>
+          <p:nvPr/>
+        </p:nvSpPr>
+        <p:spPr>
+          <a:xfrm>
+            <a:off x="1682750" y="990600"/>
+            <a:ext cx="203200" cy="152400"/>
+          </a:xfrm>
+          <a:prstGeom prst="rect">
+            <a:avLst/>
+          </a:prstGeom>
+          <a:noFill/>
+          <a:ln/>
+        </p:spPr>
+        <p:txBody>
+          <a:bodyPr wrap="square" lIns="0" tIns="0" rIns="0" bIns="0" rtlCol="0" anchor="ctr"/>
+          <a:lstStyle/>
+          <a:p>
+            <a:pPr algn="ctr" indent="0" marL="0">
+              <a:buNone/>
+            </a:pPr>
+            <a:r>
+              <a:rPr lang="en-US" sz="1100" dirty="0">
                 <a:solidFill>
                   <a:srgbClr val="000000"/>
                 </a:solidFill>
@@ -1647,36 +1653,36 @@
               </a:rPr>
               <a:t>1</a:t>
             </a:r>
-            <a:endParaRPr lang="en-US" sz="1000" dirty="0"/>
-          </a:p>
-        </p:txBody>
-      </p:sp>
-      <p:sp>
-        <p:nvSpPr>
-          <p:cNvPr id="25" name="Text 23"/>
-          <p:cNvSpPr/>
-          <p:nvPr/>
-        </p:nvSpPr>
-        <p:spPr>
-          <a:xfrm>
-            <a:off x="1701800" y="1181100"/>
-            <a:ext cx="165100" cy="177800"/>
-          </a:xfrm>
-          <a:prstGeom prst="rect">
-            <a:avLst/>
-          </a:prstGeom>
-          <a:noFill/>
-          <a:ln/>
-        </p:spPr>
-        <p:txBody>
-          <a:bodyPr wrap="square" lIns="0" tIns="0" rIns="0" bIns="0" rtlCol="0" anchor="ctr"/>
-          <a:lstStyle/>
-          <a:p>
-            <a:pPr algn="ctr" indent="0" marL="0">
-              <a:buNone/>
-            </a:pPr>
-            <a:r>
-              <a:rPr lang="en-US" sz="1000" dirty="0">
+            <a:endParaRPr lang="en-US" sz="1100" dirty="0"/>
+          </a:p>
+        </p:txBody>
+      </p:sp>
+      <p:sp>
+        <p:nvSpPr>
+          <p:cNvPr id="25" name="Text 17"/>
+          <p:cNvSpPr/>
+          <p:nvPr/>
+        </p:nvSpPr>
+        <p:spPr>
+          <a:xfrm>
+            <a:off x="1682750" y="1193800"/>
+            <a:ext cx="203200" cy="152400"/>
+          </a:xfrm>
+          <a:prstGeom prst="rect">
+            <a:avLst/>
+          </a:prstGeom>
+          <a:noFill/>
+          <a:ln/>
+        </p:spPr>
+        <p:txBody>
+          <a:bodyPr wrap="square" lIns="0" tIns="0" rIns="0" bIns="0" rtlCol="0" anchor="ctr"/>
+          <a:lstStyle/>
+          <a:p>
+            <a:pPr algn="ctr" indent="0" marL="0">
+              <a:buNone/>
+            </a:pPr>
+            <a:r>
+              <a:rPr lang="en-US" sz="1100" dirty="0">
                 <a:solidFill>
                   <a:srgbClr val="000000"/>
                 </a:solidFill>
@@ -1686,13 +1692,13 @@
               </a:rPr>
               <a:t>2</a:t>
             </a:r>
-            <a:endParaRPr lang="en-US" sz="1000" dirty="0"/>
-          </a:p>
-        </p:txBody>
-      </p:sp>
-      <p:sp>
-        <p:nvSpPr>
-          <p:cNvPr id="26" name="Text 24"/>
+            <a:endParaRPr lang="en-US" sz="1100" dirty="0"/>
+          </a:p>
+        </p:txBody>
+      </p:sp>
+      <p:sp>
+        <p:nvSpPr>
+          <p:cNvPr id="26" name="Text 18"/>
           <p:cNvSpPr/>
           <p:nvPr/>
         </p:nvSpPr>
@@ -1745,7 +1751,7 @@
       </p:sp>
       <p:sp>
         <p:nvSpPr>
-          <p:cNvPr id="27" name="Text 25"/>
+          <p:cNvPr id="27" name="Text 19"/>
           <p:cNvSpPr/>
           <p:nvPr/>
         </p:nvSpPr>
@@ -1796,78 +1802,80 @@
           </a:p>
         </p:txBody>
       </p:sp>
-      <p:sp>
-        <p:nvSpPr>
-          <p:cNvPr id="28" name="Shape 26"/>
-          <p:cNvSpPr/>
-          <p:nvPr/>
-        </p:nvSpPr>
-        <p:spPr>
-          <a:xfrm>
-            <a:off x="1981200" y="990600"/>
-            <a:ext cx="0" cy="355600"/>
-          </a:xfrm>
-          <a:prstGeom prst="line">
-            <a:avLst/>
-          </a:prstGeom>
-          <a:noFill/>
-          <a:ln w="12700">
-            <a:solidFill>
-              <a:srgbClr val="000000"/>
-            </a:solidFill>
-            <a:prstDash val="solid"/>
-          </a:ln>
-        </p:spPr>
-      </p:sp>
-      <p:sp>
-        <p:nvSpPr>
-          <p:cNvPr id="29" name="Shape 27"/>
-          <p:cNvSpPr/>
-          <p:nvPr/>
-        </p:nvSpPr>
-        <p:spPr>
-          <a:xfrm>
-            <a:off x="2159000" y="990600"/>
-            <a:ext cx="0" cy="355600"/>
-          </a:xfrm>
-          <a:prstGeom prst="line">
-            <a:avLst/>
-          </a:prstGeom>
-          <a:noFill/>
-          <a:ln w="12700">
-            <a:solidFill>
-              <a:srgbClr val="000000"/>
-            </a:solidFill>
-            <a:prstDash val="solid"/>
-          </a:ln>
-        </p:spPr>
-      </p:sp>
-      <p:sp>
-        <p:nvSpPr>
-          <p:cNvPr id="30" name="Text 28"/>
-          <p:cNvSpPr/>
-          <p:nvPr/>
-        </p:nvSpPr>
-        <p:spPr>
-          <a:xfrm>
-            <a:off x="1981200" y="977900"/>
-            <a:ext cx="177800" cy="177800"/>
-          </a:xfrm>
-          <a:prstGeom prst="rect">
-            <a:avLst/>
-          </a:prstGeom>
-          <a:noFill/>
-          <a:ln/>
-        </p:spPr>
-        <p:txBody>
-          <a:bodyPr wrap="square" lIns="0" tIns="0" rIns="0" bIns="0" rtlCol="0" anchor="ctr"/>
-          <a:lstStyle/>
-          <a:p>
-            <a:pPr algn="ctr" indent="0" marL="0">
-              <a:buNone/>
-            </a:pPr>
-            <a:r>
-              <a:rPr lang="en-US" sz="1000" dirty="0">
+      <p:pic>
+        <p:nvPicPr>
+          <p:cNvPr id="28" name="Image 6" descr="/home/ahmed/Projects/ai_llm_slides/videos/machine-learning/03_ridger_regression_gradient_descent/recreated_pptx/build/assets/parens051/paren_sample51_lp.png">    </p:cNvPr>
+          <p:cNvPicPr>
+            <a:picLocks noChangeAspect="1"/>
+          </p:cNvPicPr>
+          <p:nvPr/>
+        </p:nvPicPr>
+        <p:blipFill>
+          <a:blip r:embed="rId7"/>
+          <a:stretch>
+            <a:fillRect/>
+          </a:stretch>
+        </p:blipFill>
+        <p:spPr>
+          <a:xfrm>
+            <a:off x="1965579" y="986028"/>
+            <a:ext cx="44196" cy="367284"/>
+          </a:xfrm>
+          <a:prstGeom prst="rect">
+            <a:avLst/>
+          </a:prstGeom>
+        </p:spPr>
+      </p:pic>
+      <p:pic>
+        <p:nvPicPr>
+          <p:cNvPr id="29" name="Image 7" descr="/home/ahmed/Projects/ai_llm_slides/videos/machine-learning/03_ridger_regression_gradient_descent/recreated_pptx/build/assets/parens051/paren_sample51_rp.png">    </p:cNvPr>
+          <p:cNvPicPr>
+            <a:picLocks noChangeAspect="1"/>
+          </p:cNvPicPr>
+          <p:nvPr/>
+        </p:nvPicPr>
+        <p:blipFill>
+          <a:blip r:embed="rId8"/>
+          <a:stretch>
+            <a:fillRect/>
+          </a:stretch>
+        </p:blipFill>
+        <p:spPr>
+          <a:xfrm>
+            <a:off x="2136775" y="986028"/>
+            <a:ext cx="44196" cy="367284"/>
+          </a:xfrm>
+          <a:prstGeom prst="rect">
+            <a:avLst/>
+          </a:prstGeom>
+        </p:spPr>
+      </p:pic>
+      <p:sp>
+        <p:nvSpPr>
+          <p:cNvPr id="30" name="Text 20"/>
+          <p:cNvSpPr/>
+          <p:nvPr/>
+        </p:nvSpPr>
+        <p:spPr>
+          <a:xfrm>
+            <a:off x="1968500" y="990600"/>
+            <a:ext cx="203200" cy="152400"/>
+          </a:xfrm>
+          <a:prstGeom prst="rect">
+            <a:avLst/>
+          </a:prstGeom>
+          <a:noFill/>
+          <a:ln/>
+        </p:spPr>
+        <p:txBody>
+          <a:bodyPr wrap="square" lIns="0" tIns="0" rIns="0" bIns="0" rtlCol="0" anchor="ctr"/>
+          <a:lstStyle/>
+          <a:p>
+            <a:pPr algn="ctr" indent="0" marL="0">
+              <a:buNone/>
+            </a:pPr>
+            <a:r>
+              <a:rPr lang="en-US" sz="1100" dirty="0">
                 <a:solidFill>
                   <a:srgbClr val="000000"/>
                 </a:solidFill>
@@ -1877,36 +1885,36 @@
               </a:rPr>
               <a:t>5</a:t>
             </a:r>
-            <a:endParaRPr lang="en-US" sz="1000" dirty="0"/>
-          </a:p>
-        </p:txBody>
-      </p:sp>
-      <p:sp>
-        <p:nvSpPr>
-          <p:cNvPr id="31" name="Text 29"/>
-          <p:cNvSpPr/>
-          <p:nvPr/>
-        </p:nvSpPr>
-        <p:spPr>
-          <a:xfrm>
-            <a:off x="1981200" y="1181100"/>
-            <a:ext cx="177800" cy="177800"/>
-          </a:xfrm>
-          <a:prstGeom prst="rect">
-            <a:avLst/>
-          </a:prstGeom>
-          <a:noFill/>
-          <a:ln/>
-        </p:spPr>
-        <p:txBody>
-          <a:bodyPr wrap="square" lIns="0" tIns="0" rIns="0" bIns="0" rtlCol="0" anchor="ctr"/>
-          <a:lstStyle/>
-          <a:p>
-            <a:pPr algn="ctr" indent="0" marL="0">
-              <a:buNone/>
-            </a:pPr>
-            <a:r>
-              <a:rPr lang="en-US" sz="1000" dirty="0">
+            <a:endParaRPr lang="en-US" sz="1100" dirty="0"/>
+          </a:p>
+        </p:txBody>
+      </p:sp>
+      <p:sp>
+        <p:nvSpPr>
+          <p:cNvPr id="31" name="Text 21"/>
+          <p:cNvSpPr/>
+          <p:nvPr/>
+        </p:nvSpPr>
+        <p:spPr>
+          <a:xfrm>
+            <a:off x="1968500" y="1193800"/>
+            <a:ext cx="203200" cy="152400"/>
+          </a:xfrm>
+          <a:prstGeom prst="rect">
+            <a:avLst/>
+          </a:prstGeom>
+          <a:noFill/>
+          <a:ln/>
+        </p:spPr>
+        <p:txBody>
+          <a:bodyPr wrap="square" lIns="0" tIns="0" rIns="0" bIns="0" rtlCol="0" anchor="ctr"/>
+          <a:lstStyle/>
+          <a:p>
+            <a:pPr algn="ctr" indent="0" marL="0">
+              <a:buNone/>
+            </a:pPr>
+            <a:r>
+              <a:rPr lang="en-US" sz="1100" dirty="0">
                 <a:solidFill>
                   <a:srgbClr val="000000"/>
                 </a:solidFill>
@@ -1916,13 +1924,13 @@
               </a:rPr>
               <a:t>4</a:t>
             </a:r>
-            <a:endParaRPr lang="en-US" sz="1000" dirty="0"/>
-          </a:p>
-        </p:txBody>
-      </p:sp>
-      <p:sp>
-        <p:nvSpPr>
-          <p:cNvPr id="32" name="Text 30"/>
+            <a:endParaRPr lang="en-US" sz="1100" dirty="0"/>
+          </a:p>
+        </p:txBody>
+      </p:sp>
+      <p:sp>
+        <p:nvSpPr>
+          <p:cNvPr id="32" name="Text 22"/>
           <p:cNvSpPr/>
           <p:nvPr/>
         </p:nvSpPr>
@@ -1975,7 +1983,7 @@
       </p:sp>
       <p:sp>
         <p:nvSpPr>
-          <p:cNvPr id="33" name="Text 31"/>
+          <p:cNvPr id="33" name="Text 23"/>
           <p:cNvSpPr/>
           <p:nvPr/>
         </p:nvSpPr>
@@ -2026,78 +2034,80 @@
           </a:p>
         </p:txBody>
       </p:sp>
-      <p:sp>
-        <p:nvSpPr>
-          <p:cNvPr id="34" name="Shape 32"/>
-          <p:cNvSpPr/>
-          <p:nvPr/>
-        </p:nvSpPr>
-        <p:spPr>
-          <a:xfrm>
-            <a:off x="2273300" y="990600"/>
-            <a:ext cx="0" cy="355600"/>
-          </a:xfrm>
-          <a:prstGeom prst="line">
-            <a:avLst/>
-          </a:prstGeom>
-          <a:noFill/>
-          <a:ln w="12700">
-            <a:solidFill>
-              <a:srgbClr val="000000"/>
-            </a:solidFill>
-            <a:prstDash val="solid"/>
-          </a:ln>
-        </p:spPr>
-      </p:sp>
-      <p:sp>
-        <p:nvSpPr>
-          <p:cNvPr id="35" name="Shape 33"/>
-          <p:cNvSpPr/>
-          <p:nvPr/>
-        </p:nvSpPr>
-        <p:spPr>
-          <a:xfrm>
-            <a:off x="2438400" y="990600"/>
-            <a:ext cx="0" cy="355600"/>
-          </a:xfrm>
-          <a:prstGeom prst="line">
-            <a:avLst/>
-          </a:prstGeom>
-          <a:noFill/>
-          <a:ln w="12700">
-            <a:solidFill>
-              <a:srgbClr val="000000"/>
-            </a:solidFill>
-            <a:prstDash val="solid"/>
-          </a:ln>
-        </p:spPr>
-      </p:sp>
-      <p:sp>
-        <p:nvSpPr>
-          <p:cNvPr id="36" name="Text 34"/>
-          <p:cNvSpPr/>
-          <p:nvPr/>
-        </p:nvSpPr>
-        <p:spPr>
-          <a:xfrm>
-            <a:off x="2273300" y="977900"/>
-            <a:ext cx="165100" cy="177800"/>
-          </a:xfrm>
-          <a:prstGeom prst="rect">
-            <a:avLst/>
-          </a:prstGeom>
-          <a:noFill/>
-          <a:ln/>
-        </p:spPr>
-        <p:txBody>
-          <a:bodyPr wrap="square" lIns="0" tIns="0" rIns="0" bIns="0" rtlCol="0" anchor="ctr"/>
-          <a:lstStyle/>
-          <a:p>
-            <a:pPr algn="ctr" indent="0" marL="0">
-              <a:buNone/>
-            </a:pPr>
-            <a:r>
-              <a:rPr lang="en-US" sz="1000" dirty="0">
+      <p:pic>
+        <p:nvPicPr>
+          <p:cNvPr id="34" name="Image 8" descr="/home/ahmed/Projects/ai_llm_slides/videos/machine-learning/03_ridger_regression_gradient_descent/recreated_pptx/build/assets/parens051/paren_sample51_lp.png">    </p:cNvPr>
+          <p:cNvPicPr>
+            <a:picLocks noChangeAspect="1"/>
+          </p:cNvPicPr>
+          <p:nvPr/>
+        </p:nvPicPr>
+        <p:blipFill>
+          <a:blip r:embed="rId9"/>
+          <a:stretch>
+            <a:fillRect/>
+          </a:stretch>
+        </p:blipFill>
+        <p:spPr>
+          <a:xfrm>
+            <a:off x="2257679" y="986028"/>
+            <a:ext cx="44196" cy="367284"/>
+          </a:xfrm>
+          <a:prstGeom prst="rect">
+            <a:avLst/>
+          </a:prstGeom>
+        </p:spPr>
+      </p:pic>
+      <p:pic>
+        <p:nvPicPr>
+          <p:cNvPr id="35" name="Image 9" descr="/home/ahmed/Projects/ai_llm_slides/videos/machine-learning/03_ridger_regression_gradient_descent/recreated_pptx/build/assets/parens051/paren_sample51_rp.png">    </p:cNvPr>
+          <p:cNvPicPr>
+            <a:picLocks noChangeAspect="1"/>
+          </p:cNvPicPr>
+          <p:nvPr/>
+        </p:nvPicPr>
+        <p:blipFill>
+          <a:blip r:embed="rId10"/>
+          <a:stretch>
+            <a:fillRect/>
+          </a:stretch>
+        </p:blipFill>
+        <p:spPr>
+          <a:xfrm>
+            <a:off x="2416175" y="986028"/>
+            <a:ext cx="44196" cy="367284"/>
+          </a:xfrm>
+          <a:prstGeom prst="rect">
+            <a:avLst/>
+          </a:prstGeom>
+        </p:spPr>
+      </p:pic>
+      <p:sp>
+        <p:nvSpPr>
+          <p:cNvPr id="36" name="Text 24"/>
+          <p:cNvSpPr/>
+          <p:nvPr/>
+        </p:nvSpPr>
+        <p:spPr>
+          <a:xfrm>
+            <a:off x="2254250" y="990600"/>
+            <a:ext cx="203200" cy="152400"/>
+          </a:xfrm>
+          <a:prstGeom prst="rect">
+            <a:avLst/>
+          </a:prstGeom>
+          <a:noFill/>
+          <a:ln/>
+        </p:spPr>
+        <p:txBody>
+          <a:bodyPr wrap="square" lIns="0" tIns="0" rIns="0" bIns="0" rtlCol="0" anchor="ctr"/>
+          <a:lstStyle/>
+          <a:p>
+            <a:pPr algn="ctr" indent="0" marL="0">
+              <a:buNone/>
+            </a:pPr>
+            <a:r>
+              <a:rPr lang="en-US" sz="1100" dirty="0">
                 <a:solidFill>
                   <a:srgbClr val="000000"/>
                 </a:solidFill>
@@ -2107,36 +2117,36 @@
               </a:rPr>
               <a:t>6</a:t>
             </a:r>
-            <a:endParaRPr lang="en-US" sz="1000" dirty="0"/>
-          </a:p>
-        </p:txBody>
-      </p:sp>
-      <p:sp>
-        <p:nvSpPr>
-          <p:cNvPr id="37" name="Text 35"/>
-          <p:cNvSpPr/>
-          <p:nvPr/>
-        </p:nvSpPr>
-        <p:spPr>
-          <a:xfrm>
-            <a:off x="2273300" y="1181100"/>
-            <a:ext cx="165100" cy="177800"/>
-          </a:xfrm>
-          <a:prstGeom prst="rect">
-            <a:avLst/>
-          </a:prstGeom>
-          <a:noFill/>
-          <a:ln/>
-        </p:spPr>
-        <p:txBody>
-          <a:bodyPr wrap="square" lIns="0" tIns="0" rIns="0" bIns="0" rtlCol="0" anchor="ctr"/>
-          <a:lstStyle/>
-          <a:p>
-            <a:pPr algn="ctr" indent="0" marL="0">
-              <a:buNone/>
-            </a:pPr>
-            <a:r>
-              <a:rPr lang="en-US" sz="1000" dirty="0">
+            <a:endParaRPr lang="en-US" sz="1100" dirty="0"/>
+          </a:p>
+        </p:txBody>
+      </p:sp>
+      <p:sp>
+        <p:nvSpPr>
+          <p:cNvPr id="37" name="Text 25"/>
+          <p:cNvSpPr/>
+          <p:nvPr/>
+        </p:nvSpPr>
+        <p:spPr>
+          <a:xfrm>
+            <a:off x="2254250" y="1193800"/>
+            <a:ext cx="203200" cy="152400"/>
+          </a:xfrm>
+          <a:prstGeom prst="rect">
+            <a:avLst/>
+          </a:prstGeom>
+          <a:noFill/>
+          <a:ln/>
+        </p:spPr>
+        <p:txBody>
+          <a:bodyPr wrap="square" lIns="0" tIns="0" rIns="0" bIns="0" rtlCol="0" anchor="ctr"/>
+          <a:lstStyle/>
+          <a:p>
+            <a:pPr algn="ctr" indent="0" marL="0">
+              <a:buNone/>
+            </a:pPr>
+            <a:r>
+              <a:rPr lang="en-US" sz="1100" dirty="0">
                 <a:solidFill>
                   <a:srgbClr val="000000"/>
                 </a:solidFill>
@@ -2146,13 +2156,13 @@
               </a:rPr>
               <a:t>5</a:t>
             </a:r>
-            <a:endParaRPr lang="en-US" sz="1000" dirty="0"/>
-          </a:p>
-        </p:txBody>
-      </p:sp>
-      <p:sp>
-        <p:nvSpPr>
-          <p:cNvPr id="38" name="Text 36"/>
+            <a:endParaRPr lang="en-US" sz="1100" dirty="0"/>
+          </a:p>
+        </p:txBody>
+      </p:sp>
+      <p:sp>
+        <p:nvSpPr>
+          <p:cNvPr id="38" name="Text 26"/>
           <p:cNvSpPr/>
           <p:nvPr/>
         </p:nvSpPr>
@@ -2205,7 +2215,7 @@
       </p:sp>
       <p:sp>
         <p:nvSpPr>
-          <p:cNvPr id="39" name="Text 37"/>
+          <p:cNvPr id="39" name="Text 27"/>
           <p:cNvSpPr/>
           <p:nvPr/>
         </p:nvSpPr>
@@ -2256,78 +2266,80 @@
           </a:p>
         </p:txBody>
       </p:sp>
-      <p:sp>
-        <p:nvSpPr>
-          <p:cNvPr id="40" name="Shape 38"/>
-          <p:cNvSpPr/>
-          <p:nvPr/>
-        </p:nvSpPr>
-        <p:spPr>
-          <a:xfrm>
-            <a:off x="2565400" y="990600"/>
-            <a:ext cx="0" cy="355600"/>
-          </a:xfrm>
-          <a:prstGeom prst="line">
-            <a:avLst/>
-          </a:prstGeom>
-          <a:noFill/>
-          <a:ln w="12700">
-            <a:solidFill>
-              <a:srgbClr val="000000"/>
-            </a:solidFill>
-            <a:prstDash val="solid"/>
-          </a:ln>
-        </p:spPr>
-      </p:sp>
-      <p:sp>
-        <p:nvSpPr>
-          <p:cNvPr id="41" name="Shape 39"/>
-          <p:cNvSpPr/>
-          <p:nvPr/>
-        </p:nvSpPr>
-        <p:spPr>
-          <a:xfrm>
-            <a:off x="2717800" y="990600"/>
-            <a:ext cx="0" cy="355600"/>
-          </a:xfrm>
-          <a:prstGeom prst="line">
-            <a:avLst/>
-          </a:prstGeom>
-          <a:noFill/>
-          <a:ln w="12700">
-            <a:solidFill>
-              <a:srgbClr val="000000"/>
-            </a:solidFill>
-            <a:prstDash val="solid"/>
-          </a:ln>
-        </p:spPr>
-      </p:sp>
-      <p:sp>
-        <p:nvSpPr>
-          <p:cNvPr id="42" name="Text 40"/>
-          <p:cNvSpPr/>
-          <p:nvPr/>
-        </p:nvSpPr>
-        <p:spPr>
-          <a:xfrm>
-            <a:off x="2565400" y="977900"/>
-            <a:ext cx="152400" cy="177800"/>
-          </a:xfrm>
-          <a:prstGeom prst="rect">
-            <a:avLst/>
-          </a:prstGeom>
-          <a:noFill/>
-          <a:ln/>
-        </p:spPr>
-        <p:txBody>
-          <a:bodyPr wrap="square" lIns="0" tIns="0" rIns="0" bIns="0" rtlCol="0" anchor="ctr"/>
-          <a:lstStyle/>
-          <a:p>
-            <a:pPr algn="ctr" indent="0" marL="0">
-              <a:buNone/>
-            </a:pPr>
-            <a:r>
-              <a:rPr lang="en-US" sz="1000" dirty="0">
+      <p:pic>
+        <p:nvPicPr>
+          <p:cNvPr id="40" name="Image 10" descr="/home/ahmed/Projects/ai_llm_slides/videos/machine-learning/03_ridger_regression_gradient_descent/recreated_pptx/build/assets/parens051/paren_sample51_lp.png">    </p:cNvPr>
+          <p:cNvPicPr>
+            <a:picLocks noChangeAspect="1"/>
+          </p:cNvPicPr>
+          <p:nvPr/>
+        </p:nvPicPr>
+        <p:blipFill>
+          <a:blip r:embed="rId11"/>
+          <a:stretch>
+            <a:fillRect/>
+          </a:stretch>
+        </p:blipFill>
+        <p:spPr>
+          <a:xfrm>
+            <a:off x="2537079" y="986028"/>
+            <a:ext cx="44196" cy="367284"/>
+          </a:xfrm>
+          <a:prstGeom prst="rect">
+            <a:avLst/>
+          </a:prstGeom>
+        </p:spPr>
+      </p:pic>
+      <p:pic>
+        <p:nvPicPr>
+          <p:cNvPr id="41" name="Image 11" descr="/home/ahmed/Projects/ai_llm_slides/videos/machine-learning/03_ridger_regression_gradient_descent/recreated_pptx/build/assets/parens051/paren_sample51_rp.png">    </p:cNvPr>
+          <p:cNvPicPr>
+            <a:picLocks noChangeAspect="1"/>
+          </p:cNvPicPr>
+          <p:nvPr/>
+        </p:nvPicPr>
+        <p:blipFill>
+          <a:blip r:embed="rId12"/>
+          <a:stretch>
+            <a:fillRect/>
+          </a:stretch>
+        </p:blipFill>
+        <p:spPr>
+          <a:xfrm>
+            <a:off x="2695575" y="986028"/>
+            <a:ext cx="44196" cy="367284"/>
+          </a:xfrm>
+          <a:prstGeom prst="rect">
+            <a:avLst/>
+          </a:prstGeom>
+        </p:spPr>
+      </p:pic>
+      <p:sp>
+        <p:nvSpPr>
+          <p:cNvPr id="42" name="Text 28"/>
+          <p:cNvSpPr/>
+          <p:nvPr/>
+        </p:nvSpPr>
+        <p:spPr>
+          <a:xfrm>
+            <a:off x="2540000" y="990600"/>
+            <a:ext cx="203200" cy="152400"/>
+          </a:xfrm>
+          <a:prstGeom prst="rect">
+            <a:avLst/>
+          </a:prstGeom>
+          <a:noFill/>
+          <a:ln/>
+        </p:spPr>
+        <p:txBody>
+          <a:bodyPr wrap="square" lIns="0" tIns="0" rIns="0" bIns="0" rtlCol="0" anchor="ctr"/>
+          <a:lstStyle/>
+          <a:p>
+            <a:pPr algn="ctr" indent="0" marL="0">
+              <a:buNone/>
+            </a:pPr>
+            <a:r>
+              <a:rPr lang="en-US" sz="1100" dirty="0">
                 <a:solidFill>
                   <a:srgbClr val="000000"/>
                 </a:solidFill>
@@ -2337,36 +2349,36 @@
               </a:rPr>
               <a:t>6</a:t>
             </a:r>
-            <a:endParaRPr lang="en-US" sz="1000" dirty="0"/>
-          </a:p>
-        </p:txBody>
-      </p:sp>
-      <p:sp>
-        <p:nvSpPr>
-          <p:cNvPr id="43" name="Text 41"/>
-          <p:cNvSpPr/>
-          <p:nvPr/>
-        </p:nvSpPr>
-        <p:spPr>
-          <a:xfrm>
-            <a:off x="2565400" y="1181100"/>
-            <a:ext cx="152400" cy="177800"/>
-          </a:xfrm>
-          <a:prstGeom prst="rect">
-            <a:avLst/>
-          </a:prstGeom>
-          <a:noFill/>
-          <a:ln/>
-        </p:spPr>
-        <p:txBody>
-          <a:bodyPr wrap="square" lIns="0" tIns="0" rIns="0" bIns="0" rtlCol="0" anchor="ctr"/>
-          <a:lstStyle/>
-          <a:p>
-            <a:pPr algn="ctr" indent="0" marL="0">
-              <a:buNone/>
-            </a:pPr>
-            <a:r>
-              <a:rPr lang="en-US" sz="1000" dirty="0">
+            <a:endParaRPr lang="en-US" sz="1100" dirty="0"/>
+          </a:p>
+        </p:txBody>
+      </p:sp>
+      <p:sp>
+        <p:nvSpPr>
+          <p:cNvPr id="43" name="Text 29"/>
+          <p:cNvSpPr/>
+          <p:nvPr/>
+        </p:nvSpPr>
+        <p:spPr>
+          <a:xfrm>
+            <a:off x="2540000" y="1193800"/>
+            <a:ext cx="203200" cy="152400"/>
+          </a:xfrm>
+          <a:prstGeom prst="rect">
+            <a:avLst/>
+          </a:prstGeom>
+          <a:noFill/>
+          <a:ln/>
+        </p:spPr>
+        <p:txBody>
+          <a:bodyPr wrap="square" lIns="0" tIns="0" rIns="0" bIns="0" rtlCol="0" anchor="ctr"/>
+          <a:lstStyle/>
+          <a:p>
+            <a:pPr algn="ctr" indent="0" marL="0">
+              <a:buNone/>
+            </a:pPr>
+            <a:r>
+              <a:rPr lang="en-US" sz="1100" dirty="0">
                 <a:solidFill>
                   <a:srgbClr val="000000"/>
                 </a:solidFill>
@@ -2376,13 +2388,13 @@
               </a:rPr>
               <a:t>6</a:t>
             </a:r>
-            <a:endParaRPr lang="en-US" sz="1000" dirty="0"/>
-          </a:p>
-        </p:txBody>
-      </p:sp>
-      <p:sp>
-        <p:nvSpPr>
-          <p:cNvPr id="44" name="Text 42"/>
+            <a:endParaRPr lang="en-US" sz="1100" dirty="0"/>
+          </a:p>
+        </p:txBody>
+      </p:sp>
+      <p:sp>
+        <p:nvSpPr>
+          <p:cNvPr id="44" name="Text 30"/>
           <p:cNvSpPr/>
           <p:nvPr/>
         </p:nvSpPr>
@@ -2435,7 +2447,7 @@
       </p:sp>
       <p:sp>
         <p:nvSpPr>
-          <p:cNvPr id="45" name="Text 43"/>
+          <p:cNvPr id="45" name="Text 31"/>
           <p:cNvSpPr/>
           <p:nvPr/>
         </p:nvSpPr>
@@ -2472,7 +2484,7 @@
               <a:buNone/>
             </a:pPr>
             <a:r>
-              <a:rPr lang="en-US" sz="1200" i="1" dirty="0">
+              <a:rPr lang="en-US" sz="1200" b="1" i="1" dirty="0">
                 <a:solidFill>
                   <a:srgbClr val="000000"/>
                 </a:solidFill>
@@ -2500,239 +2512,57 @@
           </a:p>
         </p:txBody>
       </p:sp>
-      <p:sp>
-        <p:nvSpPr>
-          <p:cNvPr id="46" name="Shape 44"/>
-          <p:cNvSpPr/>
-          <p:nvPr/>
-        </p:nvSpPr>
-        <p:spPr>
-          <a:xfrm>
-            <a:off x="4203700" y="749300"/>
-            <a:ext cx="0" cy="596900"/>
-          </a:xfrm>
-          <a:prstGeom prst="line">
-            <a:avLst/>
-          </a:prstGeom>
-          <a:noFill/>
-          <a:ln w="19050">
-            <a:solidFill>
-              <a:srgbClr val="000000"/>
-            </a:solidFill>
-            <a:prstDash val="solid"/>
-          </a:ln>
-        </p:spPr>
-      </p:sp>
-      <p:sp>
-        <p:nvSpPr>
-          <p:cNvPr id="47" name="Shape 45"/>
-          <p:cNvSpPr/>
-          <p:nvPr/>
-        </p:nvSpPr>
-        <p:spPr>
-          <a:xfrm>
-            <a:off x="4470400" y="749300"/>
-            <a:ext cx="0" cy="596900"/>
-          </a:xfrm>
-          <a:prstGeom prst="line">
-            <a:avLst/>
-          </a:prstGeom>
-          <a:noFill/>
-          <a:ln w="19050">
-            <a:solidFill>
-              <a:srgbClr val="000000"/>
-            </a:solidFill>
-            <a:prstDash val="solid"/>
-          </a:ln>
-        </p:spPr>
-      </p:sp>
-      <p:sp>
-        <p:nvSpPr>
-          <p:cNvPr id="48" name="Text 46"/>
-          <p:cNvSpPr/>
-          <p:nvPr/>
-        </p:nvSpPr>
-        <p:spPr>
-          <a:xfrm>
-            <a:off x="4229100" y="762000"/>
-            <a:ext cx="215900" cy="177800"/>
-          </a:xfrm>
-          <a:prstGeom prst="rect">
-            <a:avLst/>
-          </a:prstGeom>
-          <a:noFill/>
-          <a:ln/>
-        </p:spPr>
-        <p:txBody>
-          <a:bodyPr wrap="square" lIns="0" tIns="0" rIns="0" bIns="0" rtlCol="0" anchor="ctr"/>
-          <a:lstStyle/>
-          <a:p>
-            <a:pPr algn="ctr" indent="0" marL="0">
-              <a:buNone/>
-            </a:pPr>
-            <a:r>
-              <a:rPr lang="en-US" sz="1100" dirty="0">
-                <a:solidFill>
-                  <a:srgbClr val="000000"/>
-                </a:solidFill>
-                <a:latin typeface="Arial" pitchFamily="34" charset="0"/>
-                <a:ea typeface="Arial" pitchFamily="34" charset="-122"/>
-                <a:cs typeface="Arial" pitchFamily="34" charset="-120"/>
-              </a:rPr>
-              <a:t>4</a:t>
-            </a:r>
-            <a:endParaRPr lang="en-US" sz="1100" dirty="0"/>
-          </a:p>
-        </p:txBody>
-      </p:sp>
-      <p:sp>
-        <p:nvSpPr>
-          <p:cNvPr id="49" name="Text 47"/>
-          <p:cNvSpPr/>
-          <p:nvPr/>
-        </p:nvSpPr>
-        <p:spPr>
-          <a:xfrm>
-            <a:off x="4229100" y="965200"/>
-            <a:ext cx="215900" cy="177800"/>
-          </a:xfrm>
-          <a:prstGeom prst="rect">
-            <a:avLst/>
-          </a:prstGeom>
-          <a:noFill/>
-          <a:ln/>
-        </p:spPr>
-        <p:txBody>
-          <a:bodyPr wrap="square" lIns="0" tIns="0" rIns="0" bIns="0" rtlCol="0" anchor="ctr"/>
-          <a:lstStyle/>
-          <a:p>
-            <a:pPr algn="ctr" indent="0" marL="0">
-              <a:buNone/>
-            </a:pPr>
-            <a:r>
-              <a:rPr lang="en-US" sz="1100" dirty="0">
-                <a:solidFill>
-                  <a:srgbClr val="000000"/>
-                </a:solidFill>
-                <a:latin typeface="Arial" pitchFamily="34" charset="0"/>
-                <a:ea typeface="Arial" pitchFamily="34" charset="-122"/>
-                <a:cs typeface="Arial" pitchFamily="34" charset="-120"/>
-              </a:rPr>
-              <a:t>-2</a:t>
-            </a:r>
-            <a:endParaRPr lang="en-US" sz="1100" dirty="0"/>
-          </a:p>
-        </p:txBody>
-      </p:sp>
-      <p:sp>
-        <p:nvSpPr>
-          <p:cNvPr id="50" name="Text 48"/>
-          <p:cNvSpPr/>
-          <p:nvPr/>
-        </p:nvSpPr>
-        <p:spPr>
-          <a:xfrm>
-            <a:off x="4229100" y="1168400"/>
-            <a:ext cx="215900" cy="177800"/>
-          </a:xfrm>
-          <a:prstGeom prst="rect">
-            <a:avLst/>
-          </a:prstGeom>
-          <a:noFill/>
-          <a:ln/>
-        </p:spPr>
-        <p:txBody>
-          <a:bodyPr wrap="square" lIns="0" tIns="0" rIns="0" bIns="0" rtlCol="0" anchor="ctr"/>
-          <a:lstStyle/>
-          <a:p>
-            <a:pPr algn="ctr" indent="0" marL="0">
-              <a:buNone/>
-            </a:pPr>
-            <a:r>
-              <a:rPr lang="en-US" sz="1100" dirty="0">
-                <a:solidFill>
-                  <a:srgbClr val="000000"/>
-                </a:solidFill>
-                <a:latin typeface="Arial" pitchFamily="34" charset="0"/>
-                <a:ea typeface="Arial" pitchFamily="34" charset="-122"/>
-                <a:cs typeface="Arial" pitchFamily="34" charset="-120"/>
-              </a:rPr>
-              <a:t>-2</a:t>
-            </a:r>
-            <a:endParaRPr lang="en-US" sz="1100" dirty="0"/>
-          </a:p>
-        </p:txBody>
-      </p:sp>
-      <p:sp>
-        <p:nvSpPr>
-          <p:cNvPr id="51" name="Text 49"/>
-          <p:cNvSpPr/>
-          <p:nvPr/>
-        </p:nvSpPr>
-        <p:spPr>
-          <a:xfrm>
-            <a:off x="4610100" y="838200"/>
-            <a:ext cx="952500" cy="203200"/>
-          </a:xfrm>
-          <a:prstGeom prst="rect">
-            <a:avLst/>
-          </a:prstGeom>
-          <a:noFill/>
-          <a:ln/>
-        </p:spPr>
-        <p:txBody>
-          <a:bodyPr wrap="square" lIns="0" tIns="0" rIns="0" bIns="0" rtlCol="0" anchor="ctr"/>
-          <a:lstStyle/>
-          <a:p>
-            <a:pPr algn="l" indent="0" marL="0">
-              <a:buNone/>
-            </a:pPr>
-            <a:r>
-              <a:rPr lang="en-US" sz="1200" i="1" dirty="0">
-                <a:solidFill>
-                  <a:srgbClr val="C00000"/>
-                </a:solidFill>
-                <a:latin typeface="Arial" pitchFamily="34" charset="0"/>
-                <a:ea typeface="Arial" pitchFamily="34" charset="-122"/>
-                <a:cs typeface="Arial" pitchFamily="34" charset="-120"/>
-              </a:rPr>
-              <a:t>Step </a:t>
-            </a:r>
-            <a:pPr algn="l" indent="0" marL="0">
-              <a:buNone/>
-            </a:pPr>
-            <a:r>
-              <a:rPr lang="en-US" sz="1200" i="1" dirty="0">
-                <a:solidFill>
-                  <a:srgbClr val="C00000"/>
-                </a:solidFill>
-                <a:latin typeface="Arial" pitchFamily="34" charset="0"/>
-                <a:ea typeface="Arial" pitchFamily="34" charset="-122"/>
-                <a:cs typeface="Arial" pitchFamily="34" charset="-120"/>
-              </a:rPr>
-              <a:t>η</a:t>
-            </a:r>
-            <a:pPr algn="l" indent="0" marL="0">
-              <a:buNone/>
-            </a:pPr>
-            <a:r>
-              <a:rPr lang="en-US" sz="1200" dirty="0">
-                <a:solidFill>
-                  <a:srgbClr val="C00000"/>
-                </a:solidFill>
-                <a:latin typeface="Arial" pitchFamily="34" charset="0"/>
-                <a:ea typeface="Arial" pitchFamily="34" charset="-122"/>
-                <a:cs typeface="Arial" pitchFamily="34" charset="-120"/>
-              </a:rPr>
-              <a:t> = 1</a:t>
-            </a:r>
-            <a:endParaRPr lang="en-US" sz="1200" dirty="0"/>
-          </a:p>
-        </p:txBody>
-      </p:sp>
-      <p:sp>
-        <p:nvSpPr>
-          <p:cNvPr id="52" name="Text 50"/>
+      <p:pic>
+        <p:nvPicPr>
+          <p:cNvPr id="46" name="Image 12" descr="/home/ahmed/Projects/ai_llm_slides/videos/machine-learning/03_ridger_regression_gradient_descent/recreated_pptx/build/assets/eq_051_initw.png">    </p:cNvPr>
+          <p:cNvPicPr>
+            <a:picLocks noChangeAspect="1"/>
+          </p:cNvPicPr>
+          <p:nvPr/>
+        </p:nvPicPr>
+        <p:blipFill>
+          <a:blip r:embed="rId13"/>
+          <a:stretch>
+            <a:fillRect/>
+          </a:stretch>
+        </p:blipFill>
+        <p:spPr>
+          <a:xfrm>
+            <a:off x="4164838" y="749300"/>
+            <a:ext cx="339852" cy="576072"/>
+          </a:xfrm>
+          <a:prstGeom prst="rect">
+            <a:avLst/>
+          </a:prstGeom>
+        </p:spPr>
+      </p:pic>
+      <p:pic>
+        <p:nvPicPr>
+          <p:cNvPr id="47" name="Image 13" descr="/home/ahmed/Projects/ai_llm_slides/videos/machine-learning/03_ridger_regression_gradient_descent/recreated_pptx/build/assets/eq_051_step.png">    </p:cNvPr>
+          <p:cNvPicPr>
+            <a:picLocks noChangeAspect="1"/>
+          </p:cNvPicPr>
+          <p:nvPr/>
+        </p:nvPicPr>
+        <p:blipFill>
+          <a:blip r:embed="rId14"/>
+          <a:stretch>
+            <a:fillRect/>
+          </a:stretch>
+        </p:blipFill>
+        <p:spPr>
+          <a:xfrm>
+            <a:off x="4623308" y="838708"/>
+            <a:ext cx="888492" cy="184404"/>
+          </a:xfrm>
+          <a:prstGeom prst="rect">
+            <a:avLst/>
+          </a:prstGeom>
+        </p:spPr>
+      </p:pic>
+      <p:sp>
+        <p:nvSpPr>
+          <p:cNvPr id="48" name="Text 32"/>
           <p:cNvSpPr/>
           <p:nvPr/>
         </p:nvSpPr>
@@ -2785,7 +2615,7 @@
       </p:sp>
       <p:sp>
         <p:nvSpPr>
-          <p:cNvPr id="53" name="Text 51"/>
+          <p:cNvPr id="49" name="Text 33"/>
           <p:cNvSpPr/>
           <p:nvPr/>
         </p:nvSpPr>
@@ -2808,7 +2638,7 @@
               <a:buNone/>
             </a:pPr>
             <a:r>
-              <a:rPr lang="en-US" sz="1100" dirty="0">
+              <a:rPr lang="en-US" sz="1100" i="1" dirty="0">
                 <a:solidFill>
                   <a:srgbClr val="000000"/>
                 </a:solidFill>
@@ -2824,7 +2654,7 @@
       </p:sp>
       <p:sp>
         <p:nvSpPr>
-          <p:cNvPr id="54" name="Text 52"/>
+          <p:cNvPr id="50" name="Text 34"/>
           <p:cNvSpPr/>
           <p:nvPr/>
         </p:nvSpPr>
@@ -2877,7 +2707,7 @@
       </p:sp>
       <p:sp>
         <p:nvSpPr>
-          <p:cNvPr id="55" name="Text 53"/>
+          <p:cNvPr id="51" name="Text 35"/>
           <p:cNvSpPr/>
           <p:nvPr/>
         </p:nvSpPr>
@@ -2900,7 +2730,7 @@
               <a:buNone/>
             </a:pPr>
             <a:r>
-              <a:rPr lang="en-US" sz="1100" dirty="0">
+              <a:rPr lang="en-US" sz="1100" i="1" dirty="0">
                 <a:solidFill>
                   <a:srgbClr val="000000"/>
                 </a:solidFill>
@@ -2916,7 +2746,7 @@
       </p:sp>
       <p:sp>
         <p:nvSpPr>
-          <p:cNvPr id="56" name="Text 54"/>
+          <p:cNvPr id="52" name="Text 36"/>
           <p:cNvSpPr/>
           <p:nvPr/>
         </p:nvSpPr>
@@ -2939,9 +2769,9 @@
               <a:buNone/>
             </a:pPr>
             <a:r>
-              <a:rPr lang="en-US" sz="1100" i="1" dirty="0">
-                <a:solidFill>
-                  <a:srgbClr val="27331A"/>
+              <a:rPr lang="en-US" sz="1100" b="1" i="1" dirty="0">
+                <a:solidFill>
+                  <a:srgbClr val="5B9C4E"/>
                 </a:solidFill>
                 <a:latin typeface="Arial" pitchFamily="34" charset="0"/>
                 <a:ea typeface="Arial" pitchFamily="34" charset="-122"/>
@@ -2955,7 +2785,7 @@
       </p:sp>
       <p:sp>
         <p:nvSpPr>
-          <p:cNvPr id="57" name="Text 55"/>
+          <p:cNvPr id="53" name="Text 37"/>
           <p:cNvSpPr/>
           <p:nvPr/>
         </p:nvSpPr>
@@ -2994,14 +2824,14 @@
       </p:sp>
       <p:sp>
         <p:nvSpPr>
-          <p:cNvPr id="58" name="Text 56"/>
-          <p:cNvSpPr/>
-          <p:nvPr/>
-        </p:nvSpPr>
-        <p:spPr>
-          <a:xfrm>
-            <a:off x="6299200" y="977900"/>
-            <a:ext cx="1168400" cy="177800"/>
+          <p:cNvPr id="54" name="Text 38"/>
+          <p:cNvSpPr/>
+          <p:nvPr/>
+        </p:nvSpPr>
+        <p:spPr>
+          <a:xfrm>
+            <a:off x="6311900" y="965200"/>
+            <a:ext cx="1333500" cy="203200"/>
           </a:xfrm>
           <a:prstGeom prst="rect">
             <a:avLst/>
@@ -3017,7 +2847,7 @@
               <a:buNone/>
             </a:pPr>
             <a:r>
-              <a:rPr lang="en-US" sz="1200" b="1" dirty="0">
+              <a:rPr lang="en-US" sz="1200" dirty="0">
                 <a:solidFill>
                   <a:srgbClr val="000000"/>
                 </a:solidFill>
@@ -3033,7 +2863,7 @@
       </p:sp>
       <p:sp>
         <p:nvSpPr>
-          <p:cNvPr id="59" name="Text 57"/>
+          <p:cNvPr id="55" name="Text 39"/>
           <p:cNvSpPr/>
           <p:nvPr/>
         </p:nvSpPr>
@@ -3084,78 +2914,80 @@
           </a:p>
         </p:txBody>
       </p:sp>
-      <p:sp>
-        <p:nvSpPr>
-          <p:cNvPr id="60" name="Shape 58"/>
-          <p:cNvSpPr/>
-          <p:nvPr/>
-        </p:nvSpPr>
-        <p:spPr>
-          <a:xfrm>
-            <a:off x="7594600" y="1016000"/>
-            <a:ext cx="0" cy="355600"/>
-          </a:xfrm>
-          <a:prstGeom prst="line">
-            <a:avLst/>
-          </a:prstGeom>
-          <a:noFill/>
-          <a:ln w="12700">
-            <a:solidFill>
-              <a:srgbClr val="000000"/>
-            </a:solidFill>
-            <a:prstDash val="solid"/>
-          </a:ln>
-        </p:spPr>
-      </p:sp>
-      <p:sp>
-        <p:nvSpPr>
-          <p:cNvPr id="61" name="Shape 59"/>
-          <p:cNvSpPr/>
-          <p:nvPr/>
-        </p:nvSpPr>
-        <p:spPr>
-          <a:xfrm>
-            <a:off x="7772400" y="1016000"/>
-            <a:ext cx="0" cy="355600"/>
-          </a:xfrm>
-          <a:prstGeom prst="line">
-            <a:avLst/>
-          </a:prstGeom>
-          <a:noFill/>
-          <a:ln w="12700">
-            <a:solidFill>
-              <a:srgbClr val="000000"/>
-            </a:solidFill>
-            <a:prstDash val="solid"/>
-          </a:ln>
-        </p:spPr>
-      </p:sp>
-      <p:sp>
-        <p:nvSpPr>
-          <p:cNvPr id="62" name="Text 60"/>
-          <p:cNvSpPr/>
-          <p:nvPr/>
-        </p:nvSpPr>
-        <p:spPr>
-          <a:xfrm>
-            <a:off x="7594600" y="1016000"/>
-            <a:ext cx="177800" cy="177800"/>
-          </a:xfrm>
-          <a:prstGeom prst="rect">
-            <a:avLst/>
-          </a:prstGeom>
-          <a:noFill/>
-          <a:ln/>
-        </p:spPr>
-        <p:txBody>
-          <a:bodyPr wrap="square" lIns="0" tIns="0" rIns="0" bIns="0" rtlCol="0" anchor="ctr"/>
-          <a:lstStyle/>
-          <a:p>
-            <a:pPr algn="ctr" indent="0" marL="0">
-              <a:buNone/>
-            </a:pPr>
-            <a:r>
-              <a:rPr lang="en-US" sz="1000" dirty="0">
+      <p:pic>
+        <p:nvPicPr>
+          <p:cNvPr id="56" name="Image 14" descr="/home/ahmed/Projects/ai_llm_slides/videos/machine-learning/03_ridger_regression_gradient_descent/recreated_pptx/build/assets/parens051/paren_z51_lp.png">    </p:cNvPr>
+          <p:cNvPicPr>
+            <a:picLocks noChangeAspect="1"/>
+          </p:cNvPicPr>
+          <p:nvPr/>
+        </p:nvPicPr>
+        <p:blipFill>
+          <a:blip r:embed="rId15"/>
+          <a:stretch>
+            <a:fillRect/>
+          </a:stretch>
+        </p:blipFill>
+        <p:spPr>
+          <a:xfrm>
+            <a:off x="7566279" y="1022604"/>
+            <a:ext cx="44196" cy="381000"/>
+          </a:xfrm>
+          <a:prstGeom prst="rect">
+            <a:avLst/>
+          </a:prstGeom>
+        </p:spPr>
+      </p:pic>
+      <p:pic>
+        <p:nvPicPr>
+          <p:cNvPr id="57" name="Image 15" descr="/home/ahmed/Projects/ai_llm_slides/videos/machine-learning/03_ridger_regression_gradient_descent/recreated_pptx/build/assets/parens051/paren_z51_rp.png">    </p:cNvPr>
+          <p:cNvPicPr>
+            <a:picLocks noChangeAspect="1"/>
+          </p:cNvPicPr>
+          <p:nvPr/>
+        </p:nvPicPr>
+        <p:blipFill>
+          <a:blip r:embed="rId16"/>
+          <a:stretch>
+            <a:fillRect/>
+          </a:stretch>
+        </p:blipFill>
+        <p:spPr>
+          <a:xfrm>
+            <a:off x="7750175" y="1022604"/>
+            <a:ext cx="44196" cy="381000"/>
+          </a:xfrm>
+          <a:prstGeom prst="rect">
+            <a:avLst/>
+          </a:prstGeom>
+        </p:spPr>
+      </p:pic>
+      <p:sp>
+        <p:nvSpPr>
+          <p:cNvPr id="58" name="Text 40"/>
+          <p:cNvSpPr/>
+          <p:nvPr/>
+        </p:nvSpPr>
+        <p:spPr>
+          <a:xfrm>
+            <a:off x="7581900" y="1028700"/>
+            <a:ext cx="203200" cy="152400"/>
+          </a:xfrm>
+          <a:prstGeom prst="rect">
+            <a:avLst/>
+          </a:prstGeom>
+          <a:noFill/>
+          <a:ln/>
+        </p:spPr>
+        <p:txBody>
+          <a:bodyPr wrap="square" lIns="0" tIns="0" rIns="0" bIns="0" rtlCol="0" anchor="ctr"/>
+          <a:lstStyle/>
+          <a:p>
+            <a:pPr algn="ctr" indent="0" marL="0">
+              <a:buNone/>
+            </a:pPr>
+            <a:r>
+              <a:rPr lang="en-US" sz="1100" dirty="0">
                 <a:solidFill>
                   <a:srgbClr val="000000"/>
                 </a:solidFill>
@@ -3165,36 +2997,36 @@
               </a:rPr>
               <a:t>0</a:t>
             </a:r>
-            <a:endParaRPr lang="en-US" sz="1000" dirty="0"/>
-          </a:p>
-        </p:txBody>
-      </p:sp>
-      <p:sp>
-        <p:nvSpPr>
-          <p:cNvPr id="63" name="Text 61"/>
-          <p:cNvSpPr/>
-          <p:nvPr/>
-        </p:nvSpPr>
-        <p:spPr>
-          <a:xfrm>
-            <a:off x="7594600" y="1219200"/>
-            <a:ext cx="177800" cy="177800"/>
-          </a:xfrm>
-          <a:prstGeom prst="rect">
-            <a:avLst/>
-          </a:prstGeom>
-          <a:noFill/>
-          <a:ln/>
-        </p:spPr>
-        <p:txBody>
-          <a:bodyPr wrap="square" lIns="0" tIns="0" rIns="0" bIns="0" rtlCol="0" anchor="ctr"/>
-          <a:lstStyle/>
-          <a:p>
-            <a:pPr algn="ctr" indent="0" marL="0">
-              <a:buNone/>
-            </a:pPr>
-            <a:r>
-              <a:rPr lang="en-US" sz="1000" dirty="0">
+            <a:endParaRPr lang="en-US" sz="1100" dirty="0"/>
+          </a:p>
+        </p:txBody>
+      </p:sp>
+      <p:sp>
+        <p:nvSpPr>
+          <p:cNvPr id="59" name="Text 41"/>
+          <p:cNvSpPr/>
+          <p:nvPr/>
+        </p:nvSpPr>
+        <p:spPr>
+          <a:xfrm>
+            <a:off x="7581900" y="1231900"/>
+            <a:ext cx="203200" cy="152400"/>
+          </a:xfrm>
+          <a:prstGeom prst="rect">
+            <a:avLst/>
+          </a:prstGeom>
+          <a:noFill/>
+          <a:ln/>
+        </p:spPr>
+        <p:txBody>
+          <a:bodyPr wrap="square" lIns="0" tIns="0" rIns="0" bIns="0" rtlCol="0" anchor="ctr"/>
+          <a:lstStyle/>
+          <a:p>
+            <a:pPr algn="ctr" indent="0" marL="0">
+              <a:buNone/>
+            </a:pPr>
+            <a:r>
+              <a:rPr lang="en-US" sz="1100" dirty="0">
                 <a:solidFill>
                   <a:srgbClr val="000000"/>
                 </a:solidFill>
@@ -3204,13 +3036,13 @@
               </a:rPr>
               <a:t>0</a:t>
             </a:r>
-            <a:endParaRPr lang="en-US" sz="1000" dirty="0"/>
-          </a:p>
-        </p:txBody>
-      </p:sp>
-      <p:sp>
-        <p:nvSpPr>
-          <p:cNvPr id="64" name="Text 62"/>
+            <a:endParaRPr lang="en-US" sz="1100" dirty="0"/>
+          </a:p>
+        </p:txBody>
+      </p:sp>
+      <p:sp>
+        <p:nvSpPr>
+          <p:cNvPr id="60" name="Text 42"/>
           <p:cNvSpPr/>
           <p:nvPr/>
         </p:nvSpPr>
@@ -3261,78 +3093,80 @@
           </a:p>
         </p:txBody>
       </p:sp>
-      <p:sp>
-        <p:nvSpPr>
-          <p:cNvPr id="65" name="Shape 63"/>
-          <p:cNvSpPr/>
-          <p:nvPr/>
-        </p:nvSpPr>
-        <p:spPr>
-          <a:xfrm>
-            <a:off x="7886700" y="1016000"/>
-            <a:ext cx="0" cy="355600"/>
-          </a:xfrm>
-          <a:prstGeom prst="line">
-            <a:avLst/>
-          </a:prstGeom>
-          <a:noFill/>
-          <a:ln w="12700">
-            <a:solidFill>
-              <a:srgbClr val="000000"/>
-            </a:solidFill>
-            <a:prstDash val="solid"/>
-          </a:ln>
-        </p:spPr>
-      </p:sp>
-      <p:sp>
-        <p:nvSpPr>
-          <p:cNvPr id="66" name="Shape 64"/>
-          <p:cNvSpPr/>
-          <p:nvPr/>
-        </p:nvSpPr>
-        <p:spPr>
-          <a:xfrm>
-            <a:off x="8051800" y="1016000"/>
-            <a:ext cx="0" cy="355600"/>
-          </a:xfrm>
-          <a:prstGeom prst="line">
-            <a:avLst/>
-          </a:prstGeom>
-          <a:noFill/>
-          <a:ln w="12700">
-            <a:solidFill>
-              <a:srgbClr val="000000"/>
-            </a:solidFill>
-            <a:prstDash val="solid"/>
-          </a:ln>
-        </p:spPr>
-      </p:sp>
-      <p:sp>
-        <p:nvSpPr>
-          <p:cNvPr id="67" name="Text 65"/>
-          <p:cNvSpPr/>
-          <p:nvPr/>
-        </p:nvSpPr>
-        <p:spPr>
-          <a:xfrm>
-            <a:off x="7886700" y="1016000"/>
-            <a:ext cx="165100" cy="177800"/>
-          </a:xfrm>
-          <a:prstGeom prst="rect">
-            <a:avLst/>
-          </a:prstGeom>
-          <a:noFill/>
-          <a:ln/>
-        </p:spPr>
-        <p:txBody>
-          <a:bodyPr wrap="square" lIns="0" tIns="0" rIns="0" bIns="0" rtlCol="0" anchor="ctr"/>
-          <a:lstStyle/>
-          <a:p>
-            <a:pPr algn="ctr" indent="0" marL="0">
-              <a:buNone/>
-            </a:pPr>
-            <a:r>
-              <a:rPr lang="en-US" sz="1000" dirty="0">
+      <p:pic>
+        <p:nvPicPr>
+          <p:cNvPr id="61" name="Image 16" descr="/home/ahmed/Projects/ai_llm_slides/videos/machine-learning/03_ridger_regression_gradient_descent/recreated_pptx/build/assets/parens051/paren_z51_lp.png">    </p:cNvPr>
+          <p:cNvPicPr>
+            <a:picLocks noChangeAspect="1"/>
+          </p:cNvPicPr>
+          <p:nvPr/>
+        </p:nvPicPr>
+        <p:blipFill>
+          <a:blip r:embed="rId17"/>
+          <a:stretch>
+            <a:fillRect/>
+          </a:stretch>
+        </p:blipFill>
+        <p:spPr>
+          <a:xfrm>
+            <a:off x="7871079" y="1022604"/>
+            <a:ext cx="44196" cy="381000"/>
+          </a:xfrm>
+          <a:prstGeom prst="rect">
+            <a:avLst/>
+          </a:prstGeom>
+        </p:spPr>
+      </p:pic>
+      <p:pic>
+        <p:nvPicPr>
+          <p:cNvPr id="62" name="Image 17" descr="/home/ahmed/Projects/ai_llm_slides/videos/machine-learning/03_ridger_regression_gradient_descent/recreated_pptx/build/assets/parens051/paren_z51_rp.png">    </p:cNvPr>
+          <p:cNvPicPr>
+            <a:picLocks noChangeAspect="1"/>
+          </p:cNvPicPr>
+          <p:nvPr/>
+        </p:nvPicPr>
+        <p:blipFill>
+          <a:blip r:embed="rId18"/>
+          <a:stretch>
+            <a:fillRect/>
+          </a:stretch>
+        </p:blipFill>
+        <p:spPr>
+          <a:xfrm>
+            <a:off x="8029575" y="1022604"/>
+            <a:ext cx="44196" cy="381000"/>
+          </a:xfrm>
+          <a:prstGeom prst="rect">
+            <a:avLst/>
+          </a:prstGeom>
+        </p:spPr>
+      </p:pic>
+      <p:sp>
+        <p:nvSpPr>
+          <p:cNvPr id="63" name="Text 43"/>
+          <p:cNvSpPr/>
+          <p:nvPr/>
+        </p:nvSpPr>
+        <p:spPr>
+          <a:xfrm>
+            <a:off x="7867650" y="1028700"/>
+            <a:ext cx="203200" cy="152400"/>
+          </a:xfrm>
+          <a:prstGeom prst="rect">
+            <a:avLst/>
+          </a:prstGeom>
+          <a:noFill/>
+          <a:ln/>
+        </p:spPr>
+        <p:txBody>
+          <a:bodyPr wrap="square" lIns="0" tIns="0" rIns="0" bIns="0" rtlCol="0" anchor="ctr"/>
+          <a:lstStyle/>
+          <a:p>
+            <a:pPr algn="ctr" indent="0" marL="0">
+              <a:buNone/>
+            </a:pPr>
+            <a:r>
+              <a:rPr lang="en-US" sz="1100" dirty="0">
                 <a:solidFill>
                   <a:srgbClr val="000000"/>
                 </a:solidFill>
@@ -3342,36 +3176,36 @@
               </a:rPr>
               <a:t>7</a:t>
             </a:r>
-            <a:endParaRPr lang="en-US" sz="1000" dirty="0"/>
-          </a:p>
-        </p:txBody>
-      </p:sp>
-      <p:sp>
-        <p:nvSpPr>
-          <p:cNvPr id="68" name="Text 66"/>
-          <p:cNvSpPr/>
-          <p:nvPr/>
-        </p:nvSpPr>
-        <p:spPr>
-          <a:xfrm>
-            <a:off x="7886700" y="1219200"/>
-            <a:ext cx="165100" cy="177800"/>
-          </a:xfrm>
-          <a:prstGeom prst="rect">
-            <a:avLst/>
-          </a:prstGeom>
-          <a:noFill/>
-          <a:ln/>
-        </p:spPr>
-        <p:txBody>
-          <a:bodyPr wrap="square" lIns="0" tIns="0" rIns="0" bIns="0" rtlCol="0" anchor="ctr"/>
-          <a:lstStyle/>
-          <a:p>
-            <a:pPr algn="ctr" indent="0" marL="0">
-              <a:buNone/>
-            </a:pPr>
-            <a:r>
-              <a:rPr lang="en-US" sz="1000" dirty="0">
+            <a:endParaRPr lang="en-US" sz="1100" dirty="0"/>
+          </a:p>
+        </p:txBody>
+      </p:sp>
+      <p:sp>
+        <p:nvSpPr>
+          <p:cNvPr id="64" name="Text 44"/>
+          <p:cNvSpPr/>
+          <p:nvPr/>
+        </p:nvSpPr>
+        <p:spPr>
+          <a:xfrm>
+            <a:off x="7867650" y="1231900"/>
+            <a:ext cx="203200" cy="152400"/>
+          </a:xfrm>
+          <a:prstGeom prst="rect">
+            <a:avLst/>
+          </a:prstGeom>
+          <a:noFill/>
+          <a:ln/>
+        </p:spPr>
+        <p:txBody>
+          <a:bodyPr wrap="square" lIns="0" tIns="0" rIns="0" bIns="0" rtlCol="0" anchor="ctr"/>
+          <a:lstStyle/>
+          <a:p>
+            <a:pPr algn="ctr" indent="0" marL="0">
+              <a:buNone/>
+            </a:pPr>
+            <a:r>
+              <a:rPr lang="en-US" sz="1100" dirty="0">
                 <a:solidFill>
                   <a:srgbClr val="000000"/>
                 </a:solidFill>
@@ -3381,13 +3215,13 @@
               </a:rPr>
               <a:t>6</a:t>
             </a:r>
-            <a:endParaRPr lang="en-US" sz="1000" dirty="0"/>
-          </a:p>
-        </p:txBody>
-      </p:sp>
-      <p:sp>
-        <p:nvSpPr>
-          <p:cNvPr id="69" name="Text 67"/>
+            <a:endParaRPr lang="en-US" sz="1100" dirty="0"/>
+          </a:p>
+        </p:txBody>
+      </p:sp>
+      <p:sp>
+        <p:nvSpPr>
+          <p:cNvPr id="65" name="Text 45"/>
           <p:cNvSpPr/>
           <p:nvPr/>
         </p:nvSpPr>
@@ -3438,78 +3272,80 @@
           </a:p>
         </p:txBody>
       </p:sp>
-      <p:sp>
-        <p:nvSpPr>
-          <p:cNvPr id="70" name="Shape 68"/>
-          <p:cNvSpPr/>
-          <p:nvPr/>
-        </p:nvSpPr>
-        <p:spPr>
-          <a:xfrm>
-            <a:off x="8166100" y="1016000"/>
-            <a:ext cx="0" cy="355600"/>
-          </a:xfrm>
-          <a:prstGeom prst="line">
-            <a:avLst/>
-          </a:prstGeom>
-          <a:noFill/>
-          <a:ln w="12700">
-            <a:solidFill>
-              <a:srgbClr val="000000"/>
-            </a:solidFill>
-            <a:prstDash val="solid"/>
-          </a:ln>
-        </p:spPr>
-      </p:sp>
-      <p:sp>
-        <p:nvSpPr>
-          <p:cNvPr id="71" name="Shape 69"/>
-          <p:cNvSpPr/>
-          <p:nvPr/>
-        </p:nvSpPr>
-        <p:spPr>
-          <a:xfrm>
-            <a:off x="8331200" y="1016000"/>
-            <a:ext cx="0" cy="355600"/>
-          </a:xfrm>
-          <a:prstGeom prst="line">
-            <a:avLst/>
-          </a:prstGeom>
-          <a:noFill/>
-          <a:ln w="12700">
-            <a:solidFill>
-              <a:srgbClr val="000000"/>
-            </a:solidFill>
-            <a:prstDash val="solid"/>
-          </a:ln>
-        </p:spPr>
-      </p:sp>
-      <p:sp>
-        <p:nvSpPr>
-          <p:cNvPr id="72" name="Text 70"/>
-          <p:cNvSpPr/>
-          <p:nvPr/>
-        </p:nvSpPr>
-        <p:spPr>
-          <a:xfrm>
-            <a:off x="8166100" y="1016000"/>
-            <a:ext cx="165100" cy="177800"/>
-          </a:xfrm>
-          <a:prstGeom prst="rect">
-            <a:avLst/>
-          </a:prstGeom>
-          <a:noFill/>
-          <a:ln/>
-        </p:spPr>
-        <p:txBody>
-          <a:bodyPr wrap="square" lIns="0" tIns="0" rIns="0" bIns="0" rtlCol="0" anchor="ctr"/>
-          <a:lstStyle/>
-          <a:p>
-            <a:pPr algn="ctr" indent="0" marL="0">
-              <a:buNone/>
-            </a:pPr>
-            <a:r>
-              <a:rPr lang="en-US" sz="1000" dirty="0">
+      <p:pic>
+        <p:nvPicPr>
+          <p:cNvPr id="66" name="Image 18" descr="/home/ahmed/Projects/ai_llm_slides/videos/machine-learning/03_ridger_regression_gradient_descent/recreated_pptx/build/assets/parens051/paren_z51_lp.png">    </p:cNvPr>
+          <p:cNvPicPr>
+            <a:picLocks noChangeAspect="1"/>
+          </p:cNvPicPr>
+          <p:nvPr/>
+        </p:nvPicPr>
+        <p:blipFill>
+          <a:blip r:embed="rId19"/>
+          <a:stretch>
+            <a:fillRect/>
+          </a:stretch>
+        </p:blipFill>
+        <p:spPr>
+          <a:xfrm>
+            <a:off x="8150479" y="1022604"/>
+            <a:ext cx="44196" cy="381000"/>
+          </a:xfrm>
+          <a:prstGeom prst="rect">
+            <a:avLst/>
+          </a:prstGeom>
+        </p:spPr>
+      </p:pic>
+      <p:pic>
+        <p:nvPicPr>
+          <p:cNvPr id="67" name="Image 19" descr="/home/ahmed/Projects/ai_llm_slides/videos/machine-learning/03_ridger_regression_gradient_descent/recreated_pptx/build/assets/parens051/paren_z51_rp.png">    </p:cNvPr>
+          <p:cNvPicPr>
+            <a:picLocks noChangeAspect="1"/>
+          </p:cNvPicPr>
+          <p:nvPr/>
+        </p:nvPicPr>
+        <p:blipFill>
+          <a:blip r:embed="rId20"/>
+          <a:stretch>
+            <a:fillRect/>
+          </a:stretch>
+        </p:blipFill>
+        <p:spPr>
+          <a:xfrm>
+            <a:off x="8308975" y="1022604"/>
+            <a:ext cx="44196" cy="381000"/>
+          </a:xfrm>
+          <a:prstGeom prst="rect">
+            <a:avLst/>
+          </a:prstGeom>
+        </p:spPr>
+      </p:pic>
+      <p:sp>
+        <p:nvSpPr>
+          <p:cNvPr id="68" name="Text 46"/>
+          <p:cNvSpPr/>
+          <p:nvPr/>
+        </p:nvSpPr>
+        <p:spPr>
+          <a:xfrm>
+            <a:off x="8147050" y="1028700"/>
+            <a:ext cx="203200" cy="152400"/>
+          </a:xfrm>
+          <a:prstGeom prst="rect">
+            <a:avLst/>
+          </a:prstGeom>
+          <a:noFill/>
+          <a:ln/>
+        </p:spPr>
+        <p:txBody>
+          <a:bodyPr wrap="square" lIns="0" tIns="0" rIns="0" bIns="0" rtlCol="0" anchor="ctr"/>
+          <a:lstStyle/>
+          <a:p>
+            <a:pPr algn="ctr" indent="0" marL="0">
+              <a:buNone/>
+            </a:pPr>
+            <a:r>
+              <a:rPr lang="en-US" sz="1100" dirty="0">
                 <a:solidFill>
                   <a:srgbClr val="000000"/>
                 </a:solidFill>
@@ -3519,36 +3355,36 @@
               </a:rPr>
               <a:t>3</a:t>
             </a:r>
-            <a:endParaRPr lang="en-US" sz="1000" dirty="0"/>
-          </a:p>
-        </p:txBody>
-      </p:sp>
-      <p:sp>
-        <p:nvSpPr>
-          <p:cNvPr id="73" name="Text 71"/>
-          <p:cNvSpPr/>
-          <p:nvPr/>
-        </p:nvSpPr>
-        <p:spPr>
-          <a:xfrm>
-            <a:off x="8166100" y="1219200"/>
-            <a:ext cx="165100" cy="177800"/>
-          </a:xfrm>
-          <a:prstGeom prst="rect">
-            <a:avLst/>
-          </a:prstGeom>
-          <a:noFill/>
-          <a:ln/>
-        </p:spPr>
-        <p:txBody>
-          <a:bodyPr wrap="square" lIns="0" tIns="0" rIns="0" bIns="0" rtlCol="0" anchor="ctr"/>
-          <a:lstStyle/>
-          <a:p>
-            <a:pPr algn="ctr" indent="0" marL="0">
-              <a:buNone/>
-            </a:pPr>
-            <a:r>
-              <a:rPr lang="en-US" sz="1000" dirty="0">
+            <a:endParaRPr lang="en-US" sz="1100" dirty="0"/>
+          </a:p>
+        </p:txBody>
+      </p:sp>
+      <p:sp>
+        <p:nvSpPr>
+          <p:cNvPr id="69" name="Text 47"/>
+          <p:cNvSpPr/>
+          <p:nvPr/>
+        </p:nvSpPr>
+        <p:spPr>
+          <a:xfrm>
+            <a:off x="8147050" y="1231900"/>
+            <a:ext cx="203200" cy="152400"/>
+          </a:xfrm>
+          <a:prstGeom prst="rect">
+            <a:avLst/>
+          </a:prstGeom>
+          <a:noFill/>
+          <a:ln/>
+        </p:spPr>
+        <p:txBody>
+          <a:bodyPr wrap="square" lIns="0" tIns="0" rIns="0" bIns="0" rtlCol="0" anchor="ctr"/>
+          <a:lstStyle/>
+          <a:p>
+            <a:pPr algn="ctr" indent="0" marL="0">
+              <a:buNone/>
+            </a:pPr>
+            <a:r>
+              <a:rPr lang="en-US" sz="1100" dirty="0">
                 <a:solidFill>
                   <a:srgbClr val="000000"/>
                 </a:solidFill>
@@ -3558,20 +3394,20 @@
               </a:rPr>
               <a:t>2</a:t>
             </a:r>
-            <a:endParaRPr lang="en-US" sz="1000" dirty="0"/>
-          </a:p>
-        </p:txBody>
-      </p:sp>
-      <p:sp>
-        <p:nvSpPr>
-          <p:cNvPr id="74" name="Text 72"/>
-          <p:cNvSpPr/>
-          <p:nvPr/>
-        </p:nvSpPr>
-        <p:spPr>
-          <a:xfrm>
-            <a:off x="1028700" y="1854200"/>
-            <a:ext cx="2006600" cy="177800"/>
+            <a:endParaRPr lang="en-US" sz="1100" dirty="0"/>
+          </a:p>
+        </p:txBody>
+      </p:sp>
+      <p:sp>
+        <p:nvSpPr>
+          <p:cNvPr id="70" name="Text 48"/>
+          <p:cNvSpPr/>
+          <p:nvPr/>
+        </p:nvSpPr>
+        <p:spPr>
+          <a:xfrm>
+            <a:off x="939800" y="1854200"/>
+            <a:ext cx="2311400" cy="177800"/>
           </a:xfrm>
           <a:prstGeom prst="rect">
             <a:avLst/>
@@ -3587,7 +3423,7 @@
               <a:buNone/>
             </a:pPr>
             <a:r>
-              <a:rPr lang="en-US" sz="1100" b="1" dirty="0">
+              <a:rPr lang="en-US" sz="1150" b="1" i="1" dirty="0">
                 <a:solidFill>
                   <a:srgbClr val="20186D"/>
                 </a:solidFill>
@@ -3595,15 +3431,15 @@
                 <a:ea typeface="Arial" pitchFamily="34" charset="-122"/>
                 <a:cs typeface="Arial" pitchFamily="34" charset="-120"/>
               </a:rPr>
-              <a:t>Augmented Vectors (from Top)</a:t>
-            </a:r>
-            <a:endParaRPr lang="en-US" sz="1100" dirty="0"/>
-          </a:p>
-        </p:txBody>
-      </p:sp>
-      <p:sp>
-        <p:nvSpPr>
-          <p:cNvPr id="75" name="Text 73"/>
+              <a:t>Ugmented Vectors ( from Top )</a:t>
+            </a:r>
+            <a:endParaRPr lang="en-US" sz="1150" dirty="0"/>
+          </a:p>
+        </p:txBody>
+      </p:sp>
+      <p:sp>
+        <p:nvSpPr>
+          <p:cNvPr id="71" name="Text 49"/>
           <p:cNvSpPr/>
           <p:nvPr/>
         </p:nvSpPr>
@@ -3654,78 +3490,80 @@
           </a:p>
         </p:txBody>
       </p:sp>
-      <p:sp>
-        <p:nvSpPr>
-          <p:cNvPr id="76" name="Shape 74"/>
-          <p:cNvSpPr/>
-          <p:nvPr/>
-        </p:nvSpPr>
-        <p:spPr>
-          <a:xfrm>
-            <a:off x="1193800" y="2298700"/>
-            <a:ext cx="0" cy="546100"/>
-          </a:xfrm>
-          <a:prstGeom prst="line">
-            <a:avLst/>
-          </a:prstGeom>
-          <a:noFill/>
-          <a:ln w="12700">
-            <a:solidFill>
-              <a:srgbClr val="000000"/>
-            </a:solidFill>
-            <a:prstDash val="solid"/>
-          </a:ln>
-        </p:spPr>
-      </p:sp>
-      <p:sp>
-        <p:nvSpPr>
-          <p:cNvPr id="77" name="Shape 75"/>
-          <p:cNvSpPr/>
-          <p:nvPr/>
-        </p:nvSpPr>
-        <p:spPr>
-          <a:xfrm>
-            <a:off x="1358900" y="2298700"/>
-            <a:ext cx="0" cy="546100"/>
-          </a:xfrm>
-          <a:prstGeom prst="line">
-            <a:avLst/>
-          </a:prstGeom>
-          <a:noFill/>
-          <a:ln w="12700">
-            <a:solidFill>
-              <a:srgbClr val="000000"/>
-            </a:solidFill>
-            <a:prstDash val="solid"/>
-          </a:ln>
-        </p:spPr>
-      </p:sp>
-      <p:sp>
-        <p:nvSpPr>
-          <p:cNvPr id="78" name="Text 76"/>
-          <p:cNvSpPr/>
-          <p:nvPr/>
-        </p:nvSpPr>
-        <p:spPr>
-          <a:xfrm>
-            <a:off x="1193800" y="2298700"/>
-            <a:ext cx="165100" cy="177800"/>
-          </a:xfrm>
-          <a:prstGeom prst="rect">
-            <a:avLst/>
-          </a:prstGeom>
-          <a:noFill/>
-          <a:ln/>
-        </p:spPr>
-        <p:txBody>
-          <a:bodyPr wrap="square" lIns="0" tIns="0" rIns="0" bIns="0" rtlCol="0" anchor="ctr"/>
-          <a:lstStyle/>
-          <a:p>
-            <a:pPr algn="ctr" indent="0" marL="0">
-              <a:buNone/>
-            </a:pPr>
-            <a:r>
-              <a:rPr lang="en-US" sz="1000" dirty="0">
+      <p:pic>
+        <p:nvPicPr>
+          <p:cNvPr id="72" name="Image 20" descr="/home/ahmed/Projects/ai_llm_slides/videos/machine-learning/03_ridger_regression_gradient_descent/recreated_pptx/build/assets/parens051/paren_aug51_lp.png">    </p:cNvPr>
+          <p:cNvPicPr>
+            <a:picLocks noChangeAspect="1"/>
+          </p:cNvPicPr>
+          <p:nvPr/>
+        </p:nvPicPr>
+        <p:blipFill>
+          <a:blip r:embed="rId21"/>
+          <a:stretch>
+            <a:fillRect/>
+          </a:stretch>
+        </p:blipFill>
+        <p:spPr>
+          <a:xfrm>
+            <a:off x="1165479" y="2279904"/>
+            <a:ext cx="44196" cy="571500"/>
+          </a:xfrm>
+          <a:prstGeom prst="rect">
+            <a:avLst/>
+          </a:prstGeom>
+        </p:spPr>
+      </p:pic>
+      <p:pic>
+        <p:nvPicPr>
+          <p:cNvPr id="73" name="Image 21" descr="/home/ahmed/Projects/ai_llm_slides/videos/machine-learning/03_ridger_regression_gradient_descent/recreated_pptx/build/assets/parens051/paren_aug51_rp.png">    </p:cNvPr>
+          <p:cNvPicPr>
+            <a:picLocks noChangeAspect="1"/>
+          </p:cNvPicPr>
+          <p:nvPr/>
+        </p:nvPicPr>
+        <p:blipFill>
+          <a:blip r:embed="rId22"/>
+          <a:stretch>
+            <a:fillRect/>
+          </a:stretch>
+        </p:blipFill>
+        <p:spPr>
+          <a:xfrm>
+            <a:off x="1336675" y="2279904"/>
+            <a:ext cx="44196" cy="571500"/>
+          </a:xfrm>
+          <a:prstGeom prst="rect">
+            <a:avLst/>
+          </a:prstGeom>
+        </p:spPr>
+      </p:pic>
+      <p:sp>
+        <p:nvSpPr>
+          <p:cNvPr id="74" name="Text 50"/>
+          <p:cNvSpPr/>
+          <p:nvPr/>
+        </p:nvSpPr>
+        <p:spPr>
+          <a:xfrm>
+            <a:off x="1174750" y="2311400"/>
+            <a:ext cx="203200" cy="152400"/>
+          </a:xfrm>
+          <a:prstGeom prst="rect">
+            <a:avLst/>
+          </a:prstGeom>
+          <a:noFill/>
+          <a:ln/>
+        </p:spPr>
+        <p:txBody>
+          <a:bodyPr wrap="square" lIns="0" tIns="0" rIns="0" bIns="0" rtlCol="0" anchor="ctr"/>
+          <a:lstStyle/>
+          <a:p>
+            <a:pPr algn="ctr" indent="0" marL="0">
+              <a:buNone/>
+            </a:pPr>
+            <a:r>
+              <a:rPr lang="en-US" sz="1100" dirty="0">
                 <a:solidFill>
                   <a:srgbClr val="000000"/>
                 </a:solidFill>
@@ -3735,36 +3573,36 @@
               </a:rPr>
               <a:t>1</a:t>
             </a:r>
-            <a:endParaRPr lang="en-US" sz="1000" dirty="0"/>
-          </a:p>
-        </p:txBody>
-      </p:sp>
-      <p:sp>
-        <p:nvSpPr>
-          <p:cNvPr id="79" name="Text 77"/>
-          <p:cNvSpPr/>
-          <p:nvPr/>
-        </p:nvSpPr>
-        <p:spPr>
-          <a:xfrm>
-            <a:off x="1193800" y="2489200"/>
-            <a:ext cx="165100" cy="177800"/>
-          </a:xfrm>
-          <a:prstGeom prst="rect">
-            <a:avLst/>
-          </a:prstGeom>
-          <a:noFill/>
-          <a:ln/>
-        </p:spPr>
-        <p:txBody>
-          <a:bodyPr wrap="square" lIns="0" tIns="0" rIns="0" bIns="0" rtlCol="0" anchor="ctr"/>
-          <a:lstStyle/>
-          <a:p>
-            <a:pPr algn="ctr" indent="0" marL="0">
-              <a:buNone/>
-            </a:pPr>
-            <a:r>
-              <a:rPr lang="en-US" sz="1000" dirty="0">
+            <a:endParaRPr lang="en-US" sz="1100" dirty="0"/>
+          </a:p>
+        </p:txBody>
+      </p:sp>
+      <p:sp>
+        <p:nvSpPr>
+          <p:cNvPr id="75" name="Text 51"/>
+          <p:cNvSpPr/>
+          <p:nvPr/>
+        </p:nvSpPr>
+        <p:spPr>
+          <a:xfrm>
+            <a:off x="1174750" y="2501900"/>
+            <a:ext cx="203200" cy="152400"/>
+          </a:xfrm>
+          <a:prstGeom prst="rect">
+            <a:avLst/>
+          </a:prstGeom>
+          <a:noFill/>
+          <a:ln/>
+        </p:spPr>
+        <p:txBody>
+          <a:bodyPr wrap="square" lIns="0" tIns="0" rIns="0" bIns="0" rtlCol="0" anchor="ctr"/>
+          <a:lstStyle/>
+          <a:p>
+            <a:pPr algn="ctr" indent="0" marL="0">
+              <a:buNone/>
+            </a:pPr>
+            <a:r>
+              <a:rPr lang="en-US" sz="1100" dirty="0">
                 <a:solidFill>
                   <a:srgbClr val="000000"/>
                 </a:solidFill>
@@ -3774,36 +3612,36 @@
               </a:rPr>
               <a:t>1</a:t>
             </a:r>
-            <a:endParaRPr lang="en-US" sz="1000" dirty="0"/>
-          </a:p>
-        </p:txBody>
-      </p:sp>
-      <p:sp>
-        <p:nvSpPr>
-          <p:cNvPr id="80" name="Text 78"/>
-          <p:cNvSpPr/>
-          <p:nvPr/>
-        </p:nvSpPr>
-        <p:spPr>
-          <a:xfrm>
-            <a:off x="1193800" y="2679700"/>
-            <a:ext cx="165100" cy="177800"/>
-          </a:xfrm>
-          <a:prstGeom prst="rect">
-            <a:avLst/>
-          </a:prstGeom>
-          <a:noFill/>
-          <a:ln/>
-        </p:spPr>
-        <p:txBody>
-          <a:bodyPr wrap="square" lIns="0" tIns="0" rIns="0" bIns="0" rtlCol="0" anchor="ctr"/>
-          <a:lstStyle/>
-          <a:p>
-            <a:pPr algn="ctr" indent="0" marL="0">
-              <a:buNone/>
-            </a:pPr>
-            <a:r>
-              <a:rPr lang="en-US" sz="1000" dirty="0">
+            <a:endParaRPr lang="en-US" sz="1100" dirty="0"/>
+          </a:p>
+        </p:txBody>
+      </p:sp>
+      <p:sp>
+        <p:nvSpPr>
+          <p:cNvPr id="76" name="Text 52"/>
+          <p:cNvSpPr/>
+          <p:nvPr/>
+        </p:nvSpPr>
+        <p:spPr>
+          <a:xfrm>
+            <a:off x="1174750" y="2692400"/>
+            <a:ext cx="203200" cy="152400"/>
+          </a:xfrm>
+          <a:prstGeom prst="rect">
+            <a:avLst/>
+          </a:prstGeom>
+          <a:noFill/>
+          <a:ln/>
+        </p:spPr>
+        <p:txBody>
+          <a:bodyPr wrap="square" lIns="0" tIns="0" rIns="0" bIns="0" rtlCol="0" anchor="ctr"/>
+          <a:lstStyle/>
+          <a:p>
+            <a:pPr algn="ctr" indent="0" marL="0">
+              <a:buNone/>
+            </a:pPr>
+            <a:r>
+              <a:rPr lang="en-US" sz="1100" dirty="0">
                 <a:solidFill>
                   <a:srgbClr val="000000"/>
                 </a:solidFill>
@@ -3813,13 +3651,13 @@
               </a:rPr>
               <a:t>1</a:t>
             </a:r>
-            <a:endParaRPr lang="en-US" sz="1000" dirty="0"/>
-          </a:p>
-        </p:txBody>
-      </p:sp>
-      <p:sp>
-        <p:nvSpPr>
-          <p:cNvPr id="81" name="Text 79"/>
+            <a:endParaRPr lang="en-US" sz="1100" dirty="0"/>
+          </a:p>
+        </p:txBody>
+      </p:sp>
+      <p:sp>
+        <p:nvSpPr>
+          <p:cNvPr id="77" name="Text 53"/>
           <p:cNvSpPr/>
           <p:nvPr/>
         </p:nvSpPr>
@@ -3872,7 +3710,7 @@
       </p:sp>
       <p:sp>
         <p:nvSpPr>
-          <p:cNvPr id="82" name="Text 80"/>
+          <p:cNvPr id="78" name="Text 54"/>
           <p:cNvSpPr/>
           <p:nvPr/>
         </p:nvSpPr>
@@ -3923,78 +3761,80 @@
           </a:p>
         </p:txBody>
       </p:sp>
-      <p:sp>
-        <p:nvSpPr>
-          <p:cNvPr id="83" name="Shape 81"/>
-          <p:cNvSpPr/>
-          <p:nvPr/>
-        </p:nvSpPr>
-        <p:spPr>
-          <a:xfrm>
-            <a:off x="1460500" y="2298700"/>
-            <a:ext cx="0" cy="546100"/>
-          </a:xfrm>
-          <a:prstGeom prst="line">
-            <a:avLst/>
-          </a:prstGeom>
-          <a:noFill/>
-          <a:ln w="12700">
-            <a:solidFill>
-              <a:srgbClr val="000000"/>
-            </a:solidFill>
-            <a:prstDash val="solid"/>
-          </a:ln>
-        </p:spPr>
-      </p:sp>
-      <p:sp>
-        <p:nvSpPr>
-          <p:cNvPr id="84" name="Shape 82"/>
-          <p:cNvSpPr/>
-          <p:nvPr/>
-        </p:nvSpPr>
-        <p:spPr>
-          <a:xfrm>
-            <a:off x="1625600" y="2298700"/>
-            <a:ext cx="0" cy="546100"/>
-          </a:xfrm>
-          <a:prstGeom prst="line">
-            <a:avLst/>
-          </a:prstGeom>
-          <a:noFill/>
-          <a:ln w="12700">
-            <a:solidFill>
-              <a:srgbClr val="000000"/>
-            </a:solidFill>
-            <a:prstDash val="solid"/>
-          </a:ln>
-        </p:spPr>
-      </p:sp>
-      <p:sp>
-        <p:nvSpPr>
-          <p:cNvPr id="85" name="Text 83"/>
-          <p:cNvSpPr/>
-          <p:nvPr/>
-        </p:nvSpPr>
-        <p:spPr>
-          <a:xfrm>
-            <a:off x="1460500" y="2298700"/>
-            <a:ext cx="165100" cy="177800"/>
-          </a:xfrm>
-          <a:prstGeom prst="rect">
-            <a:avLst/>
-          </a:prstGeom>
-          <a:noFill/>
-          <a:ln/>
-        </p:spPr>
-        <p:txBody>
-          <a:bodyPr wrap="square" lIns="0" tIns="0" rIns="0" bIns="0" rtlCol="0" anchor="ctr"/>
-          <a:lstStyle/>
-          <a:p>
-            <a:pPr algn="ctr" indent="0" marL="0">
-              <a:buNone/>
-            </a:pPr>
-            <a:r>
-              <a:rPr lang="en-US" sz="1000" dirty="0">
+      <p:pic>
+        <p:nvPicPr>
+          <p:cNvPr id="79" name="Image 22" descr="/home/ahmed/Projects/ai_llm_slides/videos/machine-learning/03_ridger_regression_gradient_descent/recreated_pptx/build/assets/parens051/paren_aug51_lp.png">    </p:cNvPr>
+          <p:cNvPicPr>
+            <a:picLocks noChangeAspect="1"/>
+          </p:cNvPicPr>
+          <p:nvPr/>
+        </p:nvPicPr>
+        <p:blipFill>
+          <a:blip r:embed="rId23"/>
+          <a:stretch>
+            <a:fillRect/>
+          </a:stretch>
+        </p:blipFill>
+        <p:spPr>
+          <a:xfrm>
+            <a:off x="1432179" y="2279904"/>
+            <a:ext cx="44196" cy="571500"/>
+          </a:xfrm>
+          <a:prstGeom prst="rect">
+            <a:avLst/>
+          </a:prstGeom>
+        </p:spPr>
+      </p:pic>
+      <p:pic>
+        <p:nvPicPr>
+          <p:cNvPr id="80" name="Image 23" descr="/home/ahmed/Projects/ai_llm_slides/videos/machine-learning/03_ridger_regression_gradient_descent/recreated_pptx/build/assets/parens051/paren_aug51_rp.png">    </p:cNvPr>
+          <p:cNvPicPr>
+            <a:picLocks noChangeAspect="1"/>
+          </p:cNvPicPr>
+          <p:nvPr/>
+        </p:nvPicPr>
+        <p:blipFill>
+          <a:blip r:embed="rId24"/>
+          <a:stretch>
+            <a:fillRect/>
+          </a:stretch>
+        </p:blipFill>
+        <p:spPr>
+          <a:xfrm>
+            <a:off x="1603375" y="2279904"/>
+            <a:ext cx="44196" cy="571500"/>
+          </a:xfrm>
+          <a:prstGeom prst="rect">
+            <a:avLst/>
+          </a:prstGeom>
+        </p:spPr>
+      </p:pic>
+      <p:sp>
+        <p:nvSpPr>
+          <p:cNvPr id="81" name="Text 55"/>
+          <p:cNvSpPr/>
+          <p:nvPr/>
+        </p:nvSpPr>
+        <p:spPr>
+          <a:xfrm>
+            <a:off x="1441450" y="2311400"/>
+            <a:ext cx="203200" cy="152400"/>
+          </a:xfrm>
+          <a:prstGeom prst="rect">
+            <a:avLst/>
+          </a:prstGeom>
+          <a:noFill/>
+          <a:ln/>
+        </p:spPr>
+        <p:txBody>
+          <a:bodyPr wrap="square" lIns="0" tIns="0" rIns="0" bIns="0" rtlCol="0" anchor="ctr"/>
+          <a:lstStyle/>
+          <a:p>
+            <a:pPr algn="ctr" indent="0" marL="0">
+              <a:buNone/>
+            </a:pPr>
+            <a:r>
+              <a:rPr lang="en-US" sz="1100" dirty="0">
                 <a:solidFill>
                   <a:srgbClr val="000000"/>
                 </a:solidFill>
@@ -4004,36 +3844,36 @@
               </a:rPr>
               <a:t>1</a:t>
             </a:r>
-            <a:endParaRPr lang="en-US" sz="1000" dirty="0"/>
-          </a:p>
-        </p:txBody>
-      </p:sp>
-      <p:sp>
-        <p:nvSpPr>
-          <p:cNvPr id="86" name="Text 84"/>
-          <p:cNvSpPr/>
-          <p:nvPr/>
-        </p:nvSpPr>
-        <p:spPr>
-          <a:xfrm>
-            <a:off x="1460500" y="2489200"/>
-            <a:ext cx="165100" cy="177800"/>
-          </a:xfrm>
-          <a:prstGeom prst="rect">
-            <a:avLst/>
-          </a:prstGeom>
-          <a:noFill/>
-          <a:ln/>
-        </p:spPr>
-        <p:txBody>
-          <a:bodyPr wrap="square" lIns="0" tIns="0" rIns="0" bIns="0" rtlCol="0" anchor="ctr"/>
-          <a:lstStyle/>
-          <a:p>
-            <a:pPr algn="ctr" indent="0" marL="0">
-              <a:buNone/>
-            </a:pPr>
-            <a:r>
-              <a:rPr lang="en-US" sz="1000" dirty="0">
+            <a:endParaRPr lang="en-US" sz="1100" dirty="0"/>
+          </a:p>
+        </p:txBody>
+      </p:sp>
+      <p:sp>
+        <p:nvSpPr>
+          <p:cNvPr id="82" name="Text 56"/>
+          <p:cNvSpPr/>
+          <p:nvPr/>
+        </p:nvSpPr>
+        <p:spPr>
+          <a:xfrm>
+            <a:off x="1441450" y="2501900"/>
+            <a:ext cx="203200" cy="152400"/>
+          </a:xfrm>
+          <a:prstGeom prst="rect">
+            <a:avLst/>
+          </a:prstGeom>
+          <a:noFill/>
+          <a:ln/>
+        </p:spPr>
+        <p:txBody>
+          <a:bodyPr wrap="square" lIns="0" tIns="0" rIns="0" bIns="0" rtlCol="0" anchor="ctr"/>
+          <a:lstStyle/>
+          <a:p>
+            <a:pPr algn="ctr" indent="0" marL="0">
+              <a:buNone/>
+            </a:pPr>
+            <a:r>
+              <a:rPr lang="en-US" sz="1100" dirty="0">
                 <a:solidFill>
                   <a:srgbClr val="000000"/>
                 </a:solidFill>
@@ -4043,36 +3883,36 @@
               </a:rPr>
               <a:t>2</a:t>
             </a:r>
-            <a:endParaRPr lang="en-US" sz="1000" dirty="0"/>
-          </a:p>
-        </p:txBody>
-      </p:sp>
-      <p:sp>
-        <p:nvSpPr>
-          <p:cNvPr id="87" name="Text 85"/>
-          <p:cNvSpPr/>
-          <p:nvPr/>
-        </p:nvSpPr>
-        <p:spPr>
-          <a:xfrm>
-            <a:off x="1460500" y="2679700"/>
-            <a:ext cx="165100" cy="177800"/>
-          </a:xfrm>
-          <a:prstGeom prst="rect">
-            <a:avLst/>
-          </a:prstGeom>
-          <a:noFill/>
-          <a:ln/>
-        </p:spPr>
-        <p:txBody>
-          <a:bodyPr wrap="square" lIns="0" tIns="0" rIns="0" bIns="0" rtlCol="0" anchor="ctr"/>
-          <a:lstStyle/>
-          <a:p>
-            <a:pPr algn="ctr" indent="0" marL="0">
-              <a:buNone/>
-            </a:pPr>
-            <a:r>
-              <a:rPr lang="en-US" sz="1000" dirty="0">
+            <a:endParaRPr lang="en-US" sz="1100" dirty="0"/>
+          </a:p>
+        </p:txBody>
+      </p:sp>
+      <p:sp>
+        <p:nvSpPr>
+          <p:cNvPr id="83" name="Text 57"/>
+          <p:cNvSpPr/>
+          <p:nvPr/>
+        </p:nvSpPr>
+        <p:spPr>
+          <a:xfrm>
+            <a:off x="1441450" y="2692400"/>
+            <a:ext cx="203200" cy="152400"/>
+          </a:xfrm>
+          <a:prstGeom prst="rect">
+            <a:avLst/>
+          </a:prstGeom>
+          <a:noFill/>
+          <a:ln/>
+        </p:spPr>
+        <p:txBody>
+          <a:bodyPr wrap="square" lIns="0" tIns="0" rIns="0" bIns="0" rtlCol="0" anchor="ctr"/>
+          <a:lstStyle/>
+          <a:p>
+            <a:pPr algn="ctr" indent="0" marL="0">
+              <a:buNone/>
+            </a:pPr>
+            <a:r>
+              <a:rPr lang="en-US" sz="1100" dirty="0">
                 <a:solidFill>
                   <a:srgbClr val="000000"/>
                 </a:solidFill>
@@ -4082,13 +3922,13 @@
               </a:rPr>
               <a:t>1</a:t>
             </a:r>
-            <a:endParaRPr lang="en-US" sz="1000" dirty="0"/>
-          </a:p>
-        </p:txBody>
-      </p:sp>
-      <p:sp>
-        <p:nvSpPr>
-          <p:cNvPr id="88" name="Text 86"/>
+            <a:endParaRPr lang="en-US" sz="1100" dirty="0"/>
+          </a:p>
+        </p:txBody>
+      </p:sp>
+      <p:sp>
+        <p:nvSpPr>
+          <p:cNvPr id="84" name="Text 58"/>
           <p:cNvSpPr/>
           <p:nvPr/>
         </p:nvSpPr>
@@ -4141,7 +3981,7 @@
       </p:sp>
       <p:sp>
         <p:nvSpPr>
-          <p:cNvPr id="89" name="Text 87"/>
+          <p:cNvPr id="85" name="Text 59"/>
           <p:cNvSpPr/>
           <p:nvPr/>
         </p:nvSpPr>
@@ -4192,78 +4032,80 @@
           </a:p>
         </p:txBody>
       </p:sp>
-      <p:sp>
-        <p:nvSpPr>
-          <p:cNvPr id="90" name="Shape 88"/>
-          <p:cNvSpPr/>
-          <p:nvPr/>
-        </p:nvSpPr>
-        <p:spPr>
-          <a:xfrm>
-            <a:off x="1739900" y="2298700"/>
-            <a:ext cx="0" cy="546100"/>
-          </a:xfrm>
-          <a:prstGeom prst="line">
-            <a:avLst/>
-          </a:prstGeom>
-          <a:noFill/>
-          <a:ln w="12700">
-            <a:solidFill>
-              <a:srgbClr val="000000"/>
-            </a:solidFill>
-            <a:prstDash val="solid"/>
-          </a:ln>
-        </p:spPr>
-      </p:sp>
-      <p:sp>
-        <p:nvSpPr>
-          <p:cNvPr id="91" name="Shape 89"/>
-          <p:cNvSpPr/>
-          <p:nvPr/>
-        </p:nvSpPr>
-        <p:spPr>
-          <a:xfrm>
-            <a:off x="1917700" y="2298700"/>
-            <a:ext cx="0" cy="546100"/>
-          </a:xfrm>
-          <a:prstGeom prst="line">
-            <a:avLst/>
-          </a:prstGeom>
-          <a:noFill/>
-          <a:ln w="12700">
-            <a:solidFill>
-              <a:srgbClr val="000000"/>
-            </a:solidFill>
-            <a:prstDash val="solid"/>
-          </a:ln>
-        </p:spPr>
-      </p:sp>
-      <p:sp>
-        <p:nvSpPr>
-          <p:cNvPr id="92" name="Text 90"/>
-          <p:cNvSpPr/>
-          <p:nvPr/>
-        </p:nvSpPr>
-        <p:spPr>
-          <a:xfrm>
-            <a:off x="1739900" y="2298700"/>
-            <a:ext cx="177800" cy="177800"/>
-          </a:xfrm>
-          <a:prstGeom prst="rect">
-            <a:avLst/>
-          </a:prstGeom>
-          <a:noFill/>
-          <a:ln/>
-        </p:spPr>
-        <p:txBody>
-          <a:bodyPr wrap="square" lIns="0" tIns="0" rIns="0" bIns="0" rtlCol="0" anchor="ctr"/>
-          <a:lstStyle/>
-          <a:p>
-            <a:pPr algn="ctr" indent="0" marL="0">
-              <a:buNone/>
-            </a:pPr>
-            <a:r>
-              <a:rPr lang="en-US" sz="1000" dirty="0">
+      <p:pic>
+        <p:nvPicPr>
+          <p:cNvPr id="86" name="Image 24" descr="/home/ahmed/Projects/ai_llm_slides/videos/machine-learning/03_ridger_regression_gradient_descent/recreated_pptx/build/assets/parens051/paren_aug51_lp.png">    </p:cNvPr>
+          <p:cNvPicPr>
+            <a:picLocks noChangeAspect="1"/>
+          </p:cNvPicPr>
+          <p:nvPr/>
+        </p:nvPicPr>
+        <p:blipFill>
+          <a:blip r:embed="rId25"/>
+          <a:stretch>
+            <a:fillRect/>
+          </a:stretch>
+        </p:blipFill>
+        <p:spPr>
+          <a:xfrm>
+            <a:off x="1724279" y="2279904"/>
+            <a:ext cx="44196" cy="571500"/>
+          </a:xfrm>
+          <a:prstGeom prst="rect">
+            <a:avLst/>
+          </a:prstGeom>
+        </p:spPr>
+      </p:pic>
+      <p:pic>
+        <p:nvPicPr>
+          <p:cNvPr id="87" name="Image 25" descr="/home/ahmed/Projects/ai_llm_slides/videos/machine-learning/03_ridger_regression_gradient_descent/recreated_pptx/build/assets/parens051/paren_aug51_rp.png">    </p:cNvPr>
+          <p:cNvPicPr>
+            <a:picLocks noChangeAspect="1"/>
+          </p:cNvPicPr>
+          <p:nvPr/>
+        </p:nvPicPr>
+        <p:blipFill>
+          <a:blip r:embed="rId26"/>
+          <a:stretch>
+            <a:fillRect/>
+          </a:stretch>
+        </p:blipFill>
+        <p:spPr>
+          <a:xfrm>
+            <a:off x="1895475" y="2279904"/>
+            <a:ext cx="44196" cy="571500"/>
+          </a:xfrm>
+          <a:prstGeom prst="rect">
+            <a:avLst/>
+          </a:prstGeom>
+        </p:spPr>
+      </p:pic>
+      <p:sp>
+        <p:nvSpPr>
+          <p:cNvPr id="88" name="Text 60"/>
+          <p:cNvSpPr/>
+          <p:nvPr/>
+        </p:nvSpPr>
+        <p:spPr>
+          <a:xfrm>
+            <a:off x="1727200" y="2311400"/>
+            <a:ext cx="203200" cy="152400"/>
+          </a:xfrm>
+          <a:prstGeom prst="rect">
+            <a:avLst/>
+          </a:prstGeom>
+          <a:noFill/>
+          <a:ln/>
+        </p:spPr>
+        <p:txBody>
+          <a:bodyPr wrap="square" lIns="0" tIns="0" rIns="0" bIns="0" rtlCol="0" anchor="ctr"/>
+          <a:lstStyle/>
+          <a:p>
+            <a:pPr algn="ctr" indent="0" marL="0">
+              <a:buNone/>
+            </a:pPr>
+            <a:r>
+              <a:rPr lang="en-US" sz="1100" dirty="0">
                 <a:solidFill>
                   <a:srgbClr val="000000"/>
                 </a:solidFill>
@@ -4273,36 +4115,36 @@
               </a:rPr>
               <a:t>1</a:t>
             </a:r>
-            <a:endParaRPr lang="en-US" sz="1000" dirty="0"/>
-          </a:p>
-        </p:txBody>
-      </p:sp>
-      <p:sp>
-        <p:nvSpPr>
-          <p:cNvPr id="93" name="Text 91"/>
-          <p:cNvSpPr/>
-          <p:nvPr/>
-        </p:nvSpPr>
-        <p:spPr>
-          <a:xfrm>
-            <a:off x="1739900" y="2489200"/>
-            <a:ext cx="177800" cy="177800"/>
-          </a:xfrm>
-          <a:prstGeom prst="rect">
-            <a:avLst/>
-          </a:prstGeom>
-          <a:noFill/>
-          <a:ln/>
-        </p:spPr>
-        <p:txBody>
-          <a:bodyPr wrap="square" lIns="0" tIns="0" rIns="0" bIns="0" rtlCol="0" anchor="ctr"/>
-          <a:lstStyle/>
-          <a:p>
-            <a:pPr algn="ctr" indent="0" marL="0">
-              <a:buNone/>
-            </a:pPr>
-            <a:r>
-              <a:rPr lang="en-US" sz="1000" dirty="0">
+            <a:endParaRPr lang="en-US" sz="1100" dirty="0"/>
+          </a:p>
+        </p:txBody>
+      </p:sp>
+      <p:sp>
+        <p:nvSpPr>
+          <p:cNvPr id="89" name="Text 61"/>
+          <p:cNvSpPr/>
+          <p:nvPr/>
+        </p:nvSpPr>
+        <p:spPr>
+          <a:xfrm>
+            <a:off x="1727200" y="2501900"/>
+            <a:ext cx="203200" cy="152400"/>
+          </a:xfrm>
+          <a:prstGeom prst="rect">
+            <a:avLst/>
+          </a:prstGeom>
+          <a:noFill/>
+          <a:ln/>
+        </p:spPr>
+        <p:txBody>
+          <a:bodyPr wrap="square" lIns="0" tIns="0" rIns="0" bIns="0" rtlCol="0" anchor="ctr"/>
+          <a:lstStyle/>
+          <a:p>
+            <a:pPr algn="ctr" indent="0" marL="0">
+              <a:buNone/>
+            </a:pPr>
+            <a:r>
+              <a:rPr lang="en-US" sz="1100" dirty="0">
                 <a:solidFill>
                   <a:srgbClr val="000000"/>
                 </a:solidFill>
@@ -4312,36 +4154,36 @@
               </a:rPr>
               <a:t>1</a:t>
             </a:r>
-            <a:endParaRPr lang="en-US" sz="1000" dirty="0"/>
-          </a:p>
-        </p:txBody>
-      </p:sp>
-      <p:sp>
-        <p:nvSpPr>
-          <p:cNvPr id="94" name="Text 92"/>
-          <p:cNvSpPr/>
-          <p:nvPr/>
-        </p:nvSpPr>
-        <p:spPr>
-          <a:xfrm>
-            <a:off x="1739900" y="2679700"/>
-            <a:ext cx="177800" cy="177800"/>
-          </a:xfrm>
-          <a:prstGeom prst="rect">
-            <a:avLst/>
-          </a:prstGeom>
-          <a:noFill/>
-          <a:ln/>
-        </p:spPr>
-        <p:txBody>
-          <a:bodyPr wrap="square" lIns="0" tIns="0" rIns="0" bIns="0" rtlCol="0" anchor="ctr"/>
-          <a:lstStyle/>
-          <a:p>
-            <a:pPr algn="ctr" indent="0" marL="0">
-              <a:buNone/>
-            </a:pPr>
-            <a:r>
-              <a:rPr lang="en-US" sz="1000" dirty="0">
+            <a:endParaRPr lang="en-US" sz="1100" dirty="0"/>
+          </a:p>
+        </p:txBody>
+      </p:sp>
+      <p:sp>
+        <p:nvSpPr>
+          <p:cNvPr id="90" name="Text 62"/>
+          <p:cNvSpPr/>
+          <p:nvPr/>
+        </p:nvSpPr>
+        <p:spPr>
+          <a:xfrm>
+            <a:off x="1727200" y="2692400"/>
+            <a:ext cx="203200" cy="152400"/>
+          </a:xfrm>
+          <a:prstGeom prst="rect">
+            <a:avLst/>
+          </a:prstGeom>
+          <a:noFill/>
+          <a:ln/>
+        </p:spPr>
+        <p:txBody>
+          <a:bodyPr wrap="square" lIns="0" tIns="0" rIns="0" bIns="0" rtlCol="0" anchor="ctr"/>
+          <a:lstStyle/>
+          <a:p>
+            <a:pPr algn="ctr" indent="0" marL="0">
+              <a:buNone/>
+            </a:pPr>
+            <a:r>
+              <a:rPr lang="en-US" sz="1100" dirty="0">
                 <a:solidFill>
                   <a:srgbClr val="000000"/>
                 </a:solidFill>
@@ -4351,13 +4193,13 @@
               </a:rPr>
               <a:t>2</a:t>
             </a:r>
-            <a:endParaRPr lang="en-US" sz="1000" dirty="0"/>
-          </a:p>
-        </p:txBody>
-      </p:sp>
-      <p:sp>
-        <p:nvSpPr>
-          <p:cNvPr id="95" name="Text 93"/>
+            <a:endParaRPr lang="en-US" sz="1100" dirty="0"/>
+          </a:p>
+        </p:txBody>
+      </p:sp>
+      <p:sp>
+        <p:nvSpPr>
+          <p:cNvPr id="91" name="Text 63"/>
           <p:cNvSpPr/>
           <p:nvPr/>
         </p:nvSpPr>
@@ -4410,7 +4252,7 @@
       </p:sp>
       <p:sp>
         <p:nvSpPr>
-          <p:cNvPr id="96" name="Text 94"/>
+          <p:cNvPr id="92" name="Text 64"/>
           <p:cNvSpPr/>
           <p:nvPr/>
         </p:nvSpPr>
@@ -4461,78 +4303,80 @@
           </a:p>
         </p:txBody>
       </p:sp>
-      <p:sp>
-        <p:nvSpPr>
-          <p:cNvPr id="97" name="Shape 95"/>
-          <p:cNvSpPr/>
-          <p:nvPr/>
-        </p:nvSpPr>
-        <p:spPr>
-          <a:xfrm>
-            <a:off x="2032000" y="2298700"/>
-            <a:ext cx="0" cy="546100"/>
-          </a:xfrm>
-          <a:prstGeom prst="line">
-            <a:avLst/>
-          </a:prstGeom>
-          <a:noFill/>
-          <a:ln w="12700">
-            <a:solidFill>
-              <a:srgbClr val="000000"/>
-            </a:solidFill>
-            <a:prstDash val="solid"/>
-          </a:ln>
-        </p:spPr>
-      </p:sp>
-      <p:sp>
-        <p:nvSpPr>
-          <p:cNvPr id="98" name="Shape 96"/>
-          <p:cNvSpPr/>
-          <p:nvPr/>
-        </p:nvSpPr>
-        <p:spPr>
-          <a:xfrm>
-            <a:off x="2197100" y="2298700"/>
-            <a:ext cx="0" cy="546100"/>
-          </a:xfrm>
-          <a:prstGeom prst="line">
-            <a:avLst/>
-          </a:prstGeom>
-          <a:noFill/>
-          <a:ln w="12700">
-            <a:solidFill>
-              <a:srgbClr val="000000"/>
-            </a:solidFill>
-            <a:prstDash val="solid"/>
-          </a:ln>
-        </p:spPr>
-      </p:sp>
-      <p:sp>
-        <p:nvSpPr>
-          <p:cNvPr id="99" name="Text 97"/>
-          <p:cNvSpPr/>
-          <p:nvPr/>
-        </p:nvSpPr>
-        <p:spPr>
-          <a:xfrm>
-            <a:off x="2032000" y="2298700"/>
-            <a:ext cx="165100" cy="177800"/>
-          </a:xfrm>
-          <a:prstGeom prst="rect">
-            <a:avLst/>
-          </a:prstGeom>
-          <a:noFill/>
-          <a:ln/>
-        </p:spPr>
-        <p:txBody>
-          <a:bodyPr wrap="square" lIns="0" tIns="0" rIns="0" bIns="0" rtlCol="0" anchor="ctr"/>
-          <a:lstStyle/>
-          <a:p>
-            <a:pPr algn="ctr" indent="0" marL="0">
-              <a:buNone/>
-            </a:pPr>
-            <a:r>
-              <a:rPr lang="en-US" sz="1000" dirty="0">
+      <p:pic>
+        <p:nvPicPr>
+          <p:cNvPr id="93" name="Image 26" descr="/home/ahmed/Projects/ai_llm_slides/videos/machine-learning/03_ridger_regression_gradient_descent/recreated_pptx/build/assets/parens051/paren_aug51_lp.png">    </p:cNvPr>
+          <p:cNvPicPr>
+            <a:picLocks noChangeAspect="1"/>
+          </p:cNvPicPr>
+          <p:nvPr/>
+        </p:nvPicPr>
+        <p:blipFill>
+          <a:blip r:embed="rId27"/>
+          <a:stretch>
+            <a:fillRect/>
+          </a:stretch>
+        </p:blipFill>
+        <p:spPr>
+          <a:xfrm>
+            <a:off x="2003679" y="2279904"/>
+            <a:ext cx="44196" cy="571500"/>
+          </a:xfrm>
+          <a:prstGeom prst="rect">
+            <a:avLst/>
+          </a:prstGeom>
+        </p:spPr>
+      </p:pic>
+      <p:pic>
+        <p:nvPicPr>
+          <p:cNvPr id="94" name="Image 27" descr="/home/ahmed/Projects/ai_llm_slides/videos/machine-learning/03_ridger_regression_gradient_descent/recreated_pptx/build/assets/parens051/paren_aug51_rp.png">    </p:cNvPr>
+          <p:cNvPicPr>
+            <a:picLocks noChangeAspect="1"/>
+          </p:cNvPicPr>
+          <p:nvPr/>
+        </p:nvPicPr>
+        <p:blipFill>
+          <a:blip r:embed="rId28"/>
+          <a:stretch>
+            <a:fillRect/>
+          </a:stretch>
+        </p:blipFill>
+        <p:spPr>
+          <a:xfrm>
+            <a:off x="2174875" y="2279904"/>
+            <a:ext cx="44196" cy="571500"/>
+          </a:xfrm>
+          <a:prstGeom prst="rect">
+            <a:avLst/>
+          </a:prstGeom>
+        </p:spPr>
+      </p:pic>
+      <p:sp>
+        <p:nvSpPr>
+          <p:cNvPr id="95" name="Text 65"/>
+          <p:cNvSpPr/>
+          <p:nvPr/>
+        </p:nvSpPr>
+        <p:spPr>
+          <a:xfrm>
+            <a:off x="2012950" y="2311400"/>
+            <a:ext cx="203200" cy="152400"/>
+          </a:xfrm>
+          <a:prstGeom prst="rect">
+            <a:avLst/>
+          </a:prstGeom>
+          <a:noFill/>
+          <a:ln/>
+        </p:spPr>
+        <p:txBody>
+          <a:bodyPr wrap="square" lIns="0" tIns="0" rIns="0" bIns="0" rtlCol="0" anchor="ctr"/>
+          <a:lstStyle/>
+          <a:p>
+            <a:pPr algn="ctr" indent="0" marL="0">
+              <a:buNone/>
+            </a:pPr>
+            <a:r>
+              <a:rPr lang="en-US" sz="1100" dirty="0">
                 <a:solidFill>
                   <a:srgbClr val="000000"/>
                 </a:solidFill>
@@ -4542,36 +4386,36 @@
               </a:rPr>
               <a:t>1</a:t>
             </a:r>
-            <a:endParaRPr lang="en-US" sz="1000" dirty="0"/>
-          </a:p>
-        </p:txBody>
-      </p:sp>
-      <p:sp>
-        <p:nvSpPr>
-          <p:cNvPr id="100" name="Text 98"/>
-          <p:cNvSpPr/>
-          <p:nvPr/>
-        </p:nvSpPr>
-        <p:spPr>
-          <a:xfrm>
-            <a:off x="2032000" y="2489200"/>
-            <a:ext cx="165100" cy="177800"/>
-          </a:xfrm>
-          <a:prstGeom prst="rect">
-            <a:avLst/>
-          </a:prstGeom>
-          <a:noFill/>
-          <a:ln/>
-        </p:spPr>
-        <p:txBody>
-          <a:bodyPr wrap="square" lIns="0" tIns="0" rIns="0" bIns="0" rtlCol="0" anchor="ctr"/>
-          <a:lstStyle/>
-          <a:p>
-            <a:pPr algn="ctr" indent="0" marL="0">
-              <a:buNone/>
-            </a:pPr>
-            <a:r>
-              <a:rPr lang="en-US" sz="1000" dirty="0">
+            <a:endParaRPr lang="en-US" sz="1100" dirty="0"/>
+          </a:p>
+        </p:txBody>
+      </p:sp>
+      <p:sp>
+        <p:nvSpPr>
+          <p:cNvPr id="96" name="Text 66"/>
+          <p:cNvSpPr/>
+          <p:nvPr/>
+        </p:nvSpPr>
+        <p:spPr>
+          <a:xfrm>
+            <a:off x="2012950" y="2501900"/>
+            <a:ext cx="203200" cy="152400"/>
+          </a:xfrm>
+          <a:prstGeom prst="rect">
+            <a:avLst/>
+          </a:prstGeom>
+          <a:noFill/>
+          <a:ln/>
+        </p:spPr>
+        <p:txBody>
+          <a:bodyPr wrap="square" lIns="0" tIns="0" rIns="0" bIns="0" rtlCol="0" anchor="ctr"/>
+          <a:lstStyle/>
+          <a:p>
+            <a:pPr algn="ctr" indent="0" marL="0">
+              <a:buNone/>
+            </a:pPr>
+            <a:r>
+              <a:rPr lang="en-US" sz="1100" dirty="0">
                 <a:solidFill>
                   <a:srgbClr val="000000"/>
                 </a:solidFill>
@@ -4581,36 +4425,36 @@
               </a:rPr>
               <a:t>5</a:t>
             </a:r>
-            <a:endParaRPr lang="en-US" sz="1000" dirty="0"/>
-          </a:p>
-        </p:txBody>
-      </p:sp>
-      <p:sp>
-        <p:nvSpPr>
-          <p:cNvPr id="101" name="Text 99"/>
-          <p:cNvSpPr/>
-          <p:nvPr/>
-        </p:nvSpPr>
-        <p:spPr>
-          <a:xfrm>
-            <a:off x="2032000" y="2679700"/>
-            <a:ext cx="165100" cy="177800"/>
-          </a:xfrm>
-          <a:prstGeom prst="rect">
-            <a:avLst/>
-          </a:prstGeom>
-          <a:noFill/>
-          <a:ln/>
-        </p:spPr>
-        <p:txBody>
-          <a:bodyPr wrap="square" lIns="0" tIns="0" rIns="0" bIns="0" rtlCol="0" anchor="ctr"/>
-          <a:lstStyle/>
-          <a:p>
-            <a:pPr algn="ctr" indent="0" marL="0">
-              <a:buNone/>
-            </a:pPr>
-            <a:r>
-              <a:rPr lang="en-US" sz="1000" dirty="0">
+            <a:endParaRPr lang="en-US" sz="1100" dirty="0"/>
+          </a:p>
+        </p:txBody>
+      </p:sp>
+      <p:sp>
+        <p:nvSpPr>
+          <p:cNvPr id="97" name="Text 67"/>
+          <p:cNvSpPr/>
+          <p:nvPr/>
+        </p:nvSpPr>
+        <p:spPr>
+          <a:xfrm>
+            <a:off x="2012950" y="2692400"/>
+            <a:ext cx="203200" cy="152400"/>
+          </a:xfrm>
+          <a:prstGeom prst="rect">
+            <a:avLst/>
+          </a:prstGeom>
+          <a:noFill/>
+          <a:ln/>
+        </p:spPr>
+        <p:txBody>
+          <a:bodyPr wrap="square" lIns="0" tIns="0" rIns="0" bIns="0" rtlCol="0" anchor="ctr"/>
+          <a:lstStyle/>
+          <a:p>
+            <a:pPr algn="ctr" indent="0" marL="0">
+              <a:buNone/>
+            </a:pPr>
+            <a:r>
+              <a:rPr lang="en-US" sz="1100" dirty="0">
                 <a:solidFill>
                   <a:srgbClr val="000000"/>
                 </a:solidFill>
@@ -4620,13 +4464,13 @@
               </a:rPr>
               <a:t>4</a:t>
             </a:r>
-            <a:endParaRPr lang="en-US" sz="1000" dirty="0"/>
-          </a:p>
-        </p:txBody>
-      </p:sp>
-      <p:sp>
-        <p:nvSpPr>
-          <p:cNvPr id="102" name="Text 100"/>
+            <a:endParaRPr lang="en-US" sz="1100" dirty="0"/>
+          </a:p>
+        </p:txBody>
+      </p:sp>
+      <p:sp>
+        <p:nvSpPr>
+          <p:cNvPr id="98" name="Text 68"/>
           <p:cNvSpPr/>
           <p:nvPr/>
         </p:nvSpPr>
@@ -4679,7 +4523,7 @@
       </p:sp>
       <p:sp>
         <p:nvSpPr>
-          <p:cNvPr id="103" name="Text 101"/>
+          <p:cNvPr id="99" name="Text 69"/>
           <p:cNvSpPr/>
           <p:nvPr/>
         </p:nvSpPr>
@@ -4730,78 +4574,80 @@
           </a:p>
         </p:txBody>
       </p:sp>
-      <p:sp>
-        <p:nvSpPr>
-          <p:cNvPr id="104" name="Shape 102"/>
-          <p:cNvSpPr/>
-          <p:nvPr/>
-        </p:nvSpPr>
-        <p:spPr>
-          <a:xfrm>
-            <a:off x="2311400" y="2298700"/>
-            <a:ext cx="0" cy="546100"/>
-          </a:xfrm>
-          <a:prstGeom prst="line">
-            <a:avLst/>
-          </a:prstGeom>
-          <a:noFill/>
-          <a:ln w="12700">
-            <a:solidFill>
-              <a:srgbClr val="000000"/>
-            </a:solidFill>
-            <a:prstDash val="solid"/>
-          </a:ln>
-        </p:spPr>
-      </p:sp>
-      <p:sp>
-        <p:nvSpPr>
-          <p:cNvPr id="105" name="Shape 103"/>
-          <p:cNvSpPr/>
-          <p:nvPr/>
-        </p:nvSpPr>
-        <p:spPr>
-          <a:xfrm>
-            <a:off x="2476500" y="2298700"/>
-            <a:ext cx="0" cy="546100"/>
-          </a:xfrm>
-          <a:prstGeom prst="line">
-            <a:avLst/>
-          </a:prstGeom>
-          <a:noFill/>
-          <a:ln w="12700">
-            <a:solidFill>
-              <a:srgbClr val="000000"/>
-            </a:solidFill>
-            <a:prstDash val="solid"/>
-          </a:ln>
-        </p:spPr>
-      </p:sp>
-      <p:sp>
-        <p:nvSpPr>
-          <p:cNvPr id="106" name="Text 104"/>
-          <p:cNvSpPr/>
-          <p:nvPr/>
-        </p:nvSpPr>
-        <p:spPr>
-          <a:xfrm>
-            <a:off x="2311400" y="2298700"/>
-            <a:ext cx="165100" cy="177800"/>
-          </a:xfrm>
-          <a:prstGeom prst="rect">
-            <a:avLst/>
-          </a:prstGeom>
-          <a:noFill/>
-          <a:ln/>
-        </p:spPr>
-        <p:txBody>
-          <a:bodyPr wrap="square" lIns="0" tIns="0" rIns="0" bIns="0" rtlCol="0" anchor="ctr"/>
-          <a:lstStyle/>
-          <a:p>
-            <a:pPr algn="ctr" indent="0" marL="0">
-              <a:buNone/>
-            </a:pPr>
-            <a:r>
-              <a:rPr lang="en-US" sz="1000" dirty="0">
+      <p:pic>
+        <p:nvPicPr>
+          <p:cNvPr id="100" name="Image 28" descr="/home/ahmed/Projects/ai_llm_slides/videos/machine-learning/03_ridger_regression_gradient_descent/recreated_pptx/build/assets/parens051/paren_aug51_lp.png">    </p:cNvPr>
+          <p:cNvPicPr>
+            <a:picLocks noChangeAspect="1"/>
+          </p:cNvPicPr>
+          <p:nvPr/>
+        </p:nvPicPr>
+        <p:blipFill>
+          <a:blip r:embed="rId29"/>
+          <a:stretch>
+            <a:fillRect/>
+          </a:stretch>
+        </p:blipFill>
+        <p:spPr>
+          <a:xfrm>
+            <a:off x="2295779" y="2279904"/>
+            <a:ext cx="44196" cy="571500"/>
+          </a:xfrm>
+          <a:prstGeom prst="rect">
+            <a:avLst/>
+          </a:prstGeom>
+        </p:spPr>
+      </p:pic>
+      <p:pic>
+        <p:nvPicPr>
+          <p:cNvPr id="101" name="Image 29" descr="/home/ahmed/Projects/ai_llm_slides/videos/machine-learning/03_ridger_regression_gradient_descent/recreated_pptx/build/assets/parens051/paren_aug51_rp.png">    </p:cNvPr>
+          <p:cNvPicPr>
+            <a:picLocks noChangeAspect="1"/>
+          </p:cNvPicPr>
+          <p:nvPr/>
+        </p:nvPicPr>
+        <p:blipFill>
+          <a:blip r:embed="rId30"/>
+          <a:stretch>
+            <a:fillRect/>
+          </a:stretch>
+        </p:blipFill>
+        <p:spPr>
+          <a:xfrm>
+            <a:off x="2454275" y="2279904"/>
+            <a:ext cx="44196" cy="571500"/>
+          </a:xfrm>
+          <a:prstGeom prst="rect">
+            <a:avLst/>
+          </a:prstGeom>
+        </p:spPr>
+      </p:pic>
+      <p:sp>
+        <p:nvSpPr>
+          <p:cNvPr id="102" name="Text 70"/>
+          <p:cNvSpPr/>
+          <p:nvPr/>
+        </p:nvSpPr>
+        <p:spPr>
+          <a:xfrm>
+            <a:off x="2292350" y="2311400"/>
+            <a:ext cx="203200" cy="152400"/>
+          </a:xfrm>
+          <a:prstGeom prst="rect">
+            <a:avLst/>
+          </a:prstGeom>
+          <a:noFill/>
+          <a:ln/>
+        </p:spPr>
+        <p:txBody>
+          <a:bodyPr wrap="square" lIns="0" tIns="0" rIns="0" bIns="0" rtlCol="0" anchor="ctr"/>
+          <a:lstStyle/>
+          <a:p>
+            <a:pPr algn="ctr" indent="0" marL="0">
+              <a:buNone/>
+            </a:pPr>
+            <a:r>
+              <a:rPr lang="en-US" sz="1100" dirty="0">
                 <a:solidFill>
                   <a:srgbClr val="000000"/>
                 </a:solidFill>
@@ -4811,36 +4657,36 @@
               </a:rPr>
               <a:t>1</a:t>
             </a:r>
-            <a:endParaRPr lang="en-US" sz="1000" dirty="0"/>
-          </a:p>
-        </p:txBody>
-      </p:sp>
-      <p:sp>
-        <p:nvSpPr>
-          <p:cNvPr id="107" name="Text 105"/>
-          <p:cNvSpPr/>
-          <p:nvPr/>
-        </p:nvSpPr>
-        <p:spPr>
-          <a:xfrm>
-            <a:off x="2311400" y="2489200"/>
-            <a:ext cx="165100" cy="177800"/>
-          </a:xfrm>
-          <a:prstGeom prst="rect">
-            <a:avLst/>
-          </a:prstGeom>
-          <a:noFill/>
-          <a:ln/>
-        </p:spPr>
-        <p:txBody>
-          <a:bodyPr wrap="square" lIns="0" tIns="0" rIns="0" bIns="0" rtlCol="0" anchor="ctr"/>
-          <a:lstStyle/>
-          <a:p>
-            <a:pPr algn="ctr" indent="0" marL="0">
-              <a:buNone/>
-            </a:pPr>
-            <a:r>
-              <a:rPr lang="en-US" sz="1000" dirty="0">
+            <a:endParaRPr lang="en-US" sz="1100" dirty="0"/>
+          </a:p>
+        </p:txBody>
+      </p:sp>
+      <p:sp>
+        <p:nvSpPr>
+          <p:cNvPr id="103" name="Text 71"/>
+          <p:cNvSpPr/>
+          <p:nvPr/>
+        </p:nvSpPr>
+        <p:spPr>
+          <a:xfrm>
+            <a:off x="2292350" y="2501900"/>
+            <a:ext cx="203200" cy="152400"/>
+          </a:xfrm>
+          <a:prstGeom prst="rect">
+            <a:avLst/>
+          </a:prstGeom>
+          <a:noFill/>
+          <a:ln/>
+        </p:spPr>
+        <p:txBody>
+          <a:bodyPr wrap="square" lIns="0" tIns="0" rIns="0" bIns="0" rtlCol="0" anchor="ctr"/>
+          <a:lstStyle/>
+          <a:p>
+            <a:pPr algn="ctr" indent="0" marL="0">
+              <a:buNone/>
+            </a:pPr>
+            <a:r>
+              <a:rPr lang="en-US" sz="1100" dirty="0">
                 <a:solidFill>
                   <a:srgbClr val="000000"/>
                 </a:solidFill>
@@ -4850,36 +4696,36 @@
               </a:rPr>
               <a:t>6</a:t>
             </a:r>
-            <a:endParaRPr lang="en-US" sz="1000" dirty="0"/>
-          </a:p>
-        </p:txBody>
-      </p:sp>
-      <p:sp>
-        <p:nvSpPr>
-          <p:cNvPr id="108" name="Text 106"/>
-          <p:cNvSpPr/>
-          <p:nvPr/>
-        </p:nvSpPr>
-        <p:spPr>
-          <a:xfrm>
-            <a:off x="2311400" y="2679700"/>
-            <a:ext cx="165100" cy="177800"/>
-          </a:xfrm>
-          <a:prstGeom prst="rect">
-            <a:avLst/>
-          </a:prstGeom>
-          <a:noFill/>
-          <a:ln/>
-        </p:spPr>
-        <p:txBody>
-          <a:bodyPr wrap="square" lIns="0" tIns="0" rIns="0" bIns="0" rtlCol="0" anchor="ctr"/>
-          <a:lstStyle/>
-          <a:p>
-            <a:pPr algn="ctr" indent="0" marL="0">
-              <a:buNone/>
-            </a:pPr>
-            <a:r>
-              <a:rPr lang="en-US" sz="1000" dirty="0">
+            <a:endParaRPr lang="en-US" sz="1100" dirty="0"/>
+          </a:p>
+        </p:txBody>
+      </p:sp>
+      <p:sp>
+        <p:nvSpPr>
+          <p:cNvPr id="104" name="Text 72"/>
+          <p:cNvSpPr/>
+          <p:nvPr/>
+        </p:nvSpPr>
+        <p:spPr>
+          <a:xfrm>
+            <a:off x="2292350" y="2692400"/>
+            <a:ext cx="203200" cy="152400"/>
+          </a:xfrm>
+          <a:prstGeom prst="rect">
+            <a:avLst/>
+          </a:prstGeom>
+          <a:noFill/>
+          <a:ln/>
+        </p:spPr>
+        <p:txBody>
+          <a:bodyPr wrap="square" lIns="0" tIns="0" rIns="0" bIns="0" rtlCol="0" anchor="ctr"/>
+          <a:lstStyle/>
+          <a:p>
+            <a:pPr algn="ctr" indent="0" marL="0">
+              <a:buNone/>
+            </a:pPr>
+            <a:r>
+              <a:rPr lang="en-US" sz="1100" dirty="0">
                 <a:solidFill>
                   <a:srgbClr val="000000"/>
                 </a:solidFill>
@@ -4889,13 +4735,13 @@
               </a:rPr>
               <a:t>5</a:t>
             </a:r>
-            <a:endParaRPr lang="en-US" sz="1000" dirty="0"/>
-          </a:p>
-        </p:txBody>
-      </p:sp>
-      <p:sp>
-        <p:nvSpPr>
-          <p:cNvPr id="109" name="Text 107"/>
+            <a:endParaRPr lang="en-US" sz="1100" dirty="0"/>
+          </a:p>
+        </p:txBody>
+      </p:sp>
+      <p:sp>
+        <p:nvSpPr>
+          <p:cNvPr id="105" name="Text 73"/>
           <p:cNvSpPr/>
           <p:nvPr/>
         </p:nvSpPr>
@@ -4948,7 +4794,7 @@
       </p:sp>
       <p:sp>
         <p:nvSpPr>
-          <p:cNvPr id="110" name="Text 108"/>
+          <p:cNvPr id="106" name="Text 74"/>
           <p:cNvSpPr/>
           <p:nvPr/>
         </p:nvSpPr>
@@ -4999,78 +4845,80 @@
           </a:p>
         </p:txBody>
       </p:sp>
-      <p:sp>
-        <p:nvSpPr>
-          <p:cNvPr id="111" name="Shape 109"/>
-          <p:cNvSpPr/>
-          <p:nvPr/>
-        </p:nvSpPr>
-        <p:spPr>
-          <a:xfrm>
-            <a:off x="2603500" y="2298700"/>
-            <a:ext cx="0" cy="546100"/>
-          </a:xfrm>
-          <a:prstGeom prst="line">
-            <a:avLst/>
-          </a:prstGeom>
-          <a:noFill/>
-          <a:ln w="12700">
-            <a:solidFill>
-              <a:srgbClr val="000000"/>
-            </a:solidFill>
-            <a:prstDash val="solid"/>
-          </a:ln>
-        </p:spPr>
-      </p:sp>
-      <p:sp>
-        <p:nvSpPr>
-          <p:cNvPr id="112" name="Shape 110"/>
-          <p:cNvSpPr/>
-          <p:nvPr/>
-        </p:nvSpPr>
-        <p:spPr>
-          <a:xfrm>
-            <a:off x="2768600" y="2298700"/>
-            <a:ext cx="0" cy="546100"/>
-          </a:xfrm>
-          <a:prstGeom prst="line">
-            <a:avLst/>
-          </a:prstGeom>
-          <a:noFill/>
-          <a:ln w="12700">
-            <a:solidFill>
-              <a:srgbClr val="000000"/>
-            </a:solidFill>
-            <a:prstDash val="solid"/>
-          </a:ln>
-        </p:spPr>
-      </p:sp>
-      <p:sp>
-        <p:nvSpPr>
-          <p:cNvPr id="113" name="Text 111"/>
-          <p:cNvSpPr/>
-          <p:nvPr/>
-        </p:nvSpPr>
-        <p:spPr>
-          <a:xfrm>
-            <a:off x="2603500" y="2298700"/>
-            <a:ext cx="165100" cy="177800"/>
-          </a:xfrm>
-          <a:prstGeom prst="rect">
-            <a:avLst/>
-          </a:prstGeom>
-          <a:noFill/>
-          <a:ln/>
-        </p:spPr>
-        <p:txBody>
-          <a:bodyPr wrap="square" lIns="0" tIns="0" rIns="0" bIns="0" rtlCol="0" anchor="ctr"/>
-          <a:lstStyle/>
-          <a:p>
-            <a:pPr algn="ctr" indent="0" marL="0">
-              <a:buNone/>
-            </a:pPr>
-            <a:r>
-              <a:rPr lang="en-US" sz="1000" dirty="0">
+      <p:pic>
+        <p:nvPicPr>
+          <p:cNvPr id="107" name="Image 30" descr="/home/ahmed/Projects/ai_llm_slides/videos/machine-learning/03_ridger_regression_gradient_descent/recreated_pptx/build/assets/parens051/paren_aug51_lp.png">    </p:cNvPr>
+          <p:cNvPicPr>
+            <a:picLocks noChangeAspect="1"/>
+          </p:cNvPicPr>
+          <p:nvPr/>
+        </p:nvPicPr>
+        <p:blipFill>
+          <a:blip r:embed="rId31"/>
+          <a:stretch>
+            <a:fillRect/>
+          </a:stretch>
+        </p:blipFill>
+        <p:spPr>
+          <a:xfrm>
+            <a:off x="2575179" y="2279904"/>
+            <a:ext cx="44196" cy="571500"/>
+          </a:xfrm>
+          <a:prstGeom prst="rect">
+            <a:avLst/>
+          </a:prstGeom>
+        </p:spPr>
+      </p:pic>
+      <p:pic>
+        <p:nvPicPr>
+          <p:cNvPr id="108" name="Image 31" descr="/home/ahmed/Projects/ai_llm_slides/videos/machine-learning/03_ridger_regression_gradient_descent/recreated_pptx/build/assets/parens051/paren_aug51_rp.png">    </p:cNvPr>
+          <p:cNvPicPr>
+            <a:picLocks noChangeAspect="1"/>
+          </p:cNvPicPr>
+          <p:nvPr/>
+        </p:nvPicPr>
+        <p:blipFill>
+          <a:blip r:embed="rId32"/>
+          <a:stretch>
+            <a:fillRect/>
+          </a:stretch>
+        </p:blipFill>
+        <p:spPr>
+          <a:xfrm>
+            <a:off x="2746375" y="2279904"/>
+            <a:ext cx="44196" cy="571500"/>
+          </a:xfrm>
+          <a:prstGeom prst="rect">
+            <a:avLst/>
+          </a:prstGeom>
+        </p:spPr>
+      </p:pic>
+      <p:sp>
+        <p:nvSpPr>
+          <p:cNvPr id="109" name="Text 75"/>
+          <p:cNvSpPr/>
+          <p:nvPr/>
+        </p:nvSpPr>
+        <p:spPr>
+          <a:xfrm>
+            <a:off x="2584450" y="2311400"/>
+            <a:ext cx="203200" cy="152400"/>
+          </a:xfrm>
+          <a:prstGeom prst="rect">
+            <a:avLst/>
+          </a:prstGeom>
+          <a:noFill/>
+          <a:ln/>
+        </p:spPr>
+        <p:txBody>
+          <a:bodyPr wrap="square" lIns="0" tIns="0" rIns="0" bIns="0" rtlCol="0" anchor="ctr"/>
+          <a:lstStyle/>
+          <a:p>
+            <a:pPr algn="ctr" indent="0" marL="0">
+              <a:buNone/>
+            </a:pPr>
+            <a:r>
+              <a:rPr lang="en-US" sz="1100" dirty="0">
                 <a:solidFill>
                   <a:srgbClr val="000000"/>
                 </a:solidFill>
@@ -5080,36 +4928,36 @@
               </a:rPr>
               <a:t>1</a:t>
             </a:r>
-            <a:endParaRPr lang="en-US" sz="1000" dirty="0"/>
-          </a:p>
-        </p:txBody>
-      </p:sp>
-      <p:sp>
-        <p:nvSpPr>
-          <p:cNvPr id="114" name="Text 112"/>
-          <p:cNvSpPr/>
-          <p:nvPr/>
-        </p:nvSpPr>
-        <p:spPr>
-          <a:xfrm>
-            <a:off x="2603500" y="2489200"/>
-            <a:ext cx="165100" cy="177800"/>
-          </a:xfrm>
-          <a:prstGeom prst="rect">
-            <a:avLst/>
-          </a:prstGeom>
-          <a:noFill/>
-          <a:ln/>
-        </p:spPr>
-        <p:txBody>
-          <a:bodyPr wrap="square" lIns="0" tIns="0" rIns="0" bIns="0" rtlCol="0" anchor="ctr"/>
-          <a:lstStyle/>
-          <a:p>
-            <a:pPr algn="ctr" indent="0" marL="0">
-              <a:buNone/>
-            </a:pPr>
-            <a:r>
-              <a:rPr lang="en-US" sz="1000" dirty="0">
+            <a:endParaRPr lang="en-US" sz="1100" dirty="0"/>
+          </a:p>
+        </p:txBody>
+      </p:sp>
+      <p:sp>
+        <p:nvSpPr>
+          <p:cNvPr id="110" name="Text 76"/>
+          <p:cNvSpPr/>
+          <p:nvPr/>
+        </p:nvSpPr>
+        <p:spPr>
+          <a:xfrm>
+            <a:off x="2584450" y="2501900"/>
+            <a:ext cx="203200" cy="152400"/>
+          </a:xfrm>
+          <a:prstGeom prst="rect">
+            <a:avLst/>
+          </a:prstGeom>
+          <a:noFill/>
+          <a:ln/>
+        </p:spPr>
+        <p:txBody>
+          <a:bodyPr wrap="square" lIns="0" tIns="0" rIns="0" bIns="0" rtlCol="0" anchor="ctr"/>
+          <a:lstStyle/>
+          <a:p>
+            <a:pPr algn="ctr" indent="0" marL="0">
+              <a:buNone/>
+            </a:pPr>
+            <a:r>
+              <a:rPr lang="en-US" sz="1100" dirty="0">
                 <a:solidFill>
                   <a:srgbClr val="000000"/>
                 </a:solidFill>
@@ -5119,36 +4967,36 @@
               </a:rPr>
               <a:t>6</a:t>
             </a:r>
-            <a:endParaRPr lang="en-US" sz="1000" dirty="0"/>
-          </a:p>
-        </p:txBody>
-      </p:sp>
-      <p:sp>
-        <p:nvSpPr>
-          <p:cNvPr id="115" name="Text 113"/>
-          <p:cNvSpPr/>
-          <p:nvPr/>
-        </p:nvSpPr>
-        <p:spPr>
-          <a:xfrm>
-            <a:off x="2603500" y="2679700"/>
-            <a:ext cx="165100" cy="177800"/>
-          </a:xfrm>
-          <a:prstGeom prst="rect">
-            <a:avLst/>
-          </a:prstGeom>
-          <a:noFill/>
-          <a:ln/>
-        </p:spPr>
-        <p:txBody>
-          <a:bodyPr wrap="square" lIns="0" tIns="0" rIns="0" bIns="0" rtlCol="0" anchor="ctr"/>
-          <a:lstStyle/>
-          <a:p>
-            <a:pPr algn="ctr" indent="0" marL="0">
-              <a:buNone/>
-            </a:pPr>
-            <a:r>
-              <a:rPr lang="en-US" sz="1000" dirty="0">
+            <a:endParaRPr lang="en-US" sz="1100" dirty="0"/>
+          </a:p>
+        </p:txBody>
+      </p:sp>
+      <p:sp>
+        <p:nvSpPr>
+          <p:cNvPr id="111" name="Text 77"/>
+          <p:cNvSpPr/>
+          <p:nvPr/>
+        </p:nvSpPr>
+        <p:spPr>
+          <a:xfrm>
+            <a:off x="2584450" y="2692400"/>
+            <a:ext cx="203200" cy="152400"/>
+          </a:xfrm>
+          <a:prstGeom prst="rect">
+            <a:avLst/>
+          </a:prstGeom>
+          <a:noFill/>
+          <a:ln/>
+        </p:spPr>
+        <p:txBody>
+          <a:bodyPr wrap="square" lIns="0" tIns="0" rIns="0" bIns="0" rtlCol="0" anchor="ctr"/>
+          <a:lstStyle/>
+          <a:p>
+            <a:pPr algn="ctr" indent="0" marL="0">
+              <a:buNone/>
+            </a:pPr>
+            <a:r>
+              <a:rPr lang="en-US" sz="1100" dirty="0">
                 <a:solidFill>
                   <a:srgbClr val="000000"/>
                 </a:solidFill>
@@ -5158,13 +5006,13 @@
               </a:rPr>
               <a:t>6</a:t>
             </a:r>
-            <a:endParaRPr lang="en-US" sz="1000" dirty="0"/>
-          </a:p>
-        </p:txBody>
-      </p:sp>
-      <p:sp>
-        <p:nvSpPr>
-          <p:cNvPr id="116" name="Text 114"/>
+            <a:endParaRPr lang="en-US" sz="1100" dirty="0"/>
+          </a:p>
+        </p:txBody>
+      </p:sp>
+      <p:sp>
+        <p:nvSpPr>
+          <p:cNvPr id="112" name="Text 78"/>
           <p:cNvSpPr/>
           <p:nvPr/>
         </p:nvSpPr>
@@ -5217,7 +5065,7 @@
       </p:sp>
       <p:sp>
         <p:nvSpPr>
-          <p:cNvPr id="117" name="Shape 115"/>
+          <p:cNvPr id="113" name="Shape 79"/>
           <p:cNvSpPr/>
           <p:nvPr/>
         </p:nvSpPr>
@@ -5242,7 +5090,7 @@
       </p:sp>
       <p:sp>
         <p:nvSpPr>
-          <p:cNvPr id="118" name="Text 116"/>
+          <p:cNvPr id="114" name="Text 80"/>
           <p:cNvSpPr/>
           <p:nvPr/>
         </p:nvSpPr>
@@ -5281,14 +5129,14 @@
       </p:sp>
       <p:sp>
         <p:nvSpPr>
-          <p:cNvPr id="119" name="Shape 117"/>
-          <p:cNvSpPr/>
-          <p:nvPr/>
-        </p:nvSpPr>
-        <p:spPr>
-          <a:xfrm>
-            <a:off x="3505200" y="1790700"/>
-            <a:ext cx="7327900" cy="711200"/>
+          <p:cNvPr id="115" name="Shape 81"/>
+          <p:cNvSpPr/>
+          <p:nvPr/>
+        </p:nvSpPr>
+        <p:spPr>
+          <a:xfrm>
+            <a:off x="3479800" y="1778000"/>
+            <a:ext cx="7353300" cy="723900"/>
           </a:xfrm>
           <a:prstGeom prst="rect">
             <a:avLst/>
@@ -5304,16 +5152,336 @@
           </a:ln>
         </p:spPr>
       </p:sp>
-      <p:sp>
-        <p:nvSpPr>
-          <p:cNvPr id="120" name="Shape 118"/>
-          <p:cNvSpPr/>
-          <p:nvPr/>
-        </p:nvSpPr>
-        <p:spPr>
-          <a:xfrm>
-            <a:off x="3505200" y="2628900"/>
-            <a:ext cx="7327900" cy="711200"/>
+      <p:pic>
+        <p:nvPicPr>
+          <p:cNvPr id="116" name="Image 32" descr="/home/ahmed/Projects/ai_llm_slides/videos/machine-learning/03_ridger_regression_gradient_descent/recreated_pptx/build/assets/eq_051_dzlabel_1.png">    </p:cNvPr>
+          <p:cNvPicPr>
+            <a:picLocks noChangeAspect="1"/>
+          </p:cNvPicPr>
+          <p:nvPr/>
+        </p:nvPicPr>
+        <p:blipFill>
+          <a:blip r:embed="rId33"/>
+          <a:stretch>
+            <a:fillRect/>
+          </a:stretch>
+        </p:blipFill>
+        <p:spPr>
+          <a:xfrm>
+            <a:off x="3581908" y="2019808"/>
+            <a:ext cx="563880" cy="167640"/>
+          </a:xfrm>
+          <a:prstGeom prst="rect">
+            <a:avLst/>
+          </a:prstGeom>
+        </p:spPr>
+      </p:pic>
+      <p:pic>
+        <p:nvPicPr>
+          <p:cNvPr id="117" name="Image 33" descr="/home/ahmed/Projects/ai_llm_slides/videos/machine-learning/03_ridger_regression_gradient_descent/recreated_pptx/build/assets/eq_051_rowvec_1.png">    </p:cNvPr>
+          <p:cNvPicPr>
+            <a:picLocks noChangeAspect="1"/>
+          </p:cNvPicPr>
+          <p:nvPr/>
+        </p:nvPicPr>
+        <p:blipFill>
+          <a:blip r:embed="rId34"/>
+          <a:stretch>
+            <a:fillRect/>
+          </a:stretch>
+        </p:blipFill>
+        <p:spPr>
+          <a:xfrm>
+            <a:off x="4161536" y="1880108"/>
+            <a:ext cx="693420" cy="201168"/>
+          </a:xfrm>
+          <a:prstGeom prst="rect">
+            <a:avLst/>
+          </a:prstGeom>
+        </p:spPr>
+      </p:pic>
+      <p:pic>
+        <p:nvPicPr>
+          <p:cNvPr id="118" name="Image 34" descr="/home/ahmed/Projects/ai_llm_slides/videos/machine-learning/03_ridger_regression_gradient_descent/recreated_pptx/build/assets/eq_051_wcol_green.png">    </p:cNvPr>
+          <p:cNvPicPr>
+            <a:picLocks noChangeAspect="1"/>
+          </p:cNvPicPr>
+          <p:nvPr/>
+        </p:nvPicPr>
+        <p:blipFill>
+          <a:blip r:embed="rId35"/>
+          <a:stretch>
+            <a:fillRect/>
+          </a:stretch>
+        </p:blipFill>
+        <p:spPr>
+          <a:xfrm>
+            <a:off x="4818888" y="1879600"/>
+            <a:ext cx="339852" cy="548640"/>
+          </a:xfrm>
+          <a:prstGeom prst="rect">
+            <a:avLst/>
+          </a:prstGeom>
+        </p:spPr>
+      </p:pic>
+      <p:sp>
+        <p:nvSpPr>
+          <p:cNvPr id="119" name="Text 82"/>
+          <p:cNvSpPr/>
+          <p:nvPr/>
+        </p:nvSpPr>
+        <p:spPr>
+          <a:xfrm>
+            <a:off x="5219700" y="2032000"/>
+            <a:ext cx="152400" cy="177800"/>
+          </a:xfrm>
+          <a:prstGeom prst="rect">
+            <a:avLst/>
+          </a:prstGeom>
+          <a:noFill/>
+          <a:ln/>
+        </p:spPr>
+        <p:txBody>
+          <a:bodyPr wrap="square" lIns="0" tIns="0" rIns="0" bIns="0" rtlCol="0" anchor="ctr"/>
+          <a:lstStyle/>
+          <a:p>
+            <a:pPr algn="l" indent="0" marL="0">
+              <a:buNone/>
+            </a:pPr>
+            <a:r>
+              <a:rPr lang="en-US" sz="1200" dirty="0">
+                <a:solidFill>
+                  <a:srgbClr val="000000"/>
+                </a:solidFill>
+                <a:latin typeface="Arial" pitchFamily="34" charset="0"/>
+                <a:ea typeface="Arial" pitchFamily="34" charset="-122"/>
+                <a:cs typeface="Arial" pitchFamily="34" charset="-120"/>
+              </a:rPr>
+              <a:t>=</a:t>
+            </a:r>
+            <a:endParaRPr lang="en-US" sz="1200" dirty="0"/>
+          </a:p>
+        </p:txBody>
+      </p:sp>
+      <p:sp>
+        <p:nvSpPr>
+          <p:cNvPr id="120" name="Text 83"/>
+          <p:cNvSpPr/>
+          <p:nvPr/>
+        </p:nvSpPr>
+        <p:spPr>
+          <a:xfrm>
+            <a:off x="5359400" y="2032000"/>
+            <a:ext cx="431800" cy="177800"/>
+          </a:xfrm>
+          <a:prstGeom prst="rect">
+            <a:avLst/>
+          </a:prstGeom>
+          <a:noFill/>
+          <a:ln/>
+        </p:spPr>
+        <p:txBody>
+          <a:bodyPr wrap="square" lIns="0" tIns="0" rIns="0" bIns="0" rtlCol="0" anchor="ctr"/>
+          <a:lstStyle/>
+          <a:p>
+            <a:pPr algn="l" indent="0" marL="0">
+              <a:buNone/>
+            </a:pPr>
+            <a:r>
+              <a:rPr lang="en-US" sz="1200" dirty="0">
+                <a:solidFill>
+                  <a:srgbClr val="000000"/>
+                </a:solidFill>
+                <a:latin typeface="Arial" pitchFamily="34" charset="0"/>
+                <a:ea typeface="Arial" pitchFamily="34" charset="-122"/>
+                <a:cs typeface="Arial" pitchFamily="34" charset="-120"/>
+              </a:rPr>
+              <a:t>5</a:t>
+            </a:r>
+            <a:endParaRPr lang="en-US" sz="1200" dirty="0"/>
+          </a:p>
+        </p:txBody>
+      </p:sp>
+      <p:sp>
+        <p:nvSpPr>
+          <p:cNvPr id="121" name="Shape 84"/>
+          <p:cNvSpPr/>
+          <p:nvPr/>
+        </p:nvSpPr>
+        <p:spPr>
+          <a:xfrm>
+            <a:off x="6350000" y="2114550"/>
+            <a:ext cx="63500" cy="0"/>
+          </a:xfrm>
+          <a:prstGeom prst="line">
+            <a:avLst/>
+          </a:prstGeom>
+          <a:noFill/>
+          <a:ln w="12700">
+            <a:solidFill>
+              <a:srgbClr val="000000"/>
+            </a:solidFill>
+            <a:prstDash val="solid"/>
+          </a:ln>
+        </p:spPr>
+      </p:sp>
+      <p:sp>
+        <p:nvSpPr>
+          <p:cNvPr id="122" name="Shape 85"/>
+          <p:cNvSpPr/>
+          <p:nvPr/>
+        </p:nvSpPr>
+        <p:spPr>
+          <a:xfrm>
+            <a:off x="6350000" y="2139950"/>
+            <a:ext cx="63500" cy="0"/>
+          </a:xfrm>
+          <a:prstGeom prst="line">
+            <a:avLst/>
+          </a:prstGeom>
+          <a:noFill/>
+          <a:ln w="12700">
+            <a:solidFill>
+              <a:srgbClr val="000000"/>
+            </a:solidFill>
+            <a:prstDash val="solid"/>
+          </a:ln>
+        </p:spPr>
+      </p:sp>
+      <p:sp>
+        <p:nvSpPr>
+          <p:cNvPr id="123" name="Shape 86"/>
+          <p:cNvSpPr/>
+          <p:nvPr/>
+        </p:nvSpPr>
+        <p:spPr>
+          <a:xfrm>
+            <a:off x="6413500" y="2095500"/>
+            <a:ext cx="50800" cy="25400"/>
+          </a:xfrm>
+          <a:prstGeom prst="line">
+            <a:avLst/>
+          </a:prstGeom>
+          <a:noFill/>
+          <a:ln w="12700">
+            <a:solidFill>
+              <a:srgbClr val="000000"/>
+            </a:solidFill>
+            <a:prstDash val="solid"/>
+          </a:ln>
+        </p:spPr>
+      </p:sp>
+      <p:sp>
+        <p:nvSpPr>
+          <p:cNvPr id="124" name="Shape 87"/>
+          <p:cNvSpPr/>
+          <p:nvPr/>
+        </p:nvSpPr>
+        <p:spPr>
+          <a:xfrm flipV="1">
+            <a:off x="6413500" y="2120900"/>
+            <a:ext cx="50800" cy="25400"/>
+          </a:xfrm>
+          <a:prstGeom prst="line">
+            <a:avLst/>
+          </a:prstGeom>
+          <a:noFill/>
+          <a:ln w="12700">
+            <a:solidFill>
+              <a:srgbClr val="000000"/>
+            </a:solidFill>
+            <a:prstDash val="solid"/>
+          </a:ln>
+        </p:spPr>
+      </p:sp>
+      <p:sp>
+        <p:nvSpPr>
+          <p:cNvPr id="125" name="Text 88"/>
+          <p:cNvSpPr/>
+          <p:nvPr/>
+        </p:nvSpPr>
+        <p:spPr>
+          <a:xfrm>
+            <a:off x="6629400" y="2032000"/>
+            <a:ext cx="1270000" cy="177800"/>
+          </a:xfrm>
+          <a:prstGeom prst="rect">
+            <a:avLst/>
+          </a:prstGeom>
+          <a:noFill/>
+          <a:ln/>
+        </p:spPr>
+        <p:txBody>
+          <a:bodyPr wrap="square" lIns="0" tIns="0" rIns="0" bIns="0" rtlCol="0" anchor="ctr"/>
+          <a:lstStyle/>
+          <a:p>
+            <a:pPr algn="l" indent="0" marL="0">
+              <a:buNone/>
+            </a:pPr>
+            <a:r>
+              <a:rPr lang="en-US" sz="1200" dirty="0">
+                <a:solidFill>
+                  <a:srgbClr val="000000"/>
+                </a:solidFill>
+                <a:latin typeface="Arial" pitchFamily="34" charset="0"/>
+                <a:ea typeface="Arial" pitchFamily="34" charset="-122"/>
+                <a:cs typeface="Arial" pitchFamily="34" charset="-120"/>
+              </a:rPr>
+              <a:t>Positive &gt; 0</a:t>
+            </a:r>
+            <a:endParaRPr lang="en-US" sz="1200" dirty="0"/>
+          </a:p>
+        </p:txBody>
+      </p:sp>
+      <p:sp>
+        <p:nvSpPr>
+          <p:cNvPr id="126" name="Text 89"/>
+          <p:cNvSpPr/>
+          <p:nvPr/>
+        </p:nvSpPr>
+        <p:spPr>
+          <a:xfrm>
+            <a:off x="8318500" y="2032000"/>
+            <a:ext cx="1270000" cy="177800"/>
+          </a:xfrm>
+          <a:prstGeom prst="rect">
+            <a:avLst/>
+          </a:prstGeom>
+          <a:noFill/>
+          <a:ln/>
+        </p:spPr>
+        <p:txBody>
+          <a:bodyPr wrap="square" lIns="0" tIns="0" rIns="0" bIns="0" rtlCol="0" anchor="ctr"/>
+          <a:lstStyle/>
+          <a:p>
+            <a:pPr algn="l" indent="0" marL="0">
+              <a:buNone/>
+            </a:pPr>
+            <a:r>
+              <a:rPr lang="en-US" sz="1200" b="1" dirty="0">
+                <a:solidFill>
+                  <a:srgbClr val="C00000"/>
+                </a:solidFill>
+                <a:latin typeface="Arial" pitchFamily="34" charset="0"/>
+                <a:ea typeface="Arial" pitchFamily="34" charset="-122"/>
+                <a:cs typeface="Arial" pitchFamily="34" charset="-120"/>
+              </a:rPr>
+              <a:t>Class I</a:t>
+            </a:r>
+            <a:endParaRPr lang="en-US" sz="1200" dirty="0"/>
+          </a:p>
+        </p:txBody>
+      </p:sp>
+      <p:sp>
+        <p:nvSpPr>
+          <p:cNvPr id="127" name="Shape 90"/>
+          <p:cNvSpPr/>
+          <p:nvPr/>
+        </p:nvSpPr>
+        <p:spPr>
+          <a:xfrm>
+            <a:off x="3479800" y="2616200"/>
+            <a:ext cx="7353300" cy="723900"/>
           </a:xfrm>
           <a:prstGeom prst="rect">
             <a:avLst/>
@@ -5329,16 +5497,336 @@
           </a:ln>
         </p:spPr>
       </p:sp>
-      <p:sp>
-        <p:nvSpPr>
-          <p:cNvPr id="121" name="Shape 119"/>
-          <p:cNvSpPr/>
-          <p:nvPr/>
-        </p:nvSpPr>
-        <p:spPr>
-          <a:xfrm>
-            <a:off x="3505200" y="3467100"/>
-            <a:ext cx="7327900" cy="711200"/>
+      <p:pic>
+        <p:nvPicPr>
+          <p:cNvPr id="128" name="Image 35" descr="/home/ahmed/Projects/ai_llm_slides/videos/machine-learning/03_ridger_regression_gradient_descent/recreated_pptx/build/assets/eq_051_dzlabel_2.png">    </p:cNvPr>
+          <p:cNvPicPr>
+            <a:picLocks noChangeAspect="1"/>
+          </p:cNvPicPr>
+          <p:nvPr/>
+        </p:nvPicPr>
+        <p:blipFill>
+          <a:blip r:embed="rId36"/>
+          <a:stretch>
+            <a:fillRect/>
+          </a:stretch>
+        </p:blipFill>
+        <p:spPr>
+          <a:xfrm>
+            <a:off x="3581908" y="2908808"/>
+            <a:ext cx="563880" cy="167640"/>
+          </a:xfrm>
+          <a:prstGeom prst="rect">
+            <a:avLst/>
+          </a:prstGeom>
+        </p:spPr>
+      </p:pic>
+      <p:pic>
+        <p:nvPicPr>
+          <p:cNvPr id="129" name="Image 36" descr="/home/ahmed/Projects/ai_llm_slides/videos/machine-learning/03_ridger_regression_gradient_descent/recreated_pptx/build/assets/eq_051_rowvec_2.png">    </p:cNvPr>
+          <p:cNvPicPr>
+            <a:picLocks noChangeAspect="1"/>
+          </p:cNvPicPr>
+          <p:nvPr/>
+        </p:nvPicPr>
+        <p:blipFill>
+          <a:blip r:embed="rId37"/>
+          <a:stretch>
+            <a:fillRect/>
+          </a:stretch>
+        </p:blipFill>
+        <p:spPr>
+          <a:xfrm>
+            <a:off x="4161536" y="2756408"/>
+            <a:ext cx="693420" cy="201168"/>
+          </a:xfrm>
+          <a:prstGeom prst="rect">
+            <a:avLst/>
+          </a:prstGeom>
+        </p:spPr>
+      </p:pic>
+      <p:pic>
+        <p:nvPicPr>
+          <p:cNvPr id="130" name="Image 37" descr="/home/ahmed/Projects/ai_llm_slides/videos/machine-learning/03_ridger_regression_gradient_descent/recreated_pptx/build/assets/eq_051_wcol_green.png">    </p:cNvPr>
+          <p:cNvPicPr>
+            <a:picLocks noChangeAspect="1"/>
+          </p:cNvPicPr>
+          <p:nvPr/>
+        </p:nvPicPr>
+        <p:blipFill>
+          <a:blip r:embed="rId38"/>
+          <a:stretch>
+            <a:fillRect/>
+          </a:stretch>
+        </p:blipFill>
+        <p:spPr>
+          <a:xfrm>
+            <a:off x="4818888" y="2768600"/>
+            <a:ext cx="339852" cy="548640"/>
+          </a:xfrm>
+          <a:prstGeom prst="rect">
+            <a:avLst/>
+          </a:prstGeom>
+        </p:spPr>
+      </p:pic>
+      <p:sp>
+        <p:nvSpPr>
+          <p:cNvPr id="131" name="Text 91"/>
+          <p:cNvSpPr/>
+          <p:nvPr/>
+        </p:nvSpPr>
+        <p:spPr>
+          <a:xfrm>
+            <a:off x="5219700" y="2908300"/>
+            <a:ext cx="152400" cy="177800"/>
+          </a:xfrm>
+          <a:prstGeom prst="rect">
+            <a:avLst/>
+          </a:prstGeom>
+          <a:noFill/>
+          <a:ln/>
+        </p:spPr>
+        <p:txBody>
+          <a:bodyPr wrap="square" lIns="0" tIns="0" rIns="0" bIns="0" rtlCol="0" anchor="ctr"/>
+          <a:lstStyle/>
+          <a:p>
+            <a:pPr algn="l" indent="0" marL="0">
+              <a:buNone/>
+            </a:pPr>
+            <a:r>
+              <a:rPr lang="en-US" sz="1200" dirty="0">
+                <a:solidFill>
+                  <a:srgbClr val="000000"/>
+                </a:solidFill>
+                <a:latin typeface="Arial" pitchFamily="34" charset="0"/>
+                <a:ea typeface="Arial" pitchFamily="34" charset="-122"/>
+                <a:cs typeface="Arial" pitchFamily="34" charset="-120"/>
+              </a:rPr>
+              <a:t>=</a:t>
+            </a:r>
+            <a:endParaRPr lang="en-US" sz="1200" dirty="0"/>
+          </a:p>
+        </p:txBody>
+      </p:sp>
+      <p:sp>
+        <p:nvSpPr>
+          <p:cNvPr id="132" name="Text 92"/>
+          <p:cNvSpPr/>
+          <p:nvPr/>
+        </p:nvSpPr>
+        <p:spPr>
+          <a:xfrm>
+            <a:off x="5359400" y="2908300"/>
+            <a:ext cx="431800" cy="177800"/>
+          </a:xfrm>
+          <a:prstGeom prst="rect">
+            <a:avLst/>
+          </a:prstGeom>
+          <a:noFill/>
+          <a:ln/>
+        </p:spPr>
+        <p:txBody>
+          <a:bodyPr wrap="square" lIns="0" tIns="0" rIns="0" bIns="0" rtlCol="0" anchor="ctr"/>
+          <a:lstStyle/>
+          <a:p>
+            <a:pPr algn="l" indent="0" marL="0">
+              <a:buNone/>
+            </a:pPr>
+            <a:r>
+              <a:rPr lang="en-US" sz="1200" dirty="0">
+                <a:solidFill>
+                  <a:srgbClr val="000000"/>
+                </a:solidFill>
+                <a:latin typeface="Arial" pitchFamily="34" charset="0"/>
+                <a:ea typeface="Arial" pitchFamily="34" charset="-122"/>
+                <a:cs typeface="Arial" pitchFamily="34" charset="-120"/>
+              </a:rPr>
+              <a:t>−8</a:t>
+            </a:r>
+            <a:endParaRPr lang="en-US" sz="1200" dirty="0"/>
+          </a:p>
+        </p:txBody>
+      </p:sp>
+      <p:sp>
+        <p:nvSpPr>
+          <p:cNvPr id="133" name="Shape 93"/>
+          <p:cNvSpPr/>
+          <p:nvPr/>
+        </p:nvSpPr>
+        <p:spPr>
+          <a:xfrm>
+            <a:off x="6477000" y="2990850"/>
+            <a:ext cx="63500" cy="0"/>
+          </a:xfrm>
+          <a:prstGeom prst="line">
+            <a:avLst/>
+          </a:prstGeom>
+          <a:noFill/>
+          <a:ln w="12700">
+            <a:solidFill>
+              <a:srgbClr val="000000"/>
+            </a:solidFill>
+            <a:prstDash val="solid"/>
+          </a:ln>
+        </p:spPr>
+      </p:sp>
+      <p:sp>
+        <p:nvSpPr>
+          <p:cNvPr id="134" name="Shape 94"/>
+          <p:cNvSpPr/>
+          <p:nvPr/>
+        </p:nvSpPr>
+        <p:spPr>
+          <a:xfrm>
+            <a:off x="6477000" y="3016250"/>
+            <a:ext cx="63500" cy="0"/>
+          </a:xfrm>
+          <a:prstGeom prst="line">
+            <a:avLst/>
+          </a:prstGeom>
+          <a:noFill/>
+          <a:ln w="12700">
+            <a:solidFill>
+              <a:srgbClr val="000000"/>
+            </a:solidFill>
+            <a:prstDash val="solid"/>
+          </a:ln>
+        </p:spPr>
+      </p:sp>
+      <p:sp>
+        <p:nvSpPr>
+          <p:cNvPr id="135" name="Shape 95"/>
+          <p:cNvSpPr/>
+          <p:nvPr/>
+        </p:nvSpPr>
+        <p:spPr>
+          <a:xfrm>
+            <a:off x="6540500" y="2971800"/>
+            <a:ext cx="50800" cy="25400"/>
+          </a:xfrm>
+          <a:prstGeom prst="line">
+            <a:avLst/>
+          </a:prstGeom>
+          <a:noFill/>
+          <a:ln w="12700">
+            <a:solidFill>
+              <a:srgbClr val="000000"/>
+            </a:solidFill>
+            <a:prstDash val="solid"/>
+          </a:ln>
+        </p:spPr>
+      </p:sp>
+      <p:sp>
+        <p:nvSpPr>
+          <p:cNvPr id="136" name="Shape 96"/>
+          <p:cNvSpPr/>
+          <p:nvPr/>
+        </p:nvSpPr>
+        <p:spPr>
+          <a:xfrm flipV="1">
+            <a:off x="6540500" y="2997200"/>
+            <a:ext cx="50800" cy="25400"/>
+          </a:xfrm>
+          <a:prstGeom prst="line">
+            <a:avLst/>
+          </a:prstGeom>
+          <a:noFill/>
+          <a:ln w="12700">
+            <a:solidFill>
+              <a:srgbClr val="000000"/>
+            </a:solidFill>
+            <a:prstDash val="solid"/>
+          </a:ln>
+        </p:spPr>
+      </p:sp>
+      <p:sp>
+        <p:nvSpPr>
+          <p:cNvPr id="137" name="Text 97"/>
+          <p:cNvSpPr/>
+          <p:nvPr/>
+        </p:nvSpPr>
+        <p:spPr>
+          <a:xfrm>
+            <a:off x="6743700" y="2908300"/>
+            <a:ext cx="1270000" cy="177800"/>
+          </a:xfrm>
+          <a:prstGeom prst="rect">
+            <a:avLst/>
+          </a:prstGeom>
+          <a:noFill/>
+          <a:ln/>
+        </p:spPr>
+        <p:txBody>
+          <a:bodyPr wrap="square" lIns="0" tIns="0" rIns="0" bIns="0" rtlCol="0" anchor="ctr"/>
+          <a:lstStyle/>
+          <a:p>
+            <a:pPr algn="l" indent="0" marL="0">
+              <a:buNone/>
+            </a:pPr>
+            <a:r>
+              <a:rPr lang="en-US" sz="1200" dirty="0">
+                <a:solidFill>
+                  <a:srgbClr val="000000"/>
+                </a:solidFill>
+                <a:latin typeface="Arial" pitchFamily="34" charset="0"/>
+                <a:ea typeface="Arial" pitchFamily="34" charset="-122"/>
+                <a:cs typeface="Arial" pitchFamily="34" charset="-120"/>
+              </a:rPr>
+              <a:t>Negative &lt; 0</a:t>
+            </a:r>
+            <a:endParaRPr lang="en-US" sz="1200" dirty="0"/>
+          </a:p>
+        </p:txBody>
+      </p:sp>
+      <p:sp>
+        <p:nvSpPr>
+          <p:cNvPr id="138" name="Text 98"/>
+          <p:cNvSpPr/>
+          <p:nvPr/>
+        </p:nvSpPr>
+        <p:spPr>
+          <a:xfrm>
+            <a:off x="8483600" y="2908300"/>
+            <a:ext cx="1270000" cy="177800"/>
+          </a:xfrm>
+          <a:prstGeom prst="rect">
+            <a:avLst/>
+          </a:prstGeom>
+          <a:noFill/>
+          <a:ln/>
+        </p:spPr>
+        <p:txBody>
+          <a:bodyPr wrap="square" lIns="0" tIns="0" rIns="0" bIns="0" rtlCol="0" anchor="ctr"/>
+          <a:lstStyle/>
+          <a:p>
+            <a:pPr algn="l" indent="0" marL="0">
+              <a:buNone/>
+            </a:pPr>
+            <a:r>
+              <a:rPr lang="en-US" sz="1200" b="1" dirty="0">
+                <a:solidFill>
+                  <a:srgbClr val="0000A8"/>
+                </a:solidFill>
+                <a:latin typeface="Arial" pitchFamily="34" charset="0"/>
+                <a:ea typeface="Arial" pitchFamily="34" charset="-122"/>
+                <a:cs typeface="Arial" pitchFamily="34" charset="-120"/>
+              </a:rPr>
+              <a:t>Class II</a:t>
+            </a:r>
+            <a:endParaRPr lang="en-US" sz="1200" dirty="0"/>
+          </a:p>
+        </p:txBody>
+      </p:sp>
+      <p:sp>
+        <p:nvSpPr>
+          <p:cNvPr id="139" name="Shape 99"/>
+          <p:cNvSpPr/>
+          <p:nvPr/>
+        </p:nvSpPr>
+        <p:spPr>
+          <a:xfrm>
+            <a:off x="3479800" y="3454400"/>
+            <a:ext cx="7353300" cy="723900"/>
           </a:xfrm>
           <a:prstGeom prst="rect">
             <a:avLst/>
@@ -5354,16 +5842,88 @@
           </a:ln>
         </p:spPr>
       </p:sp>
-      <p:sp>
-        <p:nvSpPr>
-          <p:cNvPr id="122" name="Text 120"/>
-          <p:cNvSpPr/>
-          <p:nvPr/>
-        </p:nvSpPr>
-        <p:spPr>
-          <a:xfrm>
-            <a:off x="4229100" y="1892300"/>
-            <a:ext cx="558800" cy="177800"/>
+      <p:pic>
+        <p:nvPicPr>
+          <p:cNvPr id="140" name="Image 38" descr="/home/ahmed/Projects/ai_llm_slides/videos/machine-learning/03_ridger_regression_gradient_descent/recreated_pptx/build/assets/eq_051_dzlabel_3.png">    </p:cNvPr>
+          <p:cNvPicPr>
+            <a:picLocks noChangeAspect="1"/>
+          </p:cNvPicPr>
+          <p:nvPr/>
+        </p:nvPicPr>
+        <p:blipFill>
+          <a:blip r:embed="rId39"/>
+          <a:stretch>
+            <a:fillRect/>
+          </a:stretch>
+        </p:blipFill>
+        <p:spPr>
+          <a:xfrm>
+            <a:off x="3581908" y="3747008"/>
+            <a:ext cx="563880" cy="167640"/>
+          </a:xfrm>
+          <a:prstGeom prst="rect">
+            <a:avLst/>
+          </a:prstGeom>
+        </p:spPr>
+      </p:pic>
+      <p:pic>
+        <p:nvPicPr>
+          <p:cNvPr id="141" name="Image 39" descr="/home/ahmed/Projects/ai_llm_slides/videos/machine-learning/03_ridger_regression_gradient_descent/recreated_pptx/build/assets/eq_051_rowvec_3.png">    </p:cNvPr>
+          <p:cNvPicPr>
+            <a:picLocks noChangeAspect="1"/>
+          </p:cNvPicPr>
+          <p:nvPr/>
+        </p:nvPicPr>
+        <p:blipFill>
+          <a:blip r:embed="rId40"/>
+          <a:stretch>
+            <a:fillRect/>
+          </a:stretch>
+        </p:blipFill>
+        <p:spPr>
+          <a:xfrm>
+            <a:off x="4161536" y="3594608"/>
+            <a:ext cx="693420" cy="201168"/>
+          </a:xfrm>
+          <a:prstGeom prst="rect">
+            <a:avLst/>
+          </a:prstGeom>
+        </p:spPr>
+      </p:pic>
+      <p:pic>
+        <p:nvPicPr>
+          <p:cNvPr id="142" name="Image 40" descr="/home/ahmed/Projects/ai_llm_slides/videos/machine-learning/03_ridger_regression_gradient_descent/recreated_pptx/build/assets/eq_051_wcol_green.png">    </p:cNvPr>
+          <p:cNvPicPr>
+            <a:picLocks noChangeAspect="1"/>
+          </p:cNvPicPr>
+          <p:nvPr/>
+        </p:nvPicPr>
+        <p:blipFill>
+          <a:blip r:embed="rId41"/>
+          <a:stretch>
+            <a:fillRect/>
+          </a:stretch>
+        </p:blipFill>
+        <p:spPr>
+          <a:xfrm>
+            <a:off x="4818888" y="3606800"/>
+            <a:ext cx="339852" cy="548640"/>
+          </a:xfrm>
+          <a:prstGeom prst="rect">
+            <a:avLst/>
+          </a:prstGeom>
+        </p:spPr>
+      </p:pic>
+      <p:sp>
+        <p:nvSpPr>
+          <p:cNvPr id="143" name="Text 100"/>
+          <p:cNvSpPr/>
+          <p:nvPr/>
+        </p:nvSpPr>
+        <p:spPr>
+          <a:xfrm>
+            <a:off x="5219700" y="3746500"/>
+            <a:ext cx="152400" cy="177800"/>
           </a:xfrm>
           <a:prstGeom prst="rect">
             <a:avLst/>
@@ -5379,57 +5939,54 @@
               <a:buNone/>
             </a:pPr>
             <a:r>
-              <a:rPr lang="en-US" sz="1200" i="1" dirty="0">
-                <a:solidFill>
-                  <a:srgbClr val="0000A8"/>
-                </a:solidFill>
-                <a:latin typeface="Arial" pitchFamily="34" charset="0"/>
-                <a:ea typeface="Arial" pitchFamily="34" charset="-122"/>
-                <a:cs typeface="Arial" pitchFamily="34" charset="-120"/>
-              </a:rPr>
-              <a:t>d</a:t>
-            </a:r>
+              <a:rPr lang="en-US" sz="1200" dirty="0">
+                <a:solidFill>
+                  <a:srgbClr val="000000"/>
+                </a:solidFill>
+                <a:latin typeface="Arial" pitchFamily="34" charset="0"/>
+                <a:ea typeface="Arial" pitchFamily="34" charset="-122"/>
+                <a:cs typeface="Arial" pitchFamily="34" charset="-120"/>
+              </a:rPr>
+              <a:t>=</a:t>
+            </a:r>
+            <a:endParaRPr lang="en-US" sz="1200" dirty="0"/>
+          </a:p>
+        </p:txBody>
+      </p:sp>
+      <p:sp>
+        <p:nvSpPr>
+          <p:cNvPr id="144" name="Text 101"/>
+          <p:cNvSpPr/>
+          <p:nvPr/>
+        </p:nvSpPr>
+        <p:spPr>
+          <a:xfrm>
+            <a:off x="5359400" y="3746500"/>
+            <a:ext cx="431800" cy="177800"/>
+          </a:xfrm>
+          <a:prstGeom prst="rect">
+            <a:avLst/>
+          </a:prstGeom>
+          <a:noFill/>
+          <a:ln/>
+        </p:spPr>
+        <p:txBody>
+          <a:bodyPr wrap="square" lIns="0" tIns="0" rIns="0" bIns="0" rtlCol="0" anchor="ctr"/>
+          <a:lstStyle/>
+          <a:p>
             <a:pPr algn="l" indent="0" marL="0">
               <a:buNone/>
             </a:pPr>
             <a:r>
-              <a:rPr lang="en-US" sz="1200" i="1" dirty="0">
-                <a:solidFill>
-                  <a:srgbClr val="0000A8"/>
-                </a:solidFill>
-                <a:latin typeface="Arial" pitchFamily="34" charset="0"/>
-                <a:ea typeface="Arial" pitchFamily="34" charset="-122"/>
-                <a:cs typeface="Arial" pitchFamily="34" charset="-120"/>
-              </a:rPr>
-              <a:t>(Z</a:t>
-            </a:r>
-            <a:pPr algn="l" indent="0" marL="0">
-              <a:buNone/>
-            </a:pPr>
-            <a:r>
-              <a:rPr lang="en-US" sz="800" i="1" baseline="-40000" dirty="0">
-                <a:solidFill>
-                  <a:srgbClr val="0000A8"/>
-                </a:solidFill>
-                <a:latin typeface="Arial" pitchFamily="34" charset="0"/>
-                <a:ea typeface="Arial" pitchFamily="34" charset="-122"/>
-                <a:cs typeface="Arial" pitchFamily="34" charset="-120"/>
-              </a:rPr>
-              <a:t>1</a:t>
-            </a:r>
-            <a:pPr algn="l" indent="0" marL="0">
-              <a:buNone/>
-            </a:pPr>
-            <a:r>
-              <a:rPr lang="en-US" sz="1200" i="1" dirty="0">
-                <a:solidFill>
-                  <a:srgbClr val="0000A8"/>
-                </a:solidFill>
-                <a:latin typeface="Arial" pitchFamily="34" charset="0"/>
-                <a:ea typeface="Arial" pitchFamily="34" charset="-122"/>
-                <a:cs typeface="Arial" pitchFamily="34" charset="-120"/>
-              </a:rPr>
-              <a:t>)</a:t>
+              <a:rPr lang="en-US" sz="1200" dirty="0">
+                <a:solidFill>
+                  <a:srgbClr val="000000"/>
+                </a:solidFill>
+                <a:latin typeface="Arial" pitchFamily="34" charset="0"/>
+                <a:ea typeface="Arial" pitchFamily="34" charset="-122"/>
+                <a:cs typeface="Arial" pitchFamily="34" charset="-120"/>
+              </a:rPr>
+              <a:t>0</a:t>
             </a:r>
             <a:endParaRPr lang="en-US" sz="1200" dirty="0"/>
           </a:p>
@@ -5437,22 +5994,22 @@
       </p:sp>
       <p:sp>
         <p:nvSpPr>
-          <p:cNvPr id="123" name="Shape 121"/>
-          <p:cNvSpPr/>
-          <p:nvPr/>
-        </p:nvSpPr>
-        <p:spPr>
-          <a:xfrm>
-            <a:off x="4876800" y="1841500"/>
-            <a:ext cx="0" cy="584200"/>
+          <p:cNvPr id="145" name="Shape 102"/>
+          <p:cNvSpPr/>
+          <p:nvPr/>
+        </p:nvSpPr>
+        <p:spPr>
+          <a:xfrm>
+            <a:off x="6350000" y="3829050"/>
+            <a:ext cx="63500" cy="0"/>
           </a:xfrm>
           <a:prstGeom prst="line">
             <a:avLst/>
           </a:prstGeom>
           <a:noFill/>
-          <a:ln w="25400">
+          <a:ln w="12700">
             <a:solidFill>
-              <a:srgbClr val="5C9A5C"/>
+              <a:srgbClr val="000000"/>
             </a:solidFill>
             <a:prstDash val="solid"/>
           </a:ln>
@@ -5460,22 +6017,22 @@
       </p:sp>
       <p:sp>
         <p:nvSpPr>
-          <p:cNvPr id="124" name="Shape 122"/>
-          <p:cNvSpPr/>
-          <p:nvPr/>
-        </p:nvSpPr>
-        <p:spPr>
-          <a:xfrm>
-            <a:off x="5118100" y="1841500"/>
-            <a:ext cx="0" cy="584200"/>
+          <p:cNvPr id="146" name="Shape 103"/>
+          <p:cNvSpPr/>
+          <p:nvPr/>
+        </p:nvSpPr>
+        <p:spPr>
+          <a:xfrm>
+            <a:off x="6350000" y="3854450"/>
+            <a:ext cx="63500" cy="0"/>
           </a:xfrm>
           <a:prstGeom prst="line">
             <a:avLst/>
           </a:prstGeom>
           <a:noFill/>
-          <a:ln w="25400">
+          <a:ln w="12700">
             <a:solidFill>
-              <a:srgbClr val="5C9A5C"/>
+              <a:srgbClr val="000000"/>
             </a:solidFill>
             <a:prstDash val="solid"/>
           </a:ln>
@@ -5483,220 +6040,22 @@
       </p:sp>
       <p:sp>
         <p:nvSpPr>
-          <p:cNvPr id="125" name="Text 123"/>
-          <p:cNvSpPr/>
-          <p:nvPr/>
-        </p:nvSpPr>
-        <p:spPr>
-          <a:xfrm>
-            <a:off x="4876800" y="1854200"/>
-            <a:ext cx="241300" cy="177800"/>
-          </a:xfrm>
-          <a:prstGeom prst="rect">
-            <a:avLst/>
-          </a:prstGeom>
-          <a:noFill/>
-          <a:ln/>
-        </p:spPr>
-        <p:txBody>
-          <a:bodyPr wrap="square" lIns="0" tIns="0" rIns="0" bIns="0" rtlCol="0" anchor="ctr"/>
-          <a:lstStyle/>
-          <a:p>
-            <a:pPr algn="ctr" indent="0" marL="0">
-              <a:buNone/>
-            </a:pPr>
-            <a:r>
-              <a:rPr lang="en-US" sz="1000" dirty="0">
-                <a:solidFill>
-                  <a:srgbClr val="5C9A5C"/>
-                </a:solidFill>
-                <a:latin typeface="Arial" pitchFamily="34" charset="0"/>
-                <a:ea typeface="Arial" pitchFamily="34" charset="-122"/>
-                <a:cs typeface="Arial" pitchFamily="34" charset="-120"/>
-              </a:rPr>
-              <a:t>5</a:t>
-            </a:r>
-            <a:endParaRPr lang="en-US" sz="1000" dirty="0"/>
-          </a:p>
-        </p:txBody>
-      </p:sp>
-      <p:sp>
-        <p:nvSpPr>
-          <p:cNvPr id="126" name="Text 124"/>
-          <p:cNvSpPr/>
-          <p:nvPr/>
-        </p:nvSpPr>
-        <p:spPr>
-          <a:xfrm>
-            <a:off x="4876800" y="2032000"/>
-            <a:ext cx="241300" cy="177800"/>
-          </a:xfrm>
-          <a:prstGeom prst="rect">
-            <a:avLst/>
-          </a:prstGeom>
-          <a:noFill/>
-          <a:ln/>
-        </p:spPr>
-        <p:txBody>
-          <a:bodyPr wrap="square" lIns="0" tIns="0" rIns="0" bIns="0" rtlCol="0" anchor="ctr"/>
-          <a:lstStyle/>
-          <a:p>
-            <a:pPr algn="ctr" indent="0" marL="0">
-              <a:buNone/>
-            </a:pPr>
-            <a:r>
-              <a:rPr lang="en-US" sz="1000" dirty="0">
-                <a:solidFill>
-                  <a:srgbClr val="5C9A5C"/>
-                </a:solidFill>
-                <a:latin typeface="Arial" pitchFamily="34" charset="0"/>
-                <a:ea typeface="Arial" pitchFamily="34" charset="-122"/>
-                <a:cs typeface="Arial" pitchFamily="34" charset="-120"/>
-              </a:rPr>
-              <a:t>-1</a:t>
-            </a:r>
-            <a:endParaRPr lang="en-US" sz="1000" dirty="0"/>
-          </a:p>
-        </p:txBody>
-      </p:sp>
-      <p:sp>
-        <p:nvSpPr>
-          <p:cNvPr id="127" name="Text 125"/>
-          <p:cNvSpPr/>
-          <p:nvPr/>
-        </p:nvSpPr>
-        <p:spPr>
-          <a:xfrm>
-            <a:off x="4876800" y="2222500"/>
-            <a:ext cx="241300" cy="177800"/>
-          </a:xfrm>
-          <a:prstGeom prst="rect">
-            <a:avLst/>
-          </a:prstGeom>
-          <a:noFill/>
-          <a:ln/>
-        </p:spPr>
-        <p:txBody>
-          <a:bodyPr wrap="square" lIns="0" tIns="0" rIns="0" bIns="0" rtlCol="0" anchor="ctr"/>
-          <a:lstStyle/>
-          <a:p>
-            <a:pPr algn="ctr" indent="0" marL="0">
-              <a:buNone/>
-            </a:pPr>
-            <a:r>
-              <a:rPr lang="en-US" sz="1000" dirty="0">
-                <a:solidFill>
-                  <a:srgbClr val="5C9A5C"/>
-                </a:solidFill>
-                <a:latin typeface="Arial" pitchFamily="34" charset="0"/>
-                <a:ea typeface="Arial" pitchFamily="34" charset="-122"/>
-                <a:cs typeface="Arial" pitchFamily="34" charset="-120"/>
-              </a:rPr>
-              <a:t>-1</a:t>
-            </a:r>
-            <a:endParaRPr lang="en-US" sz="1000" dirty="0"/>
-          </a:p>
-        </p:txBody>
-      </p:sp>
-      <p:sp>
-        <p:nvSpPr>
-          <p:cNvPr id="128" name="Text 126"/>
-          <p:cNvSpPr/>
-          <p:nvPr/>
-        </p:nvSpPr>
-        <p:spPr>
-          <a:xfrm>
-            <a:off x="4229100" y="2730500"/>
-            <a:ext cx="558800" cy="177800"/>
-          </a:xfrm>
-          <a:prstGeom prst="rect">
-            <a:avLst/>
-          </a:prstGeom>
-          <a:noFill/>
-          <a:ln/>
-        </p:spPr>
-        <p:txBody>
-          <a:bodyPr wrap="square" lIns="0" tIns="0" rIns="0" bIns="0" rtlCol="0" anchor="ctr"/>
-          <a:lstStyle/>
-          <a:p>
-            <a:pPr algn="l" indent="0" marL="0">
-              <a:buNone/>
-            </a:pPr>
-            <a:r>
-              <a:rPr lang="en-US" sz="1200" i="1" dirty="0">
-                <a:solidFill>
-                  <a:srgbClr val="0000A8"/>
-                </a:solidFill>
-                <a:latin typeface="Arial" pitchFamily="34" charset="0"/>
-                <a:ea typeface="Arial" pitchFamily="34" charset="-122"/>
-                <a:cs typeface="Arial" pitchFamily="34" charset="-120"/>
-              </a:rPr>
-              <a:t>d</a:t>
-            </a:r>
-            <a:pPr algn="l" indent="0" marL="0">
-              <a:buNone/>
-            </a:pPr>
-            <a:r>
-              <a:rPr lang="en-US" sz="1200" i="1" dirty="0">
-                <a:solidFill>
-                  <a:srgbClr val="0000A8"/>
-                </a:solidFill>
-                <a:latin typeface="Arial" pitchFamily="34" charset="0"/>
-                <a:ea typeface="Arial" pitchFamily="34" charset="-122"/>
-                <a:cs typeface="Arial" pitchFamily="34" charset="-120"/>
-              </a:rPr>
-              <a:t>(Z</a:t>
-            </a:r>
-            <a:pPr algn="l" indent="0" marL="0">
-              <a:buNone/>
-            </a:pPr>
-            <a:r>
-              <a:rPr lang="en-US" sz="800" i="1" baseline="-40000" dirty="0">
-                <a:solidFill>
-                  <a:srgbClr val="0000A8"/>
-                </a:solidFill>
-                <a:latin typeface="Arial" pitchFamily="34" charset="0"/>
-                <a:ea typeface="Arial" pitchFamily="34" charset="-122"/>
-                <a:cs typeface="Arial" pitchFamily="34" charset="-120"/>
-              </a:rPr>
-              <a:t>2</a:t>
-            </a:r>
-            <a:pPr algn="l" indent="0" marL="0">
-              <a:buNone/>
-            </a:pPr>
-            <a:r>
-              <a:rPr lang="en-US" sz="1200" i="1" dirty="0">
-                <a:solidFill>
-                  <a:srgbClr val="0000A8"/>
-                </a:solidFill>
-                <a:latin typeface="Arial" pitchFamily="34" charset="0"/>
-                <a:ea typeface="Arial" pitchFamily="34" charset="-122"/>
-                <a:cs typeface="Arial" pitchFamily="34" charset="-120"/>
-              </a:rPr>
-              <a:t>)</a:t>
-            </a:r>
-            <a:endParaRPr lang="en-US" sz="1200" dirty="0"/>
-          </a:p>
-        </p:txBody>
-      </p:sp>
-      <p:sp>
-        <p:nvSpPr>
-          <p:cNvPr id="129" name="Shape 127"/>
-          <p:cNvSpPr/>
-          <p:nvPr/>
-        </p:nvSpPr>
-        <p:spPr>
-          <a:xfrm>
-            <a:off x="4876800" y="2679700"/>
-            <a:ext cx="0" cy="584200"/>
+          <p:cNvPr id="147" name="Shape 104"/>
+          <p:cNvSpPr/>
+          <p:nvPr/>
+        </p:nvSpPr>
+        <p:spPr>
+          <a:xfrm>
+            <a:off x="6413500" y="3810000"/>
+            <a:ext cx="50800" cy="25400"/>
           </a:xfrm>
           <a:prstGeom prst="line">
             <a:avLst/>
           </a:prstGeom>
           <a:noFill/>
-          <a:ln w="25400">
+          <a:ln w="12700">
             <a:solidFill>
-              <a:srgbClr val="5C9A5C"/>
+              <a:srgbClr val="000000"/>
             </a:solidFill>
             <a:prstDash val="solid"/>
           </a:ln>
@@ -5704,22 +6063,22 @@
       </p:sp>
       <p:sp>
         <p:nvSpPr>
-          <p:cNvPr id="130" name="Shape 128"/>
-          <p:cNvSpPr/>
-          <p:nvPr/>
-        </p:nvSpPr>
-        <p:spPr>
-          <a:xfrm>
-            <a:off x="5118100" y="2679700"/>
-            <a:ext cx="0" cy="584200"/>
+          <p:cNvPr id="148" name="Shape 105"/>
+          <p:cNvSpPr/>
+          <p:nvPr/>
+        </p:nvSpPr>
+        <p:spPr>
+          <a:xfrm flipV="1">
+            <a:off x="6413500" y="3835400"/>
+            <a:ext cx="50800" cy="25400"/>
           </a:xfrm>
           <a:prstGeom prst="line">
             <a:avLst/>
           </a:prstGeom>
           <a:noFill/>
-          <a:ln w="25400">
+          <a:ln w="12700">
             <a:solidFill>
-              <a:srgbClr val="5C9A5C"/>
+              <a:srgbClr val="000000"/>
             </a:solidFill>
             <a:prstDash val="solid"/>
           </a:ln>
@@ -5727,131 +6086,14 @@
       </p:sp>
       <p:sp>
         <p:nvSpPr>
-          <p:cNvPr id="131" name="Text 129"/>
-          <p:cNvSpPr/>
-          <p:nvPr/>
-        </p:nvSpPr>
-        <p:spPr>
-          <a:xfrm>
-            <a:off x="4876800" y="2692400"/>
-            <a:ext cx="241300" cy="177800"/>
-          </a:xfrm>
-          <a:prstGeom prst="rect">
-            <a:avLst/>
-          </a:prstGeom>
-          <a:noFill/>
-          <a:ln/>
-        </p:spPr>
-        <p:txBody>
-          <a:bodyPr wrap="square" lIns="0" tIns="0" rIns="0" bIns="0" rtlCol="0" anchor="ctr"/>
-          <a:lstStyle/>
-          <a:p>
-            <a:pPr algn="ctr" indent="0" marL="0">
-              <a:buNone/>
-            </a:pPr>
-            <a:r>
-              <a:rPr lang="en-US" sz="1000" dirty="0">
-                <a:solidFill>
-                  <a:srgbClr val="5C9A5C"/>
-                </a:solidFill>
-                <a:latin typeface="Arial" pitchFamily="34" charset="0"/>
-                <a:ea typeface="Arial" pitchFamily="34" charset="-122"/>
-                <a:cs typeface="Arial" pitchFamily="34" charset="-120"/>
-              </a:rPr>
-              <a:t>5</a:t>
-            </a:r>
-            <a:endParaRPr lang="en-US" sz="1000" dirty="0"/>
-          </a:p>
-        </p:txBody>
-      </p:sp>
-      <p:sp>
-        <p:nvSpPr>
-          <p:cNvPr id="132" name="Text 130"/>
-          <p:cNvSpPr/>
-          <p:nvPr/>
-        </p:nvSpPr>
-        <p:spPr>
-          <a:xfrm>
-            <a:off x="4876800" y="2870200"/>
-            <a:ext cx="241300" cy="177800"/>
-          </a:xfrm>
-          <a:prstGeom prst="rect">
-            <a:avLst/>
-          </a:prstGeom>
-          <a:noFill/>
-          <a:ln/>
-        </p:spPr>
-        <p:txBody>
-          <a:bodyPr wrap="square" lIns="0" tIns="0" rIns="0" bIns="0" rtlCol="0" anchor="ctr"/>
-          <a:lstStyle/>
-          <a:p>
-            <a:pPr algn="ctr" indent="0" marL="0">
-              <a:buNone/>
-            </a:pPr>
-            <a:r>
-              <a:rPr lang="en-US" sz="1000" dirty="0">
-                <a:solidFill>
-                  <a:srgbClr val="5C9A5C"/>
-                </a:solidFill>
-                <a:latin typeface="Arial" pitchFamily="34" charset="0"/>
-                <a:ea typeface="Arial" pitchFamily="34" charset="-122"/>
-                <a:cs typeface="Arial" pitchFamily="34" charset="-120"/>
-              </a:rPr>
-              <a:t>-1</a:t>
-            </a:r>
-            <a:endParaRPr lang="en-US" sz="1000" dirty="0"/>
-          </a:p>
-        </p:txBody>
-      </p:sp>
-      <p:sp>
-        <p:nvSpPr>
-          <p:cNvPr id="133" name="Text 131"/>
-          <p:cNvSpPr/>
-          <p:nvPr/>
-        </p:nvSpPr>
-        <p:spPr>
-          <a:xfrm>
-            <a:off x="4876800" y="3060700"/>
-            <a:ext cx="241300" cy="177800"/>
-          </a:xfrm>
-          <a:prstGeom prst="rect">
-            <a:avLst/>
-          </a:prstGeom>
-          <a:noFill/>
-          <a:ln/>
-        </p:spPr>
-        <p:txBody>
-          <a:bodyPr wrap="square" lIns="0" tIns="0" rIns="0" bIns="0" rtlCol="0" anchor="ctr"/>
-          <a:lstStyle/>
-          <a:p>
-            <a:pPr algn="ctr" indent="0" marL="0">
-              <a:buNone/>
-            </a:pPr>
-            <a:r>
-              <a:rPr lang="en-US" sz="1000" dirty="0">
-                <a:solidFill>
-                  <a:srgbClr val="5C9A5C"/>
-                </a:solidFill>
-                <a:latin typeface="Arial" pitchFamily="34" charset="0"/>
-                <a:ea typeface="Arial" pitchFamily="34" charset="-122"/>
-                <a:cs typeface="Arial" pitchFamily="34" charset="-120"/>
-              </a:rPr>
-              <a:t>-1</a:t>
-            </a:r>
-            <a:endParaRPr lang="en-US" sz="1000" dirty="0"/>
-          </a:p>
-        </p:txBody>
-      </p:sp>
-      <p:sp>
-        <p:nvSpPr>
-          <p:cNvPr id="134" name="Text 132"/>
-          <p:cNvSpPr/>
-          <p:nvPr/>
-        </p:nvSpPr>
-        <p:spPr>
-          <a:xfrm>
-            <a:off x="4229100" y="3568700"/>
-            <a:ext cx="558800" cy="177800"/>
+          <p:cNvPr id="149" name="Text 106"/>
+          <p:cNvSpPr/>
+          <p:nvPr/>
+        </p:nvSpPr>
+        <p:spPr>
+          <a:xfrm>
+            <a:off x="6502400" y="3746500"/>
+            <a:ext cx="1651000" cy="177800"/>
           </a:xfrm>
           <a:prstGeom prst="rect">
             <a:avLst/>
@@ -5867,7 +6109,46 @@
               <a:buNone/>
             </a:pPr>
             <a:r>
-              <a:rPr lang="en-US" sz="1200" i="1" dirty="0">
+              <a:rPr lang="en-US" sz="1200" dirty="0">
+                <a:solidFill>
+                  <a:srgbClr val="000000"/>
+                </a:solidFill>
+                <a:latin typeface="Arial" pitchFamily="34" charset="0"/>
+                <a:ea typeface="Arial" pitchFamily="34" charset="-122"/>
+                <a:cs typeface="Arial" pitchFamily="34" charset="-120"/>
+              </a:rPr>
+              <a:t>Not &gt; 0 , Not &lt; 0</a:t>
+            </a:r>
+            <a:endParaRPr lang="en-US" sz="1200" dirty="0"/>
+          </a:p>
+        </p:txBody>
+      </p:sp>
+      <p:sp>
+        <p:nvSpPr>
+          <p:cNvPr id="150" name="Text 107"/>
+          <p:cNvSpPr/>
+          <p:nvPr/>
+        </p:nvSpPr>
+        <p:spPr>
+          <a:xfrm>
+            <a:off x="8280400" y="3746500"/>
+            <a:ext cx="1270000" cy="177800"/>
+          </a:xfrm>
+          <a:prstGeom prst="rect">
+            <a:avLst/>
+          </a:prstGeom>
+          <a:noFill/>
+          <a:ln/>
+        </p:spPr>
+        <p:txBody>
+          <a:bodyPr wrap="square" lIns="0" tIns="0" rIns="0" bIns="0" rtlCol="0" anchor="ctr"/>
+          <a:lstStyle/>
+          <a:p>
+            <a:pPr algn="l" indent="0" marL="0">
+              <a:buNone/>
+            </a:pPr>
+            <a:r>
+              <a:rPr lang="en-US" sz="1200" b="1" dirty="0">
                 <a:solidFill>
                   <a:srgbClr val="0000A8"/>
                 </a:solidFill>
@@ -5875,565 +6156,9 @@
                 <a:ea typeface="Arial" pitchFamily="34" charset="-122"/>
                 <a:cs typeface="Arial" pitchFamily="34" charset="-120"/>
               </a:rPr>
-              <a:t>d</a:t>
-            </a:r>
-            <a:pPr algn="l" indent="0" marL="0">
-              <a:buNone/>
-            </a:pPr>
-            <a:r>
-              <a:rPr lang="en-US" sz="1200" i="1" dirty="0">
-                <a:solidFill>
-                  <a:srgbClr val="0000A8"/>
-                </a:solidFill>
-                <a:latin typeface="Arial" pitchFamily="34" charset="0"/>
-                <a:ea typeface="Arial" pitchFamily="34" charset="-122"/>
-                <a:cs typeface="Arial" pitchFamily="34" charset="-120"/>
-              </a:rPr>
-              <a:t>(Z</a:t>
-            </a:r>
-            <a:pPr algn="l" indent="0" marL="0">
-              <a:buNone/>
-            </a:pPr>
-            <a:r>
-              <a:rPr lang="en-US" sz="800" i="1" baseline="-40000" dirty="0">
-                <a:solidFill>
-                  <a:srgbClr val="0000A8"/>
-                </a:solidFill>
-                <a:latin typeface="Arial" pitchFamily="34" charset="0"/>
-                <a:ea typeface="Arial" pitchFamily="34" charset="-122"/>
-                <a:cs typeface="Arial" pitchFamily="34" charset="-120"/>
-              </a:rPr>
-              <a:t>3</a:t>
-            </a:r>
-            <a:pPr algn="l" indent="0" marL="0">
-              <a:buNone/>
-            </a:pPr>
-            <a:r>
-              <a:rPr lang="en-US" sz="1200" i="1" dirty="0">
-                <a:solidFill>
-                  <a:srgbClr val="0000A8"/>
-                </a:solidFill>
-                <a:latin typeface="Arial" pitchFamily="34" charset="0"/>
-                <a:ea typeface="Arial" pitchFamily="34" charset="-122"/>
-                <a:cs typeface="Arial" pitchFamily="34" charset="-120"/>
-              </a:rPr>
-              <a:t>)</a:t>
+              <a:t>Undefined Class</a:t>
             </a:r>
             <a:endParaRPr lang="en-US" sz="1200" dirty="0"/>
-          </a:p>
-        </p:txBody>
-      </p:sp>
-      <p:sp>
-        <p:nvSpPr>
-          <p:cNvPr id="135" name="Shape 133"/>
-          <p:cNvSpPr/>
-          <p:nvPr/>
-        </p:nvSpPr>
-        <p:spPr>
-          <a:xfrm>
-            <a:off x="4876800" y="3517900"/>
-            <a:ext cx="0" cy="584200"/>
-          </a:xfrm>
-          <a:prstGeom prst="line">
-            <a:avLst/>
-          </a:prstGeom>
-          <a:noFill/>
-          <a:ln w="25400">
-            <a:solidFill>
-              <a:srgbClr val="5C9A5C"/>
-            </a:solidFill>
-            <a:prstDash val="solid"/>
-          </a:ln>
-        </p:spPr>
-      </p:sp>
-      <p:sp>
-        <p:nvSpPr>
-          <p:cNvPr id="136" name="Shape 134"/>
-          <p:cNvSpPr/>
-          <p:nvPr/>
-        </p:nvSpPr>
-        <p:spPr>
-          <a:xfrm>
-            <a:off x="5118100" y="3517900"/>
-            <a:ext cx="0" cy="584200"/>
-          </a:xfrm>
-          <a:prstGeom prst="line">
-            <a:avLst/>
-          </a:prstGeom>
-          <a:noFill/>
-          <a:ln w="25400">
-            <a:solidFill>
-              <a:srgbClr val="5C9A5C"/>
-            </a:solidFill>
-            <a:prstDash val="solid"/>
-          </a:ln>
-        </p:spPr>
-      </p:sp>
-      <p:sp>
-        <p:nvSpPr>
-          <p:cNvPr id="137" name="Text 135"/>
-          <p:cNvSpPr/>
-          <p:nvPr/>
-        </p:nvSpPr>
-        <p:spPr>
-          <a:xfrm>
-            <a:off x="4876800" y="3530600"/>
-            <a:ext cx="241300" cy="177800"/>
-          </a:xfrm>
-          <a:prstGeom prst="rect">
-            <a:avLst/>
-          </a:prstGeom>
-          <a:noFill/>
-          <a:ln/>
-        </p:spPr>
-        <p:txBody>
-          <a:bodyPr wrap="square" lIns="0" tIns="0" rIns="0" bIns="0" rtlCol="0" anchor="ctr"/>
-          <a:lstStyle/>
-          <a:p>
-            <a:pPr algn="ctr" indent="0" marL="0">
-              <a:buNone/>
-            </a:pPr>
-            <a:r>
-              <a:rPr lang="en-US" sz="1000" dirty="0">
-                <a:solidFill>
-                  <a:srgbClr val="5C9A5C"/>
-                </a:solidFill>
-                <a:latin typeface="Arial" pitchFamily="34" charset="0"/>
-                <a:ea typeface="Arial" pitchFamily="34" charset="-122"/>
-                <a:cs typeface="Arial" pitchFamily="34" charset="-120"/>
-              </a:rPr>
-              <a:t>5</a:t>
-            </a:r>
-            <a:endParaRPr lang="en-US" sz="1000" dirty="0"/>
-          </a:p>
-        </p:txBody>
-      </p:sp>
-      <p:sp>
-        <p:nvSpPr>
-          <p:cNvPr id="138" name="Text 136"/>
-          <p:cNvSpPr/>
-          <p:nvPr/>
-        </p:nvSpPr>
-        <p:spPr>
-          <a:xfrm>
-            <a:off x="4876800" y="3708400"/>
-            <a:ext cx="241300" cy="177800"/>
-          </a:xfrm>
-          <a:prstGeom prst="rect">
-            <a:avLst/>
-          </a:prstGeom>
-          <a:noFill/>
-          <a:ln/>
-        </p:spPr>
-        <p:txBody>
-          <a:bodyPr wrap="square" lIns="0" tIns="0" rIns="0" bIns="0" rtlCol="0" anchor="ctr"/>
-          <a:lstStyle/>
-          <a:p>
-            <a:pPr algn="ctr" indent="0" marL="0">
-              <a:buNone/>
-            </a:pPr>
-            <a:r>
-              <a:rPr lang="en-US" sz="1000" dirty="0">
-                <a:solidFill>
-                  <a:srgbClr val="5C9A5C"/>
-                </a:solidFill>
-                <a:latin typeface="Arial" pitchFamily="34" charset="0"/>
-                <a:ea typeface="Arial" pitchFamily="34" charset="-122"/>
-                <a:cs typeface="Arial" pitchFamily="34" charset="-120"/>
-              </a:rPr>
-              <a:t>-1</a:t>
-            </a:r>
-            <a:endParaRPr lang="en-US" sz="1000" dirty="0"/>
-          </a:p>
-        </p:txBody>
-      </p:sp>
-      <p:sp>
-        <p:nvSpPr>
-          <p:cNvPr id="139" name="Text 137"/>
-          <p:cNvSpPr/>
-          <p:nvPr/>
-        </p:nvSpPr>
-        <p:spPr>
-          <a:xfrm>
-            <a:off x="4876800" y="3898900"/>
-            <a:ext cx="241300" cy="177800"/>
-          </a:xfrm>
-          <a:prstGeom prst="rect">
-            <a:avLst/>
-          </a:prstGeom>
-          <a:noFill/>
-          <a:ln/>
-        </p:spPr>
-        <p:txBody>
-          <a:bodyPr wrap="square" lIns="0" tIns="0" rIns="0" bIns="0" rtlCol="0" anchor="ctr"/>
-          <a:lstStyle/>
-          <a:p>
-            <a:pPr algn="ctr" indent="0" marL="0">
-              <a:buNone/>
-            </a:pPr>
-            <a:r>
-              <a:rPr lang="en-US" sz="1000" dirty="0">
-                <a:solidFill>
-                  <a:srgbClr val="5C9A5C"/>
-                </a:solidFill>
-                <a:latin typeface="Arial" pitchFamily="34" charset="0"/>
-                <a:ea typeface="Arial" pitchFamily="34" charset="-122"/>
-                <a:cs typeface="Arial" pitchFamily="34" charset="-120"/>
-              </a:rPr>
-              <a:t>-1</a:t>
-            </a:r>
-            <a:endParaRPr lang="en-US" sz="1000" dirty="0"/>
-          </a:p>
-        </p:txBody>
-      </p:sp>
-      <p:sp>
-        <p:nvSpPr>
-          <p:cNvPr id="140" name="Text 138"/>
-          <p:cNvSpPr/>
-          <p:nvPr/>
-        </p:nvSpPr>
-        <p:spPr>
-          <a:xfrm>
-            <a:off x="5346700" y="2044700"/>
-            <a:ext cx="431800" cy="177800"/>
-          </a:xfrm>
-          <a:prstGeom prst="rect">
-            <a:avLst/>
-          </a:prstGeom>
-          <a:noFill/>
-          <a:ln/>
-        </p:spPr>
-        <p:txBody>
-          <a:bodyPr wrap="square" lIns="0" tIns="0" rIns="0" bIns="0" rtlCol="0" anchor="ctr"/>
-          <a:lstStyle/>
-          <a:p>
-            <a:pPr algn="l" indent="0" marL="0">
-              <a:buNone/>
-            </a:pPr>
-            <a:r>
-              <a:rPr lang="en-US" sz="1100" dirty="0">
-                <a:solidFill>
-                  <a:srgbClr val="000000"/>
-                </a:solidFill>
-                <a:latin typeface="Arial" pitchFamily="34" charset="0"/>
-                <a:ea typeface="Arial" pitchFamily="34" charset="-122"/>
-                <a:cs typeface="Arial" pitchFamily="34" charset="-120"/>
-              </a:rPr>
-              <a:t>= 5</a:t>
-            </a:r>
-            <a:endParaRPr lang="en-US" sz="1100" dirty="0"/>
-          </a:p>
-        </p:txBody>
-      </p:sp>
-      <p:sp>
-        <p:nvSpPr>
-          <p:cNvPr id="141" name="Text 139"/>
-          <p:cNvSpPr/>
-          <p:nvPr/>
-        </p:nvSpPr>
-        <p:spPr>
-          <a:xfrm>
-            <a:off x="6629400" y="2044700"/>
-            <a:ext cx="1016000" cy="177800"/>
-          </a:xfrm>
-          <a:prstGeom prst="rect">
-            <a:avLst/>
-          </a:prstGeom>
-          <a:noFill/>
-          <a:ln/>
-        </p:spPr>
-        <p:txBody>
-          <a:bodyPr wrap="square" lIns="0" tIns="0" rIns="0" bIns="0" rtlCol="0" anchor="ctr"/>
-          <a:lstStyle/>
-          <a:p>
-            <a:pPr algn="l" indent="0" marL="0">
-              <a:buNone/>
-            </a:pPr>
-            <a:r>
-              <a:rPr lang="en-US" sz="1100" dirty="0">
-                <a:solidFill>
-                  <a:srgbClr val="000000"/>
-                </a:solidFill>
-                <a:latin typeface="Arial" pitchFamily="34" charset="0"/>
-                <a:ea typeface="Arial" pitchFamily="34" charset="-122"/>
-                <a:cs typeface="Arial" pitchFamily="34" charset="-120"/>
-              </a:rPr>
-              <a:t>Positive &gt; 0</a:t>
-            </a:r>
-            <a:endParaRPr lang="en-US" sz="1100" dirty="0"/>
-          </a:p>
-        </p:txBody>
-      </p:sp>
-      <p:sp>
-        <p:nvSpPr>
-          <p:cNvPr id="142" name="Text 140"/>
-          <p:cNvSpPr/>
-          <p:nvPr/>
-        </p:nvSpPr>
-        <p:spPr>
-          <a:xfrm>
-            <a:off x="8318500" y="2044700"/>
-            <a:ext cx="889000" cy="177800"/>
-          </a:xfrm>
-          <a:prstGeom prst="rect">
-            <a:avLst/>
-          </a:prstGeom>
-          <a:noFill/>
-          <a:ln/>
-        </p:spPr>
-        <p:txBody>
-          <a:bodyPr wrap="square" lIns="0" tIns="0" rIns="0" bIns="0" rtlCol="0" anchor="ctr"/>
-          <a:lstStyle/>
-          <a:p>
-            <a:pPr algn="l" indent="0" marL="0">
-              <a:buNone/>
-            </a:pPr>
-            <a:r>
-              <a:rPr lang="en-US" sz="1100" b="1" dirty="0">
-                <a:solidFill>
-                  <a:srgbClr val="C00000"/>
-                </a:solidFill>
-                <a:latin typeface="Arial" pitchFamily="34" charset="0"/>
-                <a:ea typeface="Arial" pitchFamily="34" charset="-122"/>
-                <a:cs typeface="Arial" pitchFamily="34" charset="-120"/>
-              </a:rPr>
-              <a:t>Class I</a:t>
-            </a:r>
-            <a:endParaRPr lang="en-US" sz="1100" dirty="0"/>
-          </a:p>
-        </p:txBody>
-      </p:sp>
-      <p:sp>
-        <p:nvSpPr>
-          <p:cNvPr id="143" name="Text 141"/>
-          <p:cNvSpPr/>
-          <p:nvPr/>
-        </p:nvSpPr>
-        <p:spPr>
-          <a:xfrm>
-            <a:off x="5346700" y="2882900"/>
-            <a:ext cx="431800" cy="177800"/>
-          </a:xfrm>
-          <a:prstGeom prst="rect">
-            <a:avLst/>
-          </a:prstGeom>
-          <a:noFill/>
-          <a:ln/>
-        </p:spPr>
-        <p:txBody>
-          <a:bodyPr wrap="square" lIns="0" tIns="0" rIns="0" bIns="0" rtlCol="0" anchor="ctr"/>
-          <a:lstStyle/>
-          <a:p>
-            <a:pPr algn="l" indent="0" marL="0">
-              <a:buNone/>
-            </a:pPr>
-            <a:r>
-              <a:rPr lang="en-US" sz="1100" dirty="0">
-                <a:solidFill>
-                  <a:srgbClr val="000000"/>
-                </a:solidFill>
-                <a:latin typeface="Arial" pitchFamily="34" charset="0"/>
-                <a:ea typeface="Arial" pitchFamily="34" charset="-122"/>
-                <a:cs typeface="Arial" pitchFamily="34" charset="-120"/>
-              </a:rPr>
-              <a:t>= -8</a:t>
-            </a:r>
-            <a:endParaRPr lang="en-US" sz="1100" dirty="0"/>
-          </a:p>
-        </p:txBody>
-      </p:sp>
-      <p:sp>
-        <p:nvSpPr>
-          <p:cNvPr id="144" name="Text 142"/>
-          <p:cNvSpPr/>
-          <p:nvPr/>
-        </p:nvSpPr>
-        <p:spPr>
-          <a:xfrm>
-            <a:off x="6756400" y="2882900"/>
-            <a:ext cx="1016000" cy="177800"/>
-          </a:xfrm>
-          <a:prstGeom prst="rect">
-            <a:avLst/>
-          </a:prstGeom>
-          <a:noFill/>
-          <a:ln/>
-        </p:spPr>
-        <p:txBody>
-          <a:bodyPr wrap="square" lIns="0" tIns="0" rIns="0" bIns="0" rtlCol="0" anchor="ctr"/>
-          <a:lstStyle/>
-          <a:p>
-            <a:pPr algn="l" indent="0" marL="0">
-              <a:buNone/>
-            </a:pPr>
-            <a:r>
-              <a:rPr lang="en-US" sz="1100" dirty="0">
-                <a:solidFill>
-                  <a:srgbClr val="000000"/>
-                </a:solidFill>
-                <a:latin typeface="Arial" pitchFamily="34" charset="0"/>
-                <a:ea typeface="Arial" pitchFamily="34" charset="-122"/>
-                <a:cs typeface="Arial" pitchFamily="34" charset="-120"/>
-              </a:rPr>
-              <a:t>Negative &lt; 0</a:t>
-            </a:r>
-            <a:endParaRPr lang="en-US" sz="1100" dirty="0"/>
-          </a:p>
-        </p:txBody>
-      </p:sp>
-      <p:sp>
-        <p:nvSpPr>
-          <p:cNvPr id="145" name="Text 143"/>
-          <p:cNvSpPr/>
-          <p:nvPr/>
-        </p:nvSpPr>
-        <p:spPr>
-          <a:xfrm>
-            <a:off x="8496300" y="2882900"/>
-            <a:ext cx="889000" cy="177800"/>
-          </a:xfrm>
-          <a:prstGeom prst="rect">
-            <a:avLst/>
-          </a:prstGeom>
-          <a:noFill/>
-          <a:ln/>
-        </p:spPr>
-        <p:txBody>
-          <a:bodyPr wrap="square" lIns="0" tIns="0" rIns="0" bIns="0" rtlCol="0" anchor="ctr"/>
-          <a:lstStyle/>
-          <a:p>
-            <a:pPr algn="l" indent="0" marL="0">
-              <a:buNone/>
-            </a:pPr>
-            <a:r>
-              <a:rPr lang="en-US" sz="1100" b="1" dirty="0">
-                <a:solidFill>
-                  <a:srgbClr val="0000A8"/>
-                </a:solidFill>
-                <a:latin typeface="Arial" pitchFamily="34" charset="0"/>
-                <a:ea typeface="Arial" pitchFamily="34" charset="-122"/>
-                <a:cs typeface="Arial" pitchFamily="34" charset="-120"/>
-              </a:rPr>
-              <a:t>Class II</a:t>
-            </a:r>
-            <a:endParaRPr lang="en-US" sz="1100" dirty="0"/>
-          </a:p>
-        </p:txBody>
-      </p:sp>
-      <p:sp>
-        <p:nvSpPr>
-          <p:cNvPr id="146" name="Text 144"/>
-          <p:cNvSpPr/>
-          <p:nvPr/>
-        </p:nvSpPr>
-        <p:spPr>
-          <a:xfrm>
-            <a:off x="5334000" y="3721100"/>
-            <a:ext cx="431800" cy="177800"/>
-          </a:xfrm>
-          <a:prstGeom prst="rect">
-            <a:avLst/>
-          </a:prstGeom>
-          <a:noFill/>
-          <a:ln/>
-        </p:spPr>
-        <p:txBody>
-          <a:bodyPr wrap="square" lIns="0" tIns="0" rIns="0" bIns="0" rtlCol="0" anchor="ctr"/>
-          <a:lstStyle/>
-          <a:p>
-            <a:pPr algn="l" indent="0" marL="0">
-              <a:buNone/>
-            </a:pPr>
-            <a:r>
-              <a:rPr lang="en-US" sz="1100" dirty="0">
-                <a:solidFill>
-                  <a:srgbClr val="000000"/>
-                </a:solidFill>
-                <a:latin typeface="Arial" pitchFamily="34" charset="0"/>
-                <a:ea typeface="Arial" pitchFamily="34" charset="-122"/>
-                <a:cs typeface="Arial" pitchFamily="34" charset="-120"/>
-              </a:rPr>
-              <a:t>= 0</a:t>
-            </a:r>
-            <a:endParaRPr lang="en-US" sz="1100" dirty="0"/>
-          </a:p>
-        </p:txBody>
-      </p:sp>
-      <p:sp>
-        <p:nvSpPr>
-          <p:cNvPr id="147" name="Text 145"/>
-          <p:cNvSpPr/>
-          <p:nvPr/>
-        </p:nvSpPr>
-        <p:spPr>
-          <a:xfrm>
-            <a:off x="6502400" y="3721100"/>
-            <a:ext cx="1016000" cy="177800"/>
-          </a:xfrm>
-          <a:prstGeom prst="rect">
-            <a:avLst/>
-          </a:prstGeom>
-          <a:noFill/>
-          <a:ln/>
-        </p:spPr>
-        <p:txBody>
-          <a:bodyPr wrap="square" lIns="0" tIns="0" rIns="0" bIns="0" rtlCol="0" anchor="ctr"/>
-          <a:lstStyle/>
-          <a:p>
-            <a:pPr algn="l" indent="0" marL="0">
-              <a:buNone/>
-            </a:pPr>
-            <a:r>
-              <a:rPr lang="en-US" sz="1100" dirty="0">
-                <a:solidFill>
-                  <a:srgbClr val="000000"/>
-                </a:solidFill>
-                <a:latin typeface="Arial" pitchFamily="34" charset="0"/>
-                <a:ea typeface="Arial" pitchFamily="34" charset="-122"/>
-                <a:cs typeface="Arial" pitchFamily="34" charset="-120"/>
-              </a:rPr>
-              <a:t>Not &gt; 0 , Not &lt; 0</a:t>
-            </a:r>
-            <a:endParaRPr lang="en-US" sz="1100" dirty="0"/>
-          </a:p>
-        </p:txBody>
-      </p:sp>
-      <p:sp>
-        <p:nvSpPr>
-          <p:cNvPr id="148" name="Text 146"/>
-          <p:cNvSpPr/>
-          <p:nvPr/>
-        </p:nvSpPr>
-        <p:spPr>
-          <a:xfrm>
-            <a:off x="8293100" y="3721100"/>
-            <a:ext cx="889000" cy="177800"/>
-          </a:xfrm>
-          <a:prstGeom prst="rect">
-            <a:avLst/>
-          </a:prstGeom>
-          <a:noFill/>
-          <a:ln/>
-        </p:spPr>
-        <p:txBody>
-          <a:bodyPr wrap="square" lIns="0" tIns="0" rIns="0" bIns="0" rtlCol="0" anchor="ctr"/>
-          <a:lstStyle/>
-          <a:p>
-            <a:pPr algn="l" indent="0" marL="0">
-              <a:buNone/>
-            </a:pPr>
-            <a:r>
-              <a:rPr lang="en-US" sz="1100" b="1" dirty="0">
-                <a:solidFill>
-                  <a:srgbClr val="0000A8"/>
-                </a:solidFill>
-                <a:latin typeface="Arial" pitchFamily="34" charset="0"/>
-                <a:ea typeface="Arial" pitchFamily="34" charset="-122"/>
-                <a:cs typeface="Arial" pitchFamily="34" charset="-120"/>
-              </a:rPr>
-              <a:t>Undefined Class</a:t>
-            </a:r>
-            <a:endParaRPr lang="en-US" sz="1100" dirty="0"/>
           </a:p>
         </p:txBody>
       </p:sp>
